--- a/docs/ir/teraai-rba-investor.pptx
+++ b/docs/ir/teraai-rba-investor.pptx
@@ -2067,7 +2067,7 @@
                 <a:ea typeface="Apple SD Gothic Neo" pitchFamily="34" charset="-122"/>
                 <a:cs typeface="Apple SD Gothic Neo" pitchFamily="34" charset="-120"/>
               </a:rPr>
-              <a:t>단순 펫캠 기능이나 고정 알고리즘이 아니라, 밤사이 영상을 행동 타임라인과 케어 신호로 바꾸는 파충류 특화 AI 분석 엔진.</a:t>
+              <a:t>단순 펫캠 기능이나 고정 알고리즘이 아니라, 밤사이 영상을 행동 타임라인과 아침 활동 보고서로 바꾸는 파충류 특화 AI 분석 엔진.</a:t>
             </a:r>
             <a:endParaRPr lang="en-US" sz="1450" dirty="0"/>
           </a:p>
@@ -2300,7 +2300,7 @@
                 <a:ea typeface="Apple SD Gothic Neo" pitchFamily="34" charset="-122"/>
                 <a:cs typeface="Apple SD Gothic Neo" pitchFamily="34" charset="-120"/>
               </a:rPr>
-              <a:t>밤사이 RTSP 영상을 행동 타임라인과 케어 신호로 바꾸는 AI 분석 시스템의 전체 흐름.</a:t>
+              <a:t>밤사이 RTSP 영상을 행동 타임라인과 아침 활동 보고서로 바꾸는 AI 분석 시스템의 전체 흐름.</a:t>
             </a:r>
             <a:endParaRPr lang="en-US" sz="1450" dirty="0"/>
           </a:p>
@@ -4088,7 +4088,7 @@
                 <a:ea typeface="Apple SD Gothic Neo" pitchFamily="34" charset="-122"/>
                 <a:cs typeface="Apple SD Gothic Neo" pitchFamily="34" charset="-120"/>
               </a:rPr>
-              <a:t>사용자 앱 / 하이라이트</a:t>
+              <a:t>사용자 앱 · 아침 활동 보고서</a:t>
             </a:r>
             <a:endParaRPr lang="en-US" sz="1100" dirty="0"/>
           </a:p>
@@ -4108,7 +4108,7 @@
                 <a:ea typeface="Apple SD Gothic Neo" pitchFamily="34" charset="-122"/>
                 <a:cs typeface="Apple SD Gothic Neo" pitchFamily="34" charset="-120"/>
               </a:rPr>
-              <a:t>밤사이 행동 요약</a:t>
+              <a:t>밤사이 행동을 시간순 정리</a:t>
             </a:r>
             <a:endParaRPr lang="en-US" sz="1100" dirty="0"/>
           </a:p>
@@ -5656,7 +5656,7 @@
                 <a:ea typeface="Apple SD Gothic Neo" pitchFamily="34" charset="-122"/>
                 <a:cs typeface="Apple SD Gothic Neo" pitchFamily="34" charset="-120"/>
               </a:rPr>
-              <a:t>01 · 무엇을 하는가</a:t>
+              <a:t>01 · 분석 파이프라인</a:t>
             </a:r>
             <a:endParaRPr lang="en-US" sz="1250" dirty="0"/>
           </a:p>
@@ -5698,7 +5698,7 @@
                 <a:ea typeface="Apple SD Gothic Neo" pitchFamily="34" charset="-122"/>
                 <a:cs typeface="Apple SD Gothic Neo" pitchFamily="34" charset="-120"/>
               </a:rPr>
-              <a:t>우리는 밤사이 영상을 행동 일지로 바꾼다</a:t>
+              <a:t>RBA 분석 파이프라인 — 영상에서 아침 활동 보고서까지</a:t>
             </a:r>
             <a:endParaRPr lang="en-US" sz="2700" dirty="0"/>
           </a:p>
@@ -5740,7 +5740,7 @@
                 <a:ea typeface="Apple SD Gothic Neo" pitchFamily="34" charset="-122"/>
                 <a:cs typeface="Apple SD Gothic Neo" pitchFamily="34" charset="-120"/>
               </a:rPr>
-              <a:t>Terra AI는 밤사이 펫캠 영상을 AI가 읽을 수 있는 행동 타임라인과 케어 신호로 바꾼다.</a:t>
+              <a:t>밤사이 펫캠 영상을 수집 · 1차 판독 · 정밀 판독 3단계로 처리해, 아침 활동 보고서로 전달한다.</a:t>
             </a:r>
             <a:endParaRPr lang="en-US" sz="1450" dirty="0"/>
           </a:p>
@@ -5793,12 +5793,12 @@
         </p:nvSpPr>
         <p:spPr>
           <a:xfrm>
-            <a:off x="566928" y="2331720"/>
-            <a:ext cx="1883664" cy="1417320"/>
+            <a:off x="566928" y="2103120"/>
+            <a:ext cx="2421560" cy="2286000"/>
           </a:xfrm>
           <a:prstGeom prst="roundRect">
             <a:avLst>
-              <a:gd name="adj" fmla="val 7097"/>
+              <a:gd name="adj" fmla="val 4400"/>
             </a:avLst>
           </a:prstGeom>
           <a:solidFill>
@@ -5811,9 +5811,9 @@
             <a:prstDash val="solid"/>
           </a:ln>
           <a:effectLst>
-            <a:outerShdw sx="100000" sy="100000" kx="0" ky="0" algn="bl" rotWithShape="0" blurRad="88900" dist="25400" dir="5400000">
-              <a:srgbClr val="64748B">
-                <a:alpha val="16000"/>
+            <a:outerShdw sx="100000" sy="100000" kx="0" ky="0" algn="bl" rotWithShape="0" blurRad="114300" dist="38100" dir="5400000">
+              <a:srgbClr val="94A3B8">
+                <a:alpha val="20000"/>
               </a:srgbClr>
             </a:outerShdw>
           </a:effectLst>
@@ -5821,14 +5821,102 @@
       </p:sp>
       <p:sp>
         <p:nvSpPr>
-          <p:cNvPr id="7" name="Text 5"/>
-          <p:cNvSpPr/>
-          <p:nvPr/>
-        </p:nvSpPr>
-        <p:spPr>
-          <a:xfrm>
-            <a:off x="621792" y="2642616"/>
-            <a:ext cx="1773936" cy="457200"/>
+          <p:cNvPr id="7" name="Shape 5"/>
+          <p:cNvSpPr/>
+          <p:nvPr/>
+        </p:nvSpPr>
+        <p:spPr>
+          <a:xfrm>
+            <a:off x="713232" y="2249424"/>
+            <a:ext cx="2128952" cy="365760"/>
+          </a:xfrm>
+          <a:prstGeom prst="roundRect">
+            <a:avLst>
+              <a:gd name="adj" fmla="val 50000"/>
+            </a:avLst>
+          </a:prstGeom>
+          <a:solidFill>
+            <a:srgbClr val="E2E8F0"/>
+          </a:solidFill>
+          <a:ln/>
+        </p:spPr>
+      </p:sp>
+      <p:sp>
+        <p:nvSpPr>
+          <p:cNvPr id="8" name="Text 6"/>
+          <p:cNvSpPr/>
+          <p:nvPr/>
+        </p:nvSpPr>
+        <p:spPr>
+          <a:xfrm>
+            <a:off x="713232" y="2240280"/>
+            <a:ext cx="2128952" cy="365760"/>
+          </a:xfrm>
+          <a:prstGeom prst="rect">
+            <a:avLst/>
+          </a:prstGeom>
+          <a:noFill/>
+          <a:ln/>
+        </p:spPr>
+        <p:txBody>
+          <a:bodyPr wrap="square" lIns="0" tIns="0" rIns="0" bIns="0" rtlCol="0" anchor="ctr"/>
+          <a:lstStyle/>
+          <a:p>
+            <a:pPr algn="ctr" indent="0" marL="0">
+              <a:buNone/>
+            </a:pPr>
+            <a:r>
+              <a:rPr lang="en-US" sz="1050" b="1" dirty="0">
+                <a:solidFill>
+                  <a:srgbClr val="334155"/>
+                </a:solidFill>
+                <a:latin typeface="Apple SD Gothic Neo" pitchFamily="34" charset="0"/>
+                <a:ea typeface="Apple SD Gothic Neo" pitchFamily="34" charset="-122"/>
+                <a:cs typeface="Apple SD Gothic Neo" pitchFamily="34" charset="-120"/>
+              </a:rPr>
+              <a:t>1 · 수집 · 저장</a:t>
+            </a:r>
+            <a:endParaRPr lang="en-US" sz="1050" dirty="0"/>
+          </a:p>
+        </p:txBody>
+      </p:sp>
+      <p:sp>
+        <p:nvSpPr>
+          <p:cNvPr id="9" name="Shape 7"/>
+          <p:cNvSpPr/>
+          <p:nvPr/>
+        </p:nvSpPr>
+        <p:spPr>
+          <a:xfrm>
+            <a:off x="749808" y="2761488"/>
+            <a:ext cx="2055800" cy="548640"/>
+          </a:xfrm>
+          <a:prstGeom prst="roundRect">
+            <a:avLst>
+              <a:gd name="adj" fmla="val 13333"/>
+            </a:avLst>
+          </a:prstGeom>
+          <a:solidFill>
+            <a:srgbClr val="FFFFFF"/>
+          </a:solidFill>
+          <a:ln w="12700">
+            <a:solidFill>
+              <a:srgbClr val="E2E8F0"/>
+            </a:solidFill>
+            <a:prstDash val="solid"/>
+          </a:ln>
+        </p:spPr>
+      </p:sp>
+      <p:sp>
+        <p:nvSpPr>
+          <p:cNvPr id="10" name="Text 8"/>
+          <p:cNvSpPr/>
+          <p:nvPr/>
+        </p:nvSpPr>
+        <p:spPr>
+          <a:xfrm>
+            <a:off x="786384" y="2761488"/>
+            <a:ext cx="1982648" cy="548640"/>
           </a:xfrm>
           <a:prstGeom prst="rect">
             <a:avLst/>
@@ -5847,39 +5935,66 @@
               <a:buNone/>
             </a:pPr>
             <a:r>
-              <a:rPr lang="en-US" sz="1450" b="1" dirty="0">
-                <a:solidFill>
-                  <a:srgbClr val="1E293B"/>
-                </a:solidFill>
-                <a:latin typeface="Apple SD Gothic Neo" pitchFamily="34" charset="0"/>
-                <a:ea typeface="Apple SD Gothic Neo" pitchFamily="34" charset="-122"/>
-                <a:cs typeface="Apple SD Gothic Neo" pitchFamily="34" charset="-120"/>
-              </a:rPr>
-              <a:t>밤사이 영상</a:t>
-            </a:r>
-            <a:endParaRPr lang="en-US" sz="1450" dirty="0"/>
-          </a:p>
-        </p:txBody>
-      </p:sp>
-      <p:sp>
-        <p:nvSpPr>
-          <p:cNvPr id="8" name="Text 6"/>
-          <p:cNvSpPr/>
-          <p:nvPr/>
-        </p:nvSpPr>
-        <p:spPr>
-          <a:xfrm>
-            <a:off x="621792" y="3118104"/>
-            <a:ext cx="1773936" cy="411480"/>
-          </a:xfrm>
-          <a:prstGeom prst="rect">
-            <a:avLst/>
-          </a:prstGeom>
-          <a:noFill/>
-          <a:ln/>
-        </p:spPr>
-        <p:txBody>
-          <a:bodyPr wrap="square" lIns="0" tIns="0" rIns="0" bIns="0" rtlCol="0" anchor="t"/>
+              <a:rPr lang="en-US" sz="1080" b="1" dirty="0">
+                <a:solidFill>
+                  <a:srgbClr val="334155"/>
+                </a:solidFill>
+                <a:latin typeface="Apple SD Gothic Neo" pitchFamily="34" charset="0"/>
+                <a:ea typeface="Apple SD Gothic Neo" pitchFamily="34" charset="-122"/>
+                <a:cs typeface="Apple SD Gothic Neo" pitchFamily="34" charset="-120"/>
+              </a:rPr>
+              <a:t>카메라 · 밤사이 RTSP</a:t>
+            </a:r>
+            <a:endParaRPr lang="en-US" sz="1080" dirty="0"/>
+          </a:p>
+        </p:txBody>
+      </p:sp>
+      <p:sp>
+        <p:nvSpPr>
+          <p:cNvPr id="11" name="Shape 9"/>
+          <p:cNvSpPr/>
+          <p:nvPr/>
+        </p:nvSpPr>
+        <p:spPr>
+          <a:xfrm>
+            <a:off x="749808" y="3584448"/>
+            <a:ext cx="2055800" cy="548640"/>
+          </a:xfrm>
+          <a:prstGeom prst="roundRect">
+            <a:avLst>
+              <a:gd name="adj" fmla="val 13333"/>
+            </a:avLst>
+          </a:prstGeom>
+          <a:solidFill>
+            <a:srgbClr val="FFFFFF"/>
+          </a:solidFill>
+          <a:ln w="12700">
+            <a:solidFill>
+              <a:srgbClr val="E2E8F0"/>
+            </a:solidFill>
+            <a:prstDash val="solid"/>
+          </a:ln>
+        </p:spPr>
+      </p:sp>
+      <p:sp>
+        <p:nvSpPr>
+          <p:cNvPr id="12" name="Text 10"/>
+          <p:cNvSpPr/>
+          <p:nvPr/>
+        </p:nvSpPr>
+        <p:spPr>
+          <a:xfrm>
+            <a:off x="786384" y="3584448"/>
+            <a:ext cx="1982648" cy="548640"/>
+          </a:xfrm>
+          <a:prstGeom prst="rect">
+            <a:avLst/>
+          </a:prstGeom>
+          <a:noFill/>
+          <a:ln/>
+        </p:spPr>
+        <p:txBody>
+          <a:bodyPr wrap="square" lIns="0" tIns="0" rIns="0" bIns="0" rtlCol="0" anchor="ctr"/>
           <a:lstStyle/>
           <a:p>
             <a:pPr algn="ctr" indent="0" marL="0">
@@ -5889,30 +6004,30 @@
               <a:buNone/>
             </a:pPr>
             <a:r>
-              <a:rPr lang="en-US" sz="1050" dirty="0">
-                <a:solidFill>
-                  <a:srgbClr val="64748B"/>
-                </a:solidFill>
-                <a:latin typeface="Apple SD Gothic Neo" pitchFamily="34" charset="0"/>
-                <a:ea typeface="Apple SD Gothic Neo" pitchFamily="34" charset="-122"/>
-                <a:cs typeface="Apple SD Gothic Neo" pitchFamily="34" charset="-120"/>
-              </a:rPr>
-              <a:t>카메라·자체 HW</a:t>
-            </a:r>
-            <a:endParaRPr lang="en-US" sz="1050" dirty="0"/>
-          </a:p>
-        </p:txBody>
-      </p:sp>
-      <p:sp>
-        <p:nvSpPr>
-          <p:cNvPr id="9" name="Text 7"/>
-          <p:cNvSpPr/>
-          <p:nvPr/>
-        </p:nvSpPr>
-        <p:spPr>
-          <a:xfrm>
-            <a:off x="2450592" y="2857500"/>
-            <a:ext cx="409880" cy="365760"/>
+              <a:rPr lang="en-US" sz="1080" b="1" dirty="0">
+                <a:solidFill>
+                  <a:srgbClr val="334155"/>
+                </a:solidFill>
+                <a:latin typeface="Apple SD Gothic Neo" pitchFamily="34" charset="0"/>
+                <a:ea typeface="Apple SD Gothic Neo" pitchFamily="34" charset="-122"/>
+                <a:cs typeface="Apple SD Gothic Neo" pitchFamily="34" charset="-120"/>
+              </a:rPr>
+              <a:t>움직임 클립 선별 (Motion)</a:t>
+            </a:r>
+            <a:endParaRPr lang="en-US" sz="1080" dirty="0"/>
+          </a:p>
+        </p:txBody>
+      </p:sp>
+      <p:sp>
+        <p:nvSpPr>
+          <p:cNvPr id="13" name="Text 11"/>
+          <p:cNvSpPr/>
+          <p:nvPr/>
+        </p:nvSpPr>
+        <p:spPr>
+          <a:xfrm>
+            <a:off x="1594828" y="3291840"/>
+            <a:ext cx="365760" cy="292608"/>
           </a:xfrm>
           <a:prstGeom prst="rect">
             <a:avLst/>
@@ -5928,6 +6043,45 @@
               <a:buNone/>
             </a:pPr>
             <a:r>
+              <a:rPr lang="en-US" sz="1500" b="1" dirty="0">
+                <a:solidFill>
+                  <a:srgbClr val="CBD5E1"/>
+                </a:solidFill>
+                <a:latin typeface="Apple SD Gothic Neo" pitchFamily="34" charset="0"/>
+                <a:ea typeface="Apple SD Gothic Neo" pitchFamily="34" charset="-122"/>
+                <a:cs typeface="Apple SD Gothic Neo" pitchFamily="34" charset="-120"/>
+              </a:rPr>
+              <a:t>↓</a:t>
+            </a:r>
+            <a:endParaRPr lang="en-US" sz="1500" dirty="0"/>
+          </a:p>
+        </p:txBody>
+      </p:sp>
+      <p:sp>
+        <p:nvSpPr>
+          <p:cNvPr id="14" name="Text 12"/>
+          <p:cNvSpPr/>
+          <p:nvPr/>
+        </p:nvSpPr>
+        <p:spPr>
+          <a:xfrm>
+            <a:off x="2988488" y="3044952"/>
+            <a:ext cx="457200" cy="402336"/>
+          </a:xfrm>
+          <a:prstGeom prst="rect">
+            <a:avLst/>
+          </a:prstGeom>
+          <a:noFill/>
+          <a:ln/>
+        </p:spPr>
+        <p:txBody>
+          <a:bodyPr wrap="square" lIns="0" tIns="0" rIns="0" bIns="0" rtlCol="0" anchor="ctr"/>
+          <a:lstStyle/>
+          <a:p>
+            <a:pPr algn="ctr" indent="0" marL="0">
+              <a:buNone/>
+            </a:pPr>
+            <a:r>
               <a:rPr lang="en-US" sz="2200" b="1" dirty="0">
                 <a:solidFill>
                   <a:srgbClr val="CBD5E1"/>
@@ -5944,18 +6098,640 @@
       </p:sp>
       <p:sp>
         <p:nvSpPr>
-          <p:cNvPr id="10" name="Shape 8"/>
-          <p:cNvSpPr/>
-          <p:nvPr/>
-        </p:nvSpPr>
-        <p:spPr>
-          <a:xfrm>
-            <a:off x="2860472" y="2331720"/>
-            <a:ext cx="1883664" cy="1417320"/>
+          <p:cNvPr id="15" name="Shape 13"/>
+          <p:cNvSpPr/>
+          <p:nvPr/>
+        </p:nvSpPr>
+        <p:spPr>
+          <a:xfrm>
+            <a:off x="3445688" y="2103120"/>
+            <a:ext cx="2421560" cy="2286000"/>
           </a:xfrm>
           <a:prstGeom prst="roundRect">
             <a:avLst>
-              <a:gd name="adj" fmla="val 7097"/>
+              <a:gd name="adj" fmla="val 4400"/>
+            </a:avLst>
+          </a:prstGeom>
+          <a:solidFill>
+            <a:srgbClr val="FEF9EC"/>
+          </a:solidFill>
+          <a:ln w="12700">
+            <a:solidFill>
+              <a:srgbClr val="FCD34D"/>
+            </a:solidFill>
+            <a:prstDash val="solid"/>
+          </a:ln>
+          <a:effectLst>
+            <a:outerShdw sx="100000" sy="100000" kx="0" ky="0" algn="bl" rotWithShape="0" blurRad="114300" dist="38100" dir="5400000">
+              <a:srgbClr val="94A3B8">
+                <a:alpha val="20000"/>
+              </a:srgbClr>
+            </a:outerShdw>
+          </a:effectLst>
+        </p:spPr>
+      </p:sp>
+      <p:sp>
+        <p:nvSpPr>
+          <p:cNvPr id="16" name="Shape 14"/>
+          <p:cNvSpPr/>
+          <p:nvPr/>
+        </p:nvSpPr>
+        <p:spPr>
+          <a:xfrm>
+            <a:off x="3591992" y="2249424"/>
+            <a:ext cx="2128952" cy="365760"/>
+          </a:xfrm>
+          <a:prstGeom prst="roundRect">
+            <a:avLst>
+              <a:gd name="adj" fmla="val 50000"/>
+            </a:avLst>
+          </a:prstGeom>
+          <a:solidFill>
+            <a:srgbClr val="FEF3C7"/>
+          </a:solidFill>
+          <a:ln/>
+        </p:spPr>
+      </p:sp>
+      <p:sp>
+        <p:nvSpPr>
+          <p:cNvPr id="17" name="Text 15"/>
+          <p:cNvSpPr/>
+          <p:nvPr/>
+        </p:nvSpPr>
+        <p:spPr>
+          <a:xfrm>
+            <a:off x="3591992" y="2240280"/>
+            <a:ext cx="2128952" cy="365760"/>
+          </a:xfrm>
+          <a:prstGeom prst="rect">
+            <a:avLst/>
+          </a:prstGeom>
+          <a:noFill/>
+          <a:ln/>
+        </p:spPr>
+        <p:txBody>
+          <a:bodyPr wrap="square" lIns="0" tIns="0" rIns="0" bIns="0" rtlCol="0" anchor="ctr"/>
+          <a:lstStyle/>
+          <a:p>
+            <a:pPr algn="ctr" indent="0" marL="0">
+              <a:buNone/>
+            </a:pPr>
+            <a:r>
+              <a:rPr lang="en-US" sz="1050" b="1" dirty="0">
+                <a:solidFill>
+                  <a:srgbClr val="92400E"/>
+                </a:solidFill>
+                <a:latin typeface="Apple SD Gothic Neo" pitchFamily="34" charset="0"/>
+                <a:ea typeface="Apple SD Gothic Neo" pitchFamily="34" charset="-122"/>
+                <a:cs typeface="Apple SD Gothic Neo" pitchFamily="34" charset="-120"/>
+              </a:rPr>
+              <a:t>2 · Track A · 1차 판독</a:t>
+            </a:r>
+            <a:endParaRPr lang="en-US" sz="1050" dirty="0"/>
+          </a:p>
+        </p:txBody>
+      </p:sp>
+      <p:sp>
+        <p:nvSpPr>
+          <p:cNvPr id="18" name="Shape 16"/>
+          <p:cNvSpPr/>
+          <p:nvPr/>
+        </p:nvSpPr>
+        <p:spPr>
+          <a:xfrm>
+            <a:off x="3628568" y="2761488"/>
+            <a:ext cx="2055800" cy="548640"/>
+          </a:xfrm>
+          <a:prstGeom prst="roundRect">
+            <a:avLst>
+              <a:gd name="adj" fmla="val 13333"/>
+            </a:avLst>
+          </a:prstGeom>
+          <a:solidFill>
+            <a:srgbClr val="FFFFFF"/>
+          </a:solidFill>
+          <a:ln w="12700">
+            <a:solidFill>
+              <a:srgbClr val="E2E8F0"/>
+            </a:solidFill>
+            <a:prstDash val="solid"/>
+          </a:ln>
+        </p:spPr>
+      </p:sp>
+      <p:sp>
+        <p:nvSpPr>
+          <p:cNvPr id="19" name="Text 17"/>
+          <p:cNvSpPr/>
+          <p:nvPr/>
+        </p:nvSpPr>
+        <p:spPr>
+          <a:xfrm>
+            <a:off x="3665144" y="2761488"/>
+            <a:ext cx="1982648" cy="548640"/>
+          </a:xfrm>
+          <a:prstGeom prst="rect">
+            <a:avLst/>
+          </a:prstGeom>
+          <a:noFill/>
+          <a:ln/>
+        </p:spPr>
+        <p:txBody>
+          <a:bodyPr wrap="square" lIns="0" tIns="0" rIns="0" bIns="0" rtlCol="0" anchor="ctr"/>
+          <a:lstStyle/>
+          <a:p>
+            <a:pPr algn="ctr" indent="0" marL="0">
+              <a:lnSpc>
+                <a:spcPct val="100000"/>
+              </a:lnSpc>
+              <a:buNone/>
+            </a:pPr>
+            <a:r>
+              <a:rPr lang="en-US" sz="1080" b="1" dirty="0">
+                <a:solidFill>
+                  <a:srgbClr val="92400E"/>
+                </a:solidFill>
+                <a:latin typeface="Apple SD Gothic Neo" pitchFamily="34" charset="0"/>
+                <a:ea typeface="Apple SD Gothic Neo" pitchFamily="34" charset="-122"/>
+                <a:cs typeface="Apple SD Gothic Neo" pitchFamily="34" charset="-120"/>
+              </a:rPr>
+              <a:t>Zero-shot VLM 전수 판독</a:t>
+            </a:r>
+            <a:endParaRPr lang="en-US" sz="1080" dirty="0"/>
+          </a:p>
+        </p:txBody>
+      </p:sp>
+      <p:sp>
+        <p:nvSpPr>
+          <p:cNvPr id="20" name="Shape 18"/>
+          <p:cNvSpPr/>
+          <p:nvPr/>
+        </p:nvSpPr>
+        <p:spPr>
+          <a:xfrm>
+            <a:off x="3628568" y="3584448"/>
+            <a:ext cx="2055800" cy="548640"/>
+          </a:xfrm>
+          <a:prstGeom prst="roundRect">
+            <a:avLst>
+              <a:gd name="adj" fmla="val 13333"/>
+            </a:avLst>
+          </a:prstGeom>
+          <a:solidFill>
+            <a:srgbClr val="FFFFFF"/>
+          </a:solidFill>
+          <a:ln w="12700">
+            <a:solidFill>
+              <a:srgbClr val="E2E8F0"/>
+            </a:solidFill>
+            <a:prstDash val="solid"/>
+          </a:ln>
+        </p:spPr>
+      </p:sp>
+      <p:sp>
+        <p:nvSpPr>
+          <p:cNvPr id="21" name="Text 19"/>
+          <p:cNvSpPr/>
+          <p:nvPr/>
+        </p:nvSpPr>
+        <p:spPr>
+          <a:xfrm>
+            <a:off x="3665144" y="3584448"/>
+            <a:ext cx="1982648" cy="548640"/>
+          </a:xfrm>
+          <a:prstGeom prst="rect">
+            <a:avLst/>
+          </a:prstGeom>
+          <a:noFill/>
+          <a:ln/>
+        </p:spPr>
+        <p:txBody>
+          <a:bodyPr wrap="square" lIns="0" tIns="0" rIns="0" bIns="0" rtlCol="0" anchor="ctr"/>
+          <a:lstStyle/>
+          <a:p>
+            <a:pPr algn="ctr" indent="0" marL="0">
+              <a:lnSpc>
+                <a:spcPct val="100000"/>
+              </a:lnSpc>
+              <a:buNone/>
+            </a:pPr>
+            <a:r>
+              <a:rPr lang="en-US" sz="1080" b="1" dirty="0">
+                <a:solidFill>
+                  <a:srgbClr val="92400E"/>
+                </a:solidFill>
+                <a:latin typeface="Apple SD Gothic Neo" pitchFamily="34" charset="0"/>
+                <a:ea typeface="Apple SD Gothic Neo" pitchFamily="34" charset="-122"/>
+                <a:cs typeface="Apple SD Gothic Neo" pitchFamily="34" charset="-120"/>
+              </a:rPr>
+              <a:t>행동 라벨 + 자기확신 점수</a:t>
+            </a:r>
+            <a:endParaRPr lang="en-US" sz="1080" dirty="0"/>
+          </a:p>
+        </p:txBody>
+      </p:sp>
+      <p:sp>
+        <p:nvSpPr>
+          <p:cNvPr id="22" name="Text 20"/>
+          <p:cNvSpPr/>
+          <p:nvPr/>
+        </p:nvSpPr>
+        <p:spPr>
+          <a:xfrm>
+            <a:off x="4473588" y="3291840"/>
+            <a:ext cx="365760" cy="292608"/>
+          </a:xfrm>
+          <a:prstGeom prst="rect">
+            <a:avLst/>
+          </a:prstGeom>
+          <a:noFill/>
+          <a:ln/>
+        </p:spPr>
+        <p:txBody>
+          <a:bodyPr wrap="square" lIns="0" tIns="0" rIns="0" bIns="0" rtlCol="0" anchor="ctr"/>
+          <a:lstStyle/>
+          <a:p>
+            <a:pPr algn="ctr" indent="0" marL="0">
+              <a:buNone/>
+            </a:pPr>
+            <a:r>
+              <a:rPr lang="en-US" sz="1500" b="1" dirty="0">
+                <a:solidFill>
+                  <a:srgbClr val="CBD5E1"/>
+                </a:solidFill>
+                <a:latin typeface="Apple SD Gothic Neo" pitchFamily="34" charset="0"/>
+                <a:ea typeface="Apple SD Gothic Neo" pitchFamily="34" charset="-122"/>
+                <a:cs typeface="Apple SD Gothic Neo" pitchFamily="34" charset="-120"/>
+              </a:rPr>
+              <a:t>↓</a:t>
+            </a:r>
+            <a:endParaRPr lang="en-US" sz="1500" dirty="0"/>
+          </a:p>
+        </p:txBody>
+      </p:sp>
+      <p:sp>
+        <p:nvSpPr>
+          <p:cNvPr id="23" name="Text 21"/>
+          <p:cNvSpPr/>
+          <p:nvPr/>
+        </p:nvSpPr>
+        <p:spPr>
+          <a:xfrm>
+            <a:off x="5867248" y="3044952"/>
+            <a:ext cx="457200" cy="402336"/>
+          </a:xfrm>
+          <a:prstGeom prst="rect">
+            <a:avLst/>
+          </a:prstGeom>
+          <a:noFill/>
+          <a:ln/>
+        </p:spPr>
+        <p:txBody>
+          <a:bodyPr wrap="square" lIns="0" tIns="0" rIns="0" bIns="0" rtlCol="0" anchor="ctr"/>
+          <a:lstStyle/>
+          <a:p>
+            <a:pPr algn="ctr" indent="0" marL="0">
+              <a:buNone/>
+            </a:pPr>
+            <a:r>
+              <a:rPr lang="en-US" sz="2200" b="1" dirty="0">
+                <a:solidFill>
+                  <a:srgbClr val="CBD5E1"/>
+                </a:solidFill>
+                <a:latin typeface="Apple SD Gothic Neo" pitchFamily="34" charset="0"/>
+                <a:ea typeface="Apple SD Gothic Neo" pitchFamily="34" charset="-122"/>
+                <a:cs typeface="Apple SD Gothic Neo" pitchFamily="34" charset="-120"/>
+              </a:rPr>
+              <a:t>→</a:t>
+            </a:r>
+            <a:endParaRPr lang="en-US" sz="2200" dirty="0"/>
+          </a:p>
+        </p:txBody>
+      </p:sp>
+      <p:sp>
+        <p:nvSpPr>
+          <p:cNvPr id="24" name="Shape 22"/>
+          <p:cNvSpPr/>
+          <p:nvPr/>
+        </p:nvSpPr>
+        <p:spPr>
+          <a:xfrm>
+            <a:off x="6324448" y="2103120"/>
+            <a:ext cx="2421560" cy="2286000"/>
+          </a:xfrm>
+          <a:prstGeom prst="roundRect">
+            <a:avLst>
+              <a:gd name="adj" fmla="val 4400"/>
+            </a:avLst>
+          </a:prstGeom>
+          <a:solidFill>
+            <a:srgbClr val="F5F3FF"/>
+          </a:solidFill>
+          <a:ln w="12700">
+            <a:solidFill>
+              <a:srgbClr val="C4B5FD"/>
+            </a:solidFill>
+            <a:prstDash val="solid"/>
+          </a:ln>
+          <a:effectLst>
+            <a:outerShdw sx="100000" sy="100000" kx="0" ky="0" algn="bl" rotWithShape="0" blurRad="114300" dist="38100" dir="5400000">
+              <a:srgbClr val="94A3B8">
+                <a:alpha val="20000"/>
+              </a:srgbClr>
+            </a:outerShdw>
+          </a:effectLst>
+        </p:spPr>
+      </p:sp>
+      <p:sp>
+        <p:nvSpPr>
+          <p:cNvPr id="25" name="Shape 23"/>
+          <p:cNvSpPr/>
+          <p:nvPr/>
+        </p:nvSpPr>
+        <p:spPr>
+          <a:xfrm>
+            <a:off x="6470752" y="2249424"/>
+            <a:ext cx="2128952" cy="365760"/>
+          </a:xfrm>
+          <a:prstGeom prst="roundRect">
+            <a:avLst>
+              <a:gd name="adj" fmla="val 50000"/>
+            </a:avLst>
+          </a:prstGeom>
+          <a:solidFill>
+            <a:srgbClr val="EDE9FE"/>
+          </a:solidFill>
+          <a:ln/>
+        </p:spPr>
+      </p:sp>
+      <p:sp>
+        <p:nvSpPr>
+          <p:cNvPr id="26" name="Text 24"/>
+          <p:cNvSpPr/>
+          <p:nvPr/>
+        </p:nvSpPr>
+        <p:spPr>
+          <a:xfrm>
+            <a:off x="6470752" y="2240280"/>
+            <a:ext cx="2128952" cy="365760"/>
+          </a:xfrm>
+          <a:prstGeom prst="rect">
+            <a:avLst/>
+          </a:prstGeom>
+          <a:noFill/>
+          <a:ln/>
+        </p:spPr>
+        <p:txBody>
+          <a:bodyPr wrap="square" lIns="0" tIns="0" rIns="0" bIns="0" rtlCol="0" anchor="ctr"/>
+          <a:lstStyle/>
+          <a:p>
+            <a:pPr algn="ctr" indent="0" marL="0">
+              <a:buNone/>
+            </a:pPr>
+            <a:r>
+              <a:rPr lang="en-US" sz="1050" b="1" dirty="0">
+                <a:solidFill>
+                  <a:srgbClr val="7C3AED"/>
+                </a:solidFill>
+                <a:latin typeface="Apple SD Gothic Neo" pitchFamily="34" charset="0"/>
+                <a:ea typeface="Apple SD Gothic Neo" pitchFamily="34" charset="-122"/>
+                <a:cs typeface="Apple SD Gothic Neo" pitchFamily="34" charset="-120"/>
+              </a:rPr>
+              <a:t>3 · Track B · 정밀 판독</a:t>
+            </a:r>
+            <a:endParaRPr lang="en-US" sz="1050" dirty="0"/>
+          </a:p>
+        </p:txBody>
+      </p:sp>
+      <p:sp>
+        <p:nvSpPr>
+          <p:cNvPr id="27" name="Shape 25"/>
+          <p:cNvSpPr/>
+          <p:nvPr/>
+        </p:nvSpPr>
+        <p:spPr>
+          <a:xfrm>
+            <a:off x="6507328" y="2761488"/>
+            <a:ext cx="2055800" cy="548640"/>
+          </a:xfrm>
+          <a:prstGeom prst="roundRect">
+            <a:avLst>
+              <a:gd name="adj" fmla="val 13333"/>
+            </a:avLst>
+          </a:prstGeom>
+          <a:solidFill>
+            <a:srgbClr val="FFFFFF"/>
+          </a:solidFill>
+          <a:ln w="12700">
+            <a:solidFill>
+              <a:srgbClr val="E2E8F0"/>
+            </a:solidFill>
+            <a:prstDash val="solid"/>
+          </a:ln>
+        </p:spPr>
+      </p:sp>
+      <p:sp>
+        <p:nvSpPr>
+          <p:cNvPr id="28" name="Text 26"/>
+          <p:cNvSpPr/>
+          <p:nvPr/>
+        </p:nvSpPr>
+        <p:spPr>
+          <a:xfrm>
+            <a:off x="6543904" y="2761488"/>
+            <a:ext cx="1982648" cy="548640"/>
+          </a:xfrm>
+          <a:prstGeom prst="rect">
+            <a:avLst/>
+          </a:prstGeom>
+          <a:noFill/>
+          <a:ln/>
+        </p:spPr>
+        <p:txBody>
+          <a:bodyPr wrap="square" lIns="0" tIns="0" rIns="0" bIns="0" rtlCol="0" anchor="ctr"/>
+          <a:lstStyle/>
+          <a:p>
+            <a:pPr algn="ctr" indent="0" marL="0">
+              <a:lnSpc>
+                <a:spcPct val="100000"/>
+              </a:lnSpc>
+              <a:buNone/>
+            </a:pPr>
+            <a:r>
+              <a:rPr lang="en-US" sz="1080" b="1" dirty="0">
+                <a:solidFill>
+                  <a:srgbClr val="7C3AED"/>
+                </a:solidFill>
+                <a:latin typeface="Apple SD Gothic Neo" pitchFamily="34" charset="0"/>
+                <a:ea typeface="Apple SD Gothic Neo" pitchFamily="34" charset="-122"/>
+                <a:cs typeface="Apple SD Gothic Neo" pitchFamily="34" charset="-120"/>
+              </a:rPr>
+              <a:t>애매·중요 장면만 재분석</a:t>
+            </a:r>
+            <a:endParaRPr lang="en-US" sz="1080" dirty="0"/>
+          </a:p>
+        </p:txBody>
+      </p:sp>
+      <p:sp>
+        <p:nvSpPr>
+          <p:cNvPr id="29" name="Shape 27"/>
+          <p:cNvSpPr/>
+          <p:nvPr/>
+        </p:nvSpPr>
+        <p:spPr>
+          <a:xfrm>
+            <a:off x="6507328" y="3584448"/>
+            <a:ext cx="2055800" cy="548640"/>
+          </a:xfrm>
+          <a:prstGeom prst="roundRect">
+            <a:avLst>
+              <a:gd name="adj" fmla="val 13333"/>
+            </a:avLst>
+          </a:prstGeom>
+          <a:solidFill>
+            <a:srgbClr val="FFFFFF"/>
+          </a:solidFill>
+          <a:ln w="12700">
+            <a:solidFill>
+              <a:srgbClr val="E2E8F0"/>
+            </a:solidFill>
+            <a:prstDash val="solid"/>
+          </a:ln>
+        </p:spPr>
+      </p:sp>
+      <p:sp>
+        <p:nvSpPr>
+          <p:cNvPr id="30" name="Text 28"/>
+          <p:cNvSpPr/>
+          <p:nvPr/>
+        </p:nvSpPr>
+        <p:spPr>
+          <a:xfrm>
+            <a:off x="6543904" y="3584448"/>
+            <a:ext cx="1982648" cy="548640"/>
+          </a:xfrm>
+          <a:prstGeom prst="rect">
+            <a:avLst/>
+          </a:prstGeom>
+          <a:noFill/>
+          <a:ln/>
+        </p:spPr>
+        <p:txBody>
+          <a:bodyPr wrap="square" lIns="0" tIns="0" rIns="0" bIns="0" rtlCol="0" anchor="ctr"/>
+          <a:lstStyle/>
+          <a:p>
+            <a:pPr algn="ctr" indent="0" marL="0">
+              <a:lnSpc>
+                <a:spcPct val="100000"/>
+              </a:lnSpc>
+              <a:buNone/>
+            </a:pPr>
+            <a:r>
+              <a:rPr lang="en-US" sz="1080" b="1" dirty="0">
+                <a:solidFill>
+                  <a:srgbClr val="7C3AED"/>
+                </a:solidFill>
+                <a:latin typeface="Apple SD Gothic Neo" pitchFamily="34" charset="0"/>
+                <a:ea typeface="Apple SD Gothic Neo" pitchFamily="34" charset="-122"/>
+                <a:cs typeface="Apple SD Gothic Neo" pitchFamily="34" charset="-120"/>
+              </a:rPr>
+              <a:t>시간·위치·움직임 증거 결합</a:t>
+            </a:r>
+            <a:endParaRPr lang="en-US" sz="1080" dirty="0"/>
+          </a:p>
+        </p:txBody>
+      </p:sp>
+      <p:sp>
+        <p:nvSpPr>
+          <p:cNvPr id="31" name="Text 29"/>
+          <p:cNvSpPr/>
+          <p:nvPr/>
+        </p:nvSpPr>
+        <p:spPr>
+          <a:xfrm>
+            <a:off x="7352348" y="3291840"/>
+            <a:ext cx="365760" cy="292608"/>
+          </a:xfrm>
+          <a:prstGeom prst="rect">
+            <a:avLst/>
+          </a:prstGeom>
+          <a:noFill/>
+          <a:ln/>
+        </p:spPr>
+        <p:txBody>
+          <a:bodyPr wrap="square" lIns="0" tIns="0" rIns="0" bIns="0" rtlCol="0" anchor="ctr"/>
+          <a:lstStyle/>
+          <a:p>
+            <a:pPr algn="ctr" indent="0" marL="0">
+              <a:buNone/>
+            </a:pPr>
+            <a:r>
+              <a:rPr lang="en-US" sz="1500" b="1" dirty="0">
+                <a:solidFill>
+                  <a:srgbClr val="CBD5E1"/>
+                </a:solidFill>
+                <a:latin typeface="Apple SD Gothic Neo" pitchFamily="34" charset="0"/>
+                <a:ea typeface="Apple SD Gothic Neo" pitchFamily="34" charset="-122"/>
+                <a:cs typeface="Apple SD Gothic Neo" pitchFamily="34" charset="-120"/>
+              </a:rPr>
+              <a:t>↓</a:t>
+            </a:r>
+            <a:endParaRPr lang="en-US" sz="1500" dirty="0"/>
+          </a:p>
+        </p:txBody>
+      </p:sp>
+      <p:sp>
+        <p:nvSpPr>
+          <p:cNvPr id="32" name="Text 30"/>
+          <p:cNvSpPr/>
+          <p:nvPr/>
+        </p:nvSpPr>
+        <p:spPr>
+          <a:xfrm>
+            <a:off x="8746007" y="3044952"/>
+            <a:ext cx="457200" cy="402336"/>
+          </a:xfrm>
+          <a:prstGeom prst="rect">
+            <a:avLst/>
+          </a:prstGeom>
+          <a:noFill/>
+          <a:ln/>
+        </p:spPr>
+        <p:txBody>
+          <a:bodyPr wrap="square" lIns="0" tIns="0" rIns="0" bIns="0" rtlCol="0" anchor="ctr"/>
+          <a:lstStyle/>
+          <a:p>
+            <a:pPr algn="ctr" indent="0" marL="0">
+              <a:buNone/>
+            </a:pPr>
+            <a:r>
+              <a:rPr lang="en-US" sz="2200" b="1" dirty="0">
+                <a:solidFill>
+                  <a:srgbClr val="CBD5E1"/>
+                </a:solidFill>
+                <a:latin typeface="Apple SD Gothic Neo" pitchFamily="34" charset="0"/>
+                <a:ea typeface="Apple SD Gothic Neo" pitchFamily="34" charset="-122"/>
+                <a:cs typeface="Apple SD Gothic Neo" pitchFamily="34" charset="-120"/>
+              </a:rPr>
+              <a:t>→</a:t>
+            </a:r>
+            <a:endParaRPr lang="en-US" sz="2200" dirty="0"/>
+          </a:p>
+        </p:txBody>
+      </p:sp>
+      <p:sp>
+        <p:nvSpPr>
+          <p:cNvPr id="33" name="Shape 31"/>
+          <p:cNvSpPr/>
+          <p:nvPr/>
+        </p:nvSpPr>
+        <p:spPr>
+          <a:xfrm>
+            <a:off x="9203207" y="2103120"/>
+            <a:ext cx="2421560" cy="2286000"/>
+          </a:xfrm>
+          <a:prstGeom prst="roundRect">
+            <a:avLst>
+              <a:gd name="adj" fmla="val 4400"/>
             </a:avLst>
           </a:prstGeom>
           <a:solidFill>
@@ -5968,9 +6744,9 @@
             <a:prstDash val="solid"/>
           </a:ln>
           <a:effectLst>
-            <a:outerShdw sx="100000" sy="100000" kx="0" ky="0" algn="bl" rotWithShape="0" blurRad="88900" dist="25400" dir="5400000">
-              <a:srgbClr val="64748B">
-                <a:alpha val="16000"/>
+            <a:outerShdw sx="100000" sy="100000" kx="0" ky="0" algn="bl" rotWithShape="0" blurRad="114300" dist="38100" dir="5400000">
+              <a:srgbClr val="94A3B8">
+                <a:alpha val="20000"/>
               </a:srgbClr>
             </a:outerShdw>
           </a:effectLst>
@@ -5978,14 +6754,102 @@
       </p:sp>
       <p:sp>
         <p:nvSpPr>
-          <p:cNvPr id="11" name="Text 9"/>
-          <p:cNvSpPr/>
-          <p:nvPr/>
-        </p:nvSpPr>
-        <p:spPr>
-          <a:xfrm>
-            <a:off x="2915336" y="2642616"/>
-            <a:ext cx="1773936" cy="457200"/>
+          <p:cNvPr id="34" name="Shape 32"/>
+          <p:cNvSpPr/>
+          <p:nvPr/>
+        </p:nvSpPr>
+        <p:spPr>
+          <a:xfrm>
+            <a:off x="9349511" y="2249424"/>
+            <a:ext cx="2128952" cy="365760"/>
+          </a:xfrm>
+          <a:prstGeom prst="roundRect">
+            <a:avLst>
+              <a:gd name="adj" fmla="val 50000"/>
+            </a:avLst>
+          </a:prstGeom>
+          <a:solidFill>
+            <a:srgbClr val="D1FAE5"/>
+          </a:solidFill>
+          <a:ln/>
+        </p:spPr>
+      </p:sp>
+      <p:sp>
+        <p:nvSpPr>
+          <p:cNvPr id="35" name="Text 33"/>
+          <p:cNvSpPr/>
+          <p:nvPr/>
+        </p:nvSpPr>
+        <p:spPr>
+          <a:xfrm>
+            <a:off x="9349511" y="2240280"/>
+            <a:ext cx="2128952" cy="365760"/>
+          </a:xfrm>
+          <a:prstGeom prst="rect">
+            <a:avLst/>
+          </a:prstGeom>
+          <a:noFill/>
+          <a:ln/>
+        </p:spPr>
+        <p:txBody>
+          <a:bodyPr wrap="square" lIns="0" tIns="0" rIns="0" bIns="0" rtlCol="0" anchor="ctr"/>
+          <a:lstStyle/>
+          <a:p>
+            <a:pPr algn="ctr" indent="0" marL="0">
+              <a:buNone/>
+            </a:pPr>
+            <a:r>
+              <a:rPr lang="en-US" sz="1050" b="1" dirty="0">
+                <a:solidFill>
+                  <a:srgbClr val="047857"/>
+                </a:solidFill>
+                <a:latin typeface="Apple SD Gothic Neo" pitchFamily="34" charset="0"/>
+                <a:ea typeface="Apple SD Gothic Neo" pitchFamily="34" charset="-122"/>
+                <a:cs typeface="Apple SD Gothic Neo" pitchFamily="34" charset="-120"/>
+              </a:rPr>
+              <a:t>4 · 아침 활동 보고서</a:t>
+            </a:r>
+            <a:endParaRPr lang="en-US" sz="1050" dirty="0"/>
+          </a:p>
+        </p:txBody>
+      </p:sp>
+      <p:sp>
+        <p:nvSpPr>
+          <p:cNvPr id="36" name="Shape 34"/>
+          <p:cNvSpPr/>
+          <p:nvPr/>
+        </p:nvSpPr>
+        <p:spPr>
+          <a:xfrm>
+            <a:off x="9386087" y="2761488"/>
+            <a:ext cx="2055800" cy="548640"/>
+          </a:xfrm>
+          <a:prstGeom prst="roundRect">
+            <a:avLst>
+              <a:gd name="adj" fmla="val 13333"/>
+            </a:avLst>
+          </a:prstGeom>
+          <a:solidFill>
+            <a:srgbClr val="FFFFFF"/>
+          </a:solidFill>
+          <a:ln w="12700">
+            <a:solidFill>
+              <a:srgbClr val="E2E8F0"/>
+            </a:solidFill>
+            <a:prstDash val="solid"/>
+          </a:ln>
+        </p:spPr>
+      </p:sp>
+      <p:sp>
+        <p:nvSpPr>
+          <p:cNvPr id="37" name="Text 35"/>
+          <p:cNvSpPr/>
+          <p:nvPr/>
+        </p:nvSpPr>
+        <p:spPr>
+          <a:xfrm>
+            <a:off x="9422663" y="2761488"/>
+            <a:ext cx="1982648" cy="548640"/>
           </a:xfrm>
           <a:prstGeom prst="rect">
             <a:avLst/>
@@ -6004,7 +6868,7 @@
               <a:buNone/>
             </a:pPr>
             <a:r>
-              <a:rPr lang="en-US" sz="1450" b="1" dirty="0">
+              <a:rPr lang="en-US" sz="1080" b="1" dirty="0">
                 <a:solidFill>
                   <a:srgbClr val="047857"/>
                 </a:solidFill>
@@ -6012,31 +6876,58 @@
                 <a:ea typeface="Apple SD Gothic Neo" pitchFamily="34" charset="-122"/>
                 <a:cs typeface="Apple SD Gothic Neo" pitchFamily="34" charset="-120"/>
               </a:rPr>
-              <a:t>움직임 클립 선별</a:t>
-            </a:r>
-            <a:endParaRPr lang="en-US" sz="1450" dirty="0"/>
-          </a:p>
-        </p:txBody>
-      </p:sp>
-      <p:sp>
-        <p:nvSpPr>
-          <p:cNvPr id="12" name="Text 10"/>
-          <p:cNvSpPr/>
-          <p:nvPr/>
-        </p:nvSpPr>
-        <p:spPr>
-          <a:xfrm>
-            <a:off x="2915336" y="3118104"/>
-            <a:ext cx="1773936" cy="411480"/>
-          </a:xfrm>
-          <a:prstGeom prst="rect">
-            <a:avLst/>
-          </a:prstGeom>
-          <a:noFill/>
-          <a:ln/>
-        </p:spPr>
-        <p:txBody>
-          <a:bodyPr wrap="square" lIns="0" tIns="0" rIns="0" bIns="0" rtlCol="0" anchor="t"/>
+              <a:t>밤사이 행동 시간순 정리</a:t>
+            </a:r>
+            <a:endParaRPr lang="en-US" sz="1080" dirty="0"/>
+          </a:p>
+        </p:txBody>
+      </p:sp>
+      <p:sp>
+        <p:nvSpPr>
+          <p:cNvPr id="38" name="Shape 36"/>
+          <p:cNvSpPr/>
+          <p:nvPr/>
+        </p:nvSpPr>
+        <p:spPr>
+          <a:xfrm>
+            <a:off x="9386087" y="3584448"/>
+            <a:ext cx="2055800" cy="548640"/>
+          </a:xfrm>
+          <a:prstGeom prst="roundRect">
+            <a:avLst>
+              <a:gd name="adj" fmla="val 13333"/>
+            </a:avLst>
+          </a:prstGeom>
+          <a:solidFill>
+            <a:srgbClr val="FFFFFF"/>
+          </a:solidFill>
+          <a:ln w="12700">
+            <a:solidFill>
+              <a:srgbClr val="E2E8F0"/>
+            </a:solidFill>
+            <a:prstDash val="solid"/>
+          </a:ln>
+        </p:spPr>
+      </p:sp>
+      <p:sp>
+        <p:nvSpPr>
+          <p:cNvPr id="39" name="Text 37"/>
+          <p:cNvSpPr/>
+          <p:nvPr/>
+        </p:nvSpPr>
+        <p:spPr>
+          <a:xfrm>
+            <a:off x="9422663" y="3584448"/>
+            <a:ext cx="1982648" cy="548640"/>
+          </a:xfrm>
+          <a:prstGeom prst="rect">
+            <a:avLst/>
+          </a:prstGeom>
+          <a:noFill/>
+          <a:ln/>
+        </p:spPr>
+        <p:txBody>
+          <a:bodyPr wrap="square" lIns="0" tIns="0" rIns="0" bIns="0" rtlCol="0" anchor="ctr"/>
           <a:lstStyle/>
           <a:p>
             <a:pPr algn="ctr" indent="0" marL="0">
@@ -6046,30 +6937,30 @@
               <a:buNone/>
             </a:pPr>
             <a:r>
-              <a:rPr lang="en-US" sz="1050" dirty="0">
-                <a:solidFill>
-                  <a:srgbClr val="059669"/>
-                </a:solidFill>
-                <a:latin typeface="Apple SD Gothic Neo" pitchFamily="34" charset="0"/>
-                <a:ea typeface="Apple SD Gothic Neo" pitchFamily="34" charset="-122"/>
-                <a:cs typeface="Apple SD Gothic Neo" pitchFamily="34" charset="-120"/>
-              </a:rPr>
-              <a:t>움직임 있는 장면만</a:t>
-            </a:r>
-            <a:endParaRPr lang="en-US" sz="1050" dirty="0"/>
-          </a:p>
-        </p:txBody>
-      </p:sp>
-      <p:sp>
-        <p:nvSpPr>
-          <p:cNvPr id="13" name="Text 11"/>
-          <p:cNvSpPr/>
-          <p:nvPr/>
-        </p:nvSpPr>
-        <p:spPr>
-          <a:xfrm>
-            <a:off x="4744136" y="2857500"/>
-            <a:ext cx="409880" cy="365760"/>
+              <a:rPr lang="en-US" sz="1080" b="1" dirty="0">
+                <a:solidFill>
+                  <a:srgbClr val="047857"/>
+                </a:solidFill>
+                <a:latin typeface="Apple SD Gothic Neo" pitchFamily="34" charset="0"/>
+                <a:ea typeface="Apple SD Gothic Neo" pitchFamily="34" charset="-122"/>
+                <a:cs typeface="Apple SD Gothic Neo" pitchFamily="34" charset="-120"/>
+              </a:rPr>
+              <a:t>아침에 보호자에게 전달</a:t>
+            </a:r>
+            <a:endParaRPr lang="en-US" sz="1080" dirty="0"/>
+          </a:p>
+        </p:txBody>
+      </p:sp>
+      <p:sp>
+        <p:nvSpPr>
+          <p:cNvPr id="40" name="Text 38"/>
+          <p:cNvSpPr/>
+          <p:nvPr/>
+        </p:nvSpPr>
+        <p:spPr>
+          <a:xfrm>
+            <a:off x="10231107" y="3291840"/>
+            <a:ext cx="365760" cy="292608"/>
           </a:xfrm>
           <a:prstGeom prst="rect">
             <a:avLst/>
@@ -6085,7 +6976,7 @@
               <a:buNone/>
             </a:pPr>
             <a:r>
-              <a:rPr lang="en-US" sz="2200" b="1" dirty="0">
+              <a:rPr lang="en-US" sz="1500" b="1" dirty="0">
                 <a:solidFill>
                   <a:srgbClr val="CBD5E1"/>
                 </a:solidFill>
@@ -6093,56 +6984,49 @@
                 <a:ea typeface="Apple SD Gothic Neo" pitchFamily="34" charset="-122"/>
                 <a:cs typeface="Apple SD Gothic Neo" pitchFamily="34" charset="-120"/>
               </a:rPr>
-              <a:t>→</a:t>
-            </a:r>
-            <a:endParaRPr lang="en-US" sz="2200" dirty="0"/>
-          </a:p>
-        </p:txBody>
-      </p:sp>
-      <p:sp>
-        <p:nvSpPr>
-          <p:cNvPr id="14" name="Shape 12"/>
-          <p:cNvSpPr/>
-          <p:nvPr/>
-        </p:nvSpPr>
-        <p:spPr>
-          <a:xfrm>
-            <a:off x="5154016" y="2331720"/>
-            <a:ext cx="1883664" cy="1417320"/>
+              <a:t>↓</a:t>
+            </a:r>
+            <a:endParaRPr lang="en-US" sz="1500" dirty="0"/>
+          </a:p>
+        </p:txBody>
+      </p:sp>
+      <p:sp>
+        <p:nvSpPr>
+          <p:cNvPr id="41" name="Shape 39"/>
+          <p:cNvSpPr/>
+          <p:nvPr/>
+        </p:nvSpPr>
+        <p:spPr>
+          <a:xfrm>
+            <a:off x="566928" y="4590288"/>
+            <a:ext cx="11057839" cy="457200"/>
           </a:xfrm>
           <a:prstGeom prst="roundRect">
             <a:avLst>
-              <a:gd name="adj" fmla="val 7097"/>
+              <a:gd name="adj" fmla="val 50000"/>
             </a:avLst>
           </a:prstGeom>
           <a:solidFill>
-            <a:srgbClr val="FEF9EC"/>
+            <a:srgbClr val="ECFDF5"/>
           </a:solidFill>
           <a:ln w="12700">
             <a:solidFill>
-              <a:srgbClr val="FCD34D"/>
+              <a:srgbClr val="6EE7B7"/>
             </a:solidFill>
             <a:prstDash val="solid"/>
           </a:ln>
-          <a:effectLst>
-            <a:outerShdw sx="100000" sy="100000" kx="0" ky="0" algn="bl" rotWithShape="0" blurRad="88900" dist="25400" dir="5400000">
-              <a:srgbClr val="64748B">
-                <a:alpha val="16000"/>
-              </a:srgbClr>
-            </a:outerShdw>
-          </a:effectLst>
-        </p:spPr>
-      </p:sp>
-      <p:sp>
-        <p:nvSpPr>
-          <p:cNvPr id="15" name="Text 13"/>
-          <p:cNvSpPr/>
-          <p:nvPr/>
-        </p:nvSpPr>
-        <p:spPr>
-          <a:xfrm>
-            <a:off x="5208880" y="2642616"/>
-            <a:ext cx="1773936" cy="457200"/>
+        </p:spPr>
+      </p:sp>
+      <p:sp>
+        <p:nvSpPr>
+          <p:cNvPr id="42" name="Text 40"/>
+          <p:cNvSpPr/>
+          <p:nvPr/>
+        </p:nvSpPr>
+        <p:spPr>
+          <a:xfrm>
+            <a:off x="841248" y="4590288"/>
+            <a:ext cx="10509199" cy="457200"/>
           </a:xfrm>
           <a:prstGeom prst="rect">
             <a:avLst/>
@@ -6155,396 +7039,51 @@
           <a:lstStyle/>
           <a:p>
             <a:pPr algn="ctr" indent="0" marL="0">
-              <a:lnSpc>
-                <a:spcPct val="100000"/>
-              </a:lnSpc>
-              <a:buNone/>
-            </a:pPr>
-            <a:r>
-              <a:rPr lang="en-US" sz="1450" b="1" dirty="0">
-                <a:solidFill>
-                  <a:srgbClr val="92400E"/>
-                </a:solidFill>
-                <a:latin typeface="Apple SD Gothic Neo" pitchFamily="34" charset="0"/>
-                <a:ea typeface="Apple SD Gothic Neo" pitchFamily="34" charset="-122"/>
-                <a:cs typeface="Apple SD Gothic Neo" pitchFamily="34" charset="-120"/>
-              </a:rPr>
-              <a:t>AI 행동 분석</a:t>
-            </a:r>
-            <a:endParaRPr lang="en-US" sz="1450" dirty="0"/>
-          </a:p>
-        </p:txBody>
-      </p:sp>
-      <p:sp>
-        <p:nvSpPr>
-          <p:cNvPr id="16" name="Text 14"/>
-          <p:cNvSpPr/>
-          <p:nvPr/>
-        </p:nvSpPr>
-        <p:spPr>
-          <a:xfrm>
-            <a:off x="5208880" y="3118104"/>
-            <a:ext cx="1773936" cy="411480"/>
-          </a:xfrm>
-          <a:prstGeom prst="rect">
-            <a:avLst/>
-          </a:prstGeom>
-          <a:noFill/>
-          <a:ln/>
-        </p:spPr>
-        <p:txBody>
-          <a:bodyPr wrap="square" lIns="0" tIns="0" rIns="0" bIns="0" rtlCol="0" anchor="t"/>
-          <a:lstStyle/>
-          <a:p>
+              <a:buNone/>
+            </a:pPr>
+            <a:r>
+              <a:rPr lang="en-US" sz="1150" b="1" dirty="0">
+                <a:solidFill>
+                  <a:srgbClr val="047857"/>
+                </a:solidFill>
+                <a:latin typeface="Apple SD Gothic Neo" pitchFamily="34" charset="0"/>
+                <a:ea typeface="Apple SD Gothic Neo" pitchFamily="34" charset="-122"/>
+                <a:cs typeface="Apple SD Gothic Neo" pitchFamily="34" charset="-120"/>
+              </a:rPr>
+              <a:t>↻  사람 검수 루프(HITL)</a:t>
+            </a:r>
             <a:pPr algn="ctr" indent="0" marL="0">
-              <a:lnSpc>
-                <a:spcPct val="100000"/>
-              </a:lnSpc>
-              <a:buNone/>
-            </a:pPr>
-            <a:r>
-              <a:rPr lang="en-US" sz="1050" dirty="0">
-                <a:solidFill>
-                  <a:srgbClr val="B45309"/>
-                </a:solidFill>
-                <a:latin typeface="Apple SD Gothic Neo" pitchFamily="34" charset="0"/>
-                <a:ea typeface="Apple SD Gothic Neo" pitchFamily="34" charset="-122"/>
-                <a:cs typeface="Apple SD Gothic Neo" pitchFamily="34" charset="-120"/>
-              </a:rPr>
-              <a:t>1차 판독 + 정밀 판독</a:t>
-            </a:r>
-            <a:endParaRPr lang="en-US" sz="1050" dirty="0"/>
-          </a:p>
-        </p:txBody>
-      </p:sp>
-      <p:sp>
-        <p:nvSpPr>
-          <p:cNvPr id="17" name="Text 15"/>
-          <p:cNvSpPr/>
-          <p:nvPr/>
-        </p:nvSpPr>
-        <p:spPr>
-          <a:xfrm>
-            <a:off x="7037680" y="2857500"/>
-            <a:ext cx="409880" cy="365760"/>
-          </a:xfrm>
-          <a:prstGeom prst="rect">
-            <a:avLst/>
-          </a:prstGeom>
-          <a:noFill/>
-          <a:ln/>
-        </p:spPr>
-        <p:txBody>
-          <a:bodyPr wrap="square" lIns="0" tIns="0" rIns="0" bIns="0" rtlCol="0" anchor="ctr"/>
-          <a:lstStyle/>
-          <a:p>
-            <a:pPr algn="ctr" indent="0" marL="0">
-              <a:buNone/>
-            </a:pPr>
-            <a:r>
-              <a:rPr lang="en-US" sz="2200" b="1" dirty="0">
-                <a:solidFill>
-                  <a:srgbClr val="CBD5E1"/>
-                </a:solidFill>
-                <a:latin typeface="Apple SD Gothic Neo" pitchFamily="34" charset="0"/>
-                <a:ea typeface="Apple SD Gothic Neo" pitchFamily="34" charset="-122"/>
-                <a:cs typeface="Apple SD Gothic Neo" pitchFamily="34" charset="-120"/>
-              </a:rPr>
-              <a:t>→</a:t>
-            </a:r>
-            <a:endParaRPr lang="en-US" sz="2200" dirty="0"/>
-          </a:p>
-        </p:txBody>
-      </p:sp>
-      <p:sp>
-        <p:nvSpPr>
-          <p:cNvPr id="18" name="Shape 16"/>
-          <p:cNvSpPr/>
-          <p:nvPr/>
-        </p:nvSpPr>
-        <p:spPr>
-          <a:xfrm>
-            <a:off x="7447559" y="2331720"/>
-            <a:ext cx="1883664" cy="1417320"/>
+              <a:buNone/>
+            </a:pPr>
+            <a:r>
+              <a:rPr lang="en-US" sz="1150" dirty="0">
+                <a:solidFill>
+                  <a:srgbClr val="047857"/>
+                </a:solidFill>
+                <a:latin typeface="Apple SD Gothic Neo" pitchFamily="34" charset="0"/>
+                <a:ea typeface="Apple SD Gothic Neo" pitchFamily="34" charset="-122"/>
+                <a:cs typeface="Apple SD Gothic Neo" pitchFamily="34" charset="-120"/>
+              </a:rPr>
+              <a:t>  —  애매한 결과를 사람이 확인해 다시 학습 데이터로 쌓고, 모델·규칙을 개선한다.</a:t>
+            </a:r>
+            <a:endParaRPr lang="en-US" sz="1150" dirty="0"/>
+          </a:p>
+        </p:txBody>
+      </p:sp>
+      <p:sp>
+        <p:nvSpPr>
+          <p:cNvPr id="43" name="Shape 41"/>
+          <p:cNvSpPr/>
+          <p:nvPr/>
+        </p:nvSpPr>
+        <p:spPr>
+          <a:xfrm>
+            <a:off x="566928" y="5230368"/>
+            <a:ext cx="11057839" cy="868680"/>
           </a:xfrm>
           <a:prstGeom prst="roundRect">
             <a:avLst>
-              <a:gd name="adj" fmla="val 7097"/>
-            </a:avLst>
-          </a:prstGeom>
-          <a:solidFill>
-            <a:srgbClr val="EFF6FF"/>
-          </a:solidFill>
-          <a:ln w="12700">
-            <a:solidFill>
-              <a:srgbClr val="93C5FD"/>
-            </a:solidFill>
-            <a:prstDash val="solid"/>
-          </a:ln>
-          <a:effectLst>
-            <a:outerShdw sx="100000" sy="100000" kx="0" ky="0" algn="bl" rotWithShape="0" blurRad="88900" dist="25400" dir="5400000">
-              <a:srgbClr val="64748B">
-                <a:alpha val="16000"/>
-              </a:srgbClr>
-            </a:outerShdw>
-          </a:effectLst>
-        </p:spPr>
-      </p:sp>
-      <p:sp>
-        <p:nvSpPr>
-          <p:cNvPr id="19" name="Text 17"/>
-          <p:cNvSpPr/>
-          <p:nvPr/>
-        </p:nvSpPr>
-        <p:spPr>
-          <a:xfrm>
-            <a:off x="7502423" y="2642616"/>
-            <a:ext cx="1773936" cy="457200"/>
-          </a:xfrm>
-          <a:prstGeom prst="rect">
-            <a:avLst/>
-          </a:prstGeom>
-          <a:noFill/>
-          <a:ln/>
-        </p:spPr>
-        <p:txBody>
-          <a:bodyPr wrap="square" lIns="0" tIns="0" rIns="0" bIns="0" rtlCol="0" anchor="ctr"/>
-          <a:lstStyle/>
-          <a:p>
-            <a:pPr algn="ctr" indent="0" marL="0">
-              <a:lnSpc>
-                <a:spcPct val="100000"/>
-              </a:lnSpc>
-              <a:buNone/>
-            </a:pPr>
-            <a:r>
-              <a:rPr lang="en-US" sz="1450" b="1" dirty="0">
-                <a:solidFill>
-                  <a:srgbClr val="2563EB"/>
-                </a:solidFill>
-                <a:latin typeface="Apple SD Gothic Neo" pitchFamily="34" charset="0"/>
-                <a:ea typeface="Apple SD Gothic Neo" pitchFamily="34" charset="-122"/>
-                <a:cs typeface="Apple SD Gothic Neo" pitchFamily="34" charset="-120"/>
-              </a:rPr>
-              <a:t>행동 타임라인</a:t>
-            </a:r>
-            <a:endParaRPr lang="en-US" sz="1450" dirty="0"/>
-          </a:p>
-        </p:txBody>
-      </p:sp>
-      <p:sp>
-        <p:nvSpPr>
-          <p:cNvPr id="20" name="Text 18"/>
-          <p:cNvSpPr/>
-          <p:nvPr/>
-        </p:nvSpPr>
-        <p:spPr>
-          <a:xfrm>
-            <a:off x="7502423" y="3118104"/>
-            <a:ext cx="1773936" cy="411480"/>
-          </a:xfrm>
-          <a:prstGeom prst="rect">
-            <a:avLst/>
-          </a:prstGeom>
-          <a:noFill/>
-          <a:ln/>
-        </p:spPr>
-        <p:txBody>
-          <a:bodyPr wrap="square" lIns="0" tIns="0" rIns="0" bIns="0" rtlCol="0" anchor="t"/>
-          <a:lstStyle/>
-          <a:p>
-            <a:pPr algn="ctr" indent="0" marL="0">
-              <a:lnSpc>
-                <a:spcPct val="100000"/>
-              </a:lnSpc>
-              <a:buNone/>
-            </a:pPr>
-            <a:r>
-              <a:rPr lang="en-US" sz="1050" dirty="0">
-                <a:solidFill>
-                  <a:srgbClr val="2563EB"/>
-                </a:solidFill>
-                <a:latin typeface="Apple SD Gothic Neo" pitchFamily="34" charset="0"/>
-                <a:ea typeface="Apple SD Gothic Neo" pitchFamily="34" charset="-122"/>
-                <a:cs typeface="Apple SD Gothic Neo" pitchFamily="34" charset="-120"/>
-              </a:rPr>
-              <a:t>밤사이 행동 일지</a:t>
-            </a:r>
-            <a:endParaRPr lang="en-US" sz="1050" dirty="0"/>
-          </a:p>
-        </p:txBody>
-      </p:sp>
-      <p:sp>
-        <p:nvSpPr>
-          <p:cNvPr id="21" name="Text 19"/>
-          <p:cNvSpPr/>
-          <p:nvPr/>
-        </p:nvSpPr>
-        <p:spPr>
-          <a:xfrm>
-            <a:off x="9331223" y="2857500"/>
-            <a:ext cx="409880" cy="365760"/>
-          </a:xfrm>
-          <a:prstGeom prst="rect">
-            <a:avLst/>
-          </a:prstGeom>
-          <a:noFill/>
-          <a:ln/>
-        </p:spPr>
-        <p:txBody>
-          <a:bodyPr wrap="square" lIns="0" tIns="0" rIns="0" bIns="0" rtlCol="0" anchor="ctr"/>
-          <a:lstStyle/>
-          <a:p>
-            <a:pPr algn="ctr" indent="0" marL="0">
-              <a:buNone/>
-            </a:pPr>
-            <a:r>
-              <a:rPr lang="en-US" sz="2200" b="1" dirty="0">
-                <a:solidFill>
-                  <a:srgbClr val="CBD5E1"/>
-                </a:solidFill>
-                <a:latin typeface="Apple SD Gothic Neo" pitchFamily="34" charset="0"/>
-                <a:ea typeface="Apple SD Gothic Neo" pitchFamily="34" charset="-122"/>
-                <a:cs typeface="Apple SD Gothic Neo" pitchFamily="34" charset="-120"/>
-              </a:rPr>
-              <a:t>→</a:t>
-            </a:r>
-            <a:endParaRPr lang="en-US" sz="2200" dirty="0"/>
-          </a:p>
-        </p:txBody>
-      </p:sp>
-      <p:sp>
-        <p:nvSpPr>
-          <p:cNvPr id="22" name="Shape 20"/>
-          <p:cNvSpPr/>
-          <p:nvPr/>
-        </p:nvSpPr>
-        <p:spPr>
-          <a:xfrm>
-            <a:off x="9741103" y="2331720"/>
-            <a:ext cx="1883664" cy="1417320"/>
-          </a:xfrm>
-          <a:prstGeom prst="roundRect">
-            <a:avLst>
-              <a:gd name="adj" fmla="val 7097"/>
-            </a:avLst>
-          </a:prstGeom>
-          <a:solidFill>
-            <a:srgbClr val="FEE2E2"/>
-          </a:solidFill>
-          <a:ln w="12700">
-            <a:solidFill>
-              <a:srgbClr val="FCA5A5"/>
-            </a:solidFill>
-            <a:prstDash val="solid"/>
-          </a:ln>
-          <a:effectLst>
-            <a:outerShdw sx="100000" sy="100000" kx="0" ky="0" algn="bl" rotWithShape="0" blurRad="88900" dist="25400" dir="5400000">
-              <a:srgbClr val="64748B">
-                <a:alpha val="16000"/>
-              </a:srgbClr>
-            </a:outerShdw>
-          </a:effectLst>
-        </p:spPr>
-      </p:sp>
-      <p:sp>
-        <p:nvSpPr>
-          <p:cNvPr id="23" name="Text 21"/>
-          <p:cNvSpPr/>
-          <p:nvPr/>
-        </p:nvSpPr>
-        <p:spPr>
-          <a:xfrm>
-            <a:off x="9795967" y="2642616"/>
-            <a:ext cx="1773936" cy="457200"/>
-          </a:xfrm>
-          <a:prstGeom prst="rect">
-            <a:avLst/>
-          </a:prstGeom>
-          <a:noFill/>
-          <a:ln/>
-        </p:spPr>
-        <p:txBody>
-          <a:bodyPr wrap="square" lIns="0" tIns="0" rIns="0" bIns="0" rtlCol="0" anchor="ctr"/>
-          <a:lstStyle/>
-          <a:p>
-            <a:pPr algn="ctr" indent="0" marL="0">
-              <a:lnSpc>
-                <a:spcPct val="100000"/>
-              </a:lnSpc>
-              <a:buNone/>
-            </a:pPr>
-            <a:r>
-              <a:rPr lang="en-US" sz="1450" b="1" dirty="0">
-                <a:solidFill>
-                  <a:srgbClr val="DC2626"/>
-                </a:solidFill>
-                <a:latin typeface="Apple SD Gothic Neo" pitchFamily="34" charset="0"/>
-                <a:ea typeface="Apple SD Gothic Neo" pitchFamily="34" charset="-122"/>
-                <a:cs typeface="Apple SD Gothic Neo" pitchFamily="34" charset="-120"/>
-              </a:rPr>
-              <a:t>케어 알림</a:t>
-            </a:r>
-            <a:endParaRPr lang="en-US" sz="1450" dirty="0"/>
-          </a:p>
-        </p:txBody>
-      </p:sp>
-      <p:sp>
-        <p:nvSpPr>
-          <p:cNvPr id="24" name="Text 22"/>
-          <p:cNvSpPr/>
-          <p:nvPr/>
-        </p:nvSpPr>
-        <p:spPr>
-          <a:xfrm>
-            <a:off x="9795967" y="3118104"/>
-            <a:ext cx="1773936" cy="411480"/>
-          </a:xfrm>
-          <a:prstGeom prst="rect">
-            <a:avLst/>
-          </a:prstGeom>
-          <a:noFill/>
-          <a:ln/>
-        </p:spPr>
-        <p:txBody>
-          <a:bodyPr wrap="square" lIns="0" tIns="0" rIns="0" bIns="0" rtlCol="0" anchor="t"/>
-          <a:lstStyle/>
-          <a:p>
-            <a:pPr algn="ctr" indent="0" marL="0">
-              <a:lnSpc>
-                <a:spcPct val="100000"/>
-              </a:lnSpc>
-              <a:buNone/>
-            </a:pPr>
-            <a:r>
-              <a:rPr lang="en-US" sz="1050" dirty="0">
-                <a:solidFill>
-                  <a:srgbClr val="DC2626"/>
-                </a:solidFill>
-                <a:latin typeface="Apple SD Gothic Neo" pitchFamily="34" charset="0"/>
-                <a:ea typeface="Apple SD Gothic Neo" pitchFamily="34" charset="-122"/>
-                <a:cs typeface="Apple SD Gothic Neo" pitchFamily="34" charset="-120"/>
-              </a:rPr>
-              <a:t>물·먹이·탈피 신호</a:t>
-            </a:r>
-            <a:endParaRPr lang="en-US" sz="1050" dirty="0"/>
-          </a:p>
-        </p:txBody>
-      </p:sp>
-      <p:sp>
-        <p:nvSpPr>
-          <p:cNvPr id="25" name="Shape 23"/>
-          <p:cNvSpPr/>
-          <p:nvPr/>
-        </p:nvSpPr>
-        <p:spPr>
-          <a:xfrm>
-            <a:off x="566928" y="4251960"/>
-            <a:ext cx="11057839" cy="1051560"/>
-          </a:xfrm>
-          <a:prstGeom prst="roundRect">
-            <a:avLst>
-              <a:gd name="adj" fmla="val 10435"/>
+              <a:gd name="adj" fmla="val 12632"/>
             </a:avLst>
           </a:prstGeom>
           <a:solidFill>
@@ -6562,53 +7101,14 @@
       </p:sp>
       <p:sp>
         <p:nvSpPr>
-          <p:cNvPr id="26" name="Text 24"/>
-          <p:cNvSpPr/>
-          <p:nvPr/>
-        </p:nvSpPr>
-        <p:spPr>
-          <a:xfrm>
-            <a:off x="978408" y="4434840"/>
-            <a:ext cx="2011680" cy="310896"/>
-          </a:xfrm>
-          <a:prstGeom prst="rect">
-            <a:avLst/>
-          </a:prstGeom>
-          <a:noFill/>
-          <a:ln/>
-        </p:spPr>
-        <p:txBody>
-          <a:bodyPr wrap="square" lIns="0" tIns="0" rIns="0" bIns="0" rtlCol="0" anchor="ctr"/>
-          <a:lstStyle/>
-          <a:p>
-            <a:pPr indent="0" marL="0">
-              <a:buNone/>
-            </a:pPr>
-            <a:r>
-              <a:rPr lang="en-US" sz="1150" b="1" spc="100" kern="0" dirty="0">
-                <a:solidFill>
-                  <a:srgbClr val="FCD34D"/>
-                </a:solidFill>
-                <a:latin typeface="Apple SD Gothic Neo" pitchFamily="34" charset="0"/>
-                <a:ea typeface="Apple SD Gothic Neo" pitchFamily="34" charset="-122"/>
-                <a:cs typeface="Apple SD Gothic Neo" pitchFamily="34" charset="-120"/>
-              </a:rPr>
-              <a:t>핵심</a:t>
-            </a:r>
-            <a:endParaRPr lang="en-US" sz="1150" dirty="0"/>
-          </a:p>
-        </p:txBody>
-      </p:sp>
-      <p:sp>
-        <p:nvSpPr>
-          <p:cNvPr id="27" name="Text 25"/>
-          <p:cNvSpPr/>
-          <p:nvPr/>
-        </p:nvSpPr>
-        <p:spPr>
-          <a:xfrm>
-            <a:off x="978408" y="4800600"/>
-            <a:ext cx="10234879" cy="338328"/>
+          <p:cNvPr id="44" name="Text 42"/>
+          <p:cNvSpPr/>
+          <p:nvPr/>
+        </p:nvSpPr>
+        <p:spPr>
+          <a:xfrm>
+            <a:off x="978408" y="5431536"/>
+            <a:ext cx="10234879" cy="502920"/>
           </a:xfrm>
           <a:prstGeom prst="rect">
             <a:avLst/>
@@ -6627,15 +7127,15 @@
               <a:buNone/>
             </a:pPr>
             <a:r>
-              <a:rPr lang="en-US" sz="1450" dirty="0">
-                <a:solidFill>
-                  <a:srgbClr val="E2E8F0"/>
-                </a:solidFill>
-                <a:latin typeface="Apple SD Gothic Neo" pitchFamily="34" charset="0"/>
-                <a:ea typeface="Apple SD Gothic Neo" pitchFamily="34" charset="-122"/>
-                <a:cs typeface="Apple SD Gothic Neo" pitchFamily="34" charset="-120"/>
-              </a:rPr>
-              <a:t>카메라가 찍기만 하는 것이 아니라, </a:t>
+              <a:rPr lang="en-US" sz="1350" b="1" dirty="0">
+                <a:solidFill>
+                  <a:srgbClr val="FCD34D"/>
+                </a:solidFill>
+                <a:latin typeface="Apple SD Gothic Neo" pitchFamily="34" charset="0"/>
+                <a:ea typeface="Apple SD Gothic Neo" pitchFamily="34" charset="-122"/>
+                <a:cs typeface="Apple SD Gothic Neo" pitchFamily="34" charset="-120"/>
+              </a:rPr>
+              <a:t>실시간 ‘케어 알림’이 아니다. </a:t>
             </a:r>
             <a:pPr indent="0" marL="0">
               <a:lnSpc>
@@ -6644,24 +7144,7 @@
               <a:buNone/>
             </a:pPr>
             <a:r>
-              <a:rPr lang="en-US" sz="1450" b="1" dirty="0">
-                <a:solidFill>
-                  <a:srgbClr val="FFFFFF"/>
-                </a:solidFill>
-                <a:latin typeface="Apple SD Gothic Neo" pitchFamily="34" charset="0"/>
-                <a:ea typeface="Apple SD Gothic Neo" pitchFamily="34" charset="-122"/>
-                <a:cs typeface="Apple SD Gothic Neo" pitchFamily="34" charset="-120"/>
-              </a:rPr>
-              <a:t>밤사이 행동을 해석해 보호자에게 “어젯밤 무엇을 했는지”를 알려준다</a:t>
-            </a:r>
-            <a:pPr indent="0" marL="0">
-              <a:lnSpc>
-                <a:spcPct val="118000"/>
-              </a:lnSpc>
-              <a:buNone/>
-            </a:pPr>
-            <a:r>
-              <a:rPr lang="en-US" sz="1450" dirty="0">
+              <a:rPr lang="en-US" sz="1350" dirty="0">
                 <a:solidFill>
                   <a:srgbClr val="E2E8F0"/>
                 </a:solidFill>
@@ -6669,48 +7152,9 @@
                 <a:ea typeface="Apple SD Gothic Neo" pitchFamily="34" charset="-122"/>
                 <a:cs typeface="Apple SD Gothic Neo" pitchFamily="34" charset="-120"/>
               </a:rPr>
-              <a:t>.  녹화가 아니라 해석이다.</a:t>
-            </a:r>
-            <a:endParaRPr lang="en-US" sz="1450" dirty="0"/>
-          </a:p>
-        </p:txBody>
-      </p:sp>
-      <p:sp>
-        <p:nvSpPr>
-          <p:cNvPr id="28" name="Text 26"/>
-          <p:cNvSpPr/>
-          <p:nvPr/>
-        </p:nvSpPr>
-        <p:spPr>
-          <a:xfrm>
-            <a:off x="566928" y="5486400"/>
-            <a:ext cx="11057839" cy="320040"/>
-          </a:xfrm>
-          <a:prstGeom prst="rect">
-            <a:avLst/>
-          </a:prstGeom>
-          <a:noFill/>
-          <a:ln/>
-        </p:spPr>
-        <p:txBody>
-          <a:bodyPr wrap="square" lIns="0" tIns="0" rIns="0" bIns="0" rtlCol="0" anchor="ctr"/>
-          <a:lstStyle/>
-          <a:p>
-            <a:pPr indent="0" marL="0">
-              <a:buNone/>
-            </a:pPr>
-            <a:r>
-              <a:rPr lang="en-US" sz="1100" i="1" dirty="0">
-                <a:solidFill>
-                  <a:srgbClr val="94A3B8"/>
-                </a:solidFill>
-                <a:latin typeface="Apple SD Gothic Neo" pitchFamily="34" charset="0"/>
-                <a:ea typeface="Apple SD Gothic Neo" pitchFamily="34" charset="-122"/>
-                <a:cs typeface="Apple SD Gothic Neo" pitchFamily="34" charset="-120"/>
-              </a:rPr>
-              <a:t>저장·수집 등 내부 인프라의 상세 구조는 부록 1(RBA 전체 구조도)에서 다룬다.</a:t>
-            </a:r>
-            <a:endParaRPr lang="en-US" sz="1100" dirty="0"/>
+              <a:t>밤사이 도마뱀이 무엇을 했는지를 아침에 활동 보고서로 정리해 전달한다 — 녹화가 아니라 해석이다.</a:t>
+            </a:r>
+            <a:endParaRPr lang="en-US" sz="1350" dirty="0"/>
           </a:p>
         </p:txBody>
       </p:sp>

--- a/docs/ir/teraai-rba-investor.pptx
+++ b/docs/ir/teraai-rba-investor.pptx
@@ -5888,12 +5888,12 @@
         </p:nvSpPr>
         <p:spPr>
           <a:xfrm>
-            <a:off x="749808" y="2761488"/>
-            <a:ext cx="2055800" cy="548640"/>
+            <a:off x="749808" y="2743200"/>
+            <a:ext cx="2055800" cy="420624"/>
           </a:xfrm>
           <a:prstGeom prst="roundRect">
             <a:avLst>
-              <a:gd name="adj" fmla="val 13333"/>
+              <a:gd name="adj" fmla="val 15217"/>
             </a:avLst>
           </a:prstGeom>
           <a:solidFill>
@@ -5915,8 +5915,8 @@
         </p:nvSpPr>
         <p:spPr>
           <a:xfrm>
-            <a:off x="786384" y="2761488"/>
-            <a:ext cx="1982648" cy="548640"/>
+            <a:off x="768096" y="2743200"/>
+            <a:ext cx="2019224" cy="420624"/>
           </a:xfrm>
           <a:prstGeom prst="rect">
             <a:avLst/>
@@ -5930,12 +5930,12 @@
           <a:p>
             <a:pPr algn="ctr" indent="0" marL="0">
               <a:lnSpc>
-                <a:spcPct val="100000"/>
+                <a:spcPct val="98000"/>
               </a:lnSpc>
               <a:buNone/>
             </a:pPr>
             <a:r>
-              <a:rPr lang="en-US" sz="1080" b="1" dirty="0">
+              <a:rPr lang="en-US" sz="960" b="1" dirty="0">
                 <a:solidFill>
                   <a:srgbClr val="334155"/>
                 </a:solidFill>
@@ -5945,24 +5945,63 @@
               </a:rPr>
               <a:t>카메라 · 밤사이 RTSP</a:t>
             </a:r>
-            <a:endParaRPr lang="en-US" sz="1080" dirty="0"/>
-          </a:p>
-        </p:txBody>
-      </p:sp>
-      <p:sp>
-        <p:nvSpPr>
-          <p:cNvPr id="11" name="Shape 9"/>
-          <p:cNvSpPr/>
-          <p:nvPr/>
-        </p:nvSpPr>
-        <p:spPr>
-          <a:xfrm>
-            <a:off x="749808" y="3584448"/>
-            <a:ext cx="2055800" cy="548640"/>
+            <a:endParaRPr lang="en-US" sz="960" dirty="0"/>
+          </a:p>
+        </p:txBody>
+      </p:sp>
+      <p:sp>
+        <p:nvSpPr>
+          <p:cNvPr id="11" name="Text 9"/>
+          <p:cNvSpPr/>
+          <p:nvPr/>
+        </p:nvSpPr>
+        <p:spPr>
+          <a:xfrm>
+            <a:off x="1594828" y="3136392"/>
+            <a:ext cx="365760" cy="173736"/>
+          </a:xfrm>
+          <a:prstGeom prst="rect">
+            <a:avLst/>
+          </a:prstGeom>
+          <a:noFill/>
+          <a:ln/>
+        </p:spPr>
+        <p:txBody>
+          <a:bodyPr wrap="square" lIns="0" tIns="0" rIns="0" bIns="0" rtlCol="0" anchor="ctr"/>
+          <a:lstStyle/>
+          <a:p>
+            <a:pPr algn="ctr" indent="0" marL="0">
+              <a:buNone/>
+            </a:pPr>
+            <a:r>
+              <a:rPr lang="en-US" sz="1200" b="1" dirty="0">
+                <a:solidFill>
+                  <a:srgbClr val="CBD5E1"/>
+                </a:solidFill>
+                <a:latin typeface="Apple SD Gothic Neo" pitchFamily="34" charset="0"/>
+                <a:ea typeface="Apple SD Gothic Neo" pitchFamily="34" charset="-122"/>
+                <a:cs typeface="Apple SD Gothic Neo" pitchFamily="34" charset="-120"/>
+              </a:rPr>
+              <a:t>↓</a:t>
+            </a:r>
+            <a:endParaRPr lang="en-US" sz="1200" dirty="0"/>
+          </a:p>
+        </p:txBody>
+      </p:sp>
+      <p:sp>
+        <p:nvSpPr>
+          <p:cNvPr id="12" name="Shape 10"/>
+          <p:cNvSpPr/>
+          <p:nvPr/>
+        </p:nvSpPr>
+        <p:spPr>
+          <a:xfrm>
+            <a:off x="749808" y="3282696"/>
+            <a:ext cx="2055800" cy="420624"/>
           </a:xfrm>
           <a:prstGeom prst="roundRect">
             <a:avLst>
-              <a:gd name="adj" fmla="val 13333"/>
+              <a:gd name="adj" fmla="val 15217"/>
             </a:avLst>
           </a:prstGeom>
           <a:solidFill>
@@ -5978,14 +6017,14 @@
       </p:sp>
       <p:sp>
         <p:nvSpPr>
-          <p:cNvPr id="12" name="Text 10"/>
-          <p:cNvSpPr/>
-          <p:nvPr/>
-        </p:nvSpPr>
-        <p:spPr>
-          <a:xfrm>
-            <a:off x="786384" y="3584448"/>
-            <a:ext cx="1982648" cy="548640"/>
+          <p:cNvPr id="13" name="Text 11"/>
+          <p:cNvSpPr/>
+          <p:nvPr/>
+        </p:nvSpPr>
+        <p:spPr>
+          <a:xfrm>
+            <a:off x="768096" y="3282696"/>
+            <a:ext cx="2019224" cy="420624"/>
           </a:xfrm>
           <a:prstGeom prst="rect">
             <a:avLst/>
@@ -5999,12 +6038,12 @@
           <a:p>
             <a:pPr algn="ctr" indent="0" marL="0">
               <a:lnSpc>
-                <a:spcPct val="100000"/>
+                <a:spcPct val="98000"/>
               </a:lnSpc>
               <a:buNone/>
             </a:pPr>
             <a:r>
-              <a:rPr lang="en-US" sz="1080" b="1" dirty="0">
+              <a:rPr lang="en-US" sz="960" b="1" dirty="0">
                 <a:solidFill>
                   <a:srgbClr val="334155"/>
                 </a:solidFill>
@@ -6014,20 +6053,20 @@
               </a:rPr>
               <a:t>움직임 클립 선별 (Motion)</a:t>
             </a:r>
-            <a:endParaRPr lang="en-US" sz="1080" dirty="0"/>
-          </a:p>
-        </p:txBody>
-      </p:sp>
-      <p:sp>
-        <p:nvSpPr>
-          <p:cNvPr id="13" name="Text 11"/>
-          <p:cNvSpPr/>
-          <p:nvPr/>
-        </p:nvSpPr>
-        <p:spPr>
-          <a:xfrm>
-            <a:off x="1594828" y="3291840"/>
-            <a:ext cx="365760" cy="292608"/>
+            <a:endParaRPr lang="en-US" sz="960" dirty="0"/>
+          </a:p>
+        </p:txBody>
+      </p:sp>
+      <p:sp>
+        <p:nvSpPr>
+          <p:cNvPr id="14" name="Text 12"/>
+          <p:cNvSpPr/>
+          <p:nvPr/>
+        </p:nvSpPr>
+        <p:spPr>
+          <a:xfrm>
+            <a:off x="1594828" y="3675888"/>
+            <a:ext cx="365760" cy="173736"/>
           </a:xfrm>
           <a:prstGeom prst="rect">
             <a:avLst/>
@@ -6043,7 +6082,7 @@
               <a:buNone/>
             </a:pPr>
             <a:r>
-              <a:rPr lang="en-US" sz="1500" b="1" dirty="0">
+              <a:rPr lang="en-US" sz="1200" b="1" dirty="0">
                 <a:solidFill>
                   <a:srgbClr val="CBD5E1"/>
                 </a:solidFill>
@@ -6053,13 +6092,82 @@
               </a:rPr>
               <a:t>↓</a:t>
             </a:r>
-            <a:endParaRPr lang="en-US" sz="1500" dirty="0"/>
-          </a:p>
-        </p:txBody>
-      </p:sp>
-      <p:sp>
-        <p:nvSpPr>
-          <p:cNvPr id="14" name="Text 12"/>
+            <a:endParaRPr lang="en-US" sz="1200" dirty="0"/>
+          </a:p>
+        </p:txBody>
+      </p:sp>
+      <p:sp>
+        <p:nvSpPr>
+          <p:cNvPr id="15" name="Shape 13"/>
+          <p:cNvSpPr/>
+          <p:nvPr/>
+        </p:nvSpPr>
+        <p:spPr>
+          <a:xfrm>
+            <a:off x="749808" y="3822192"/>
+            <a:ext cx="2055800" cy="420624"/>
+          </a:xfrm>
+          <a:prstGeom prst="roundRect">
+            <a:avLst>
+              <a:gd name="adj" fmla="val 15217"/>
+            </a:avLst>
+          </a:prstGeom>
+          <a:solidFill>
+            <a:srgbClr val="ECFDF5"/>
+          </a:solidFill>
+          <a:ln w="15875">
+            <a:solidFill>
+              <a:srgbClr val="6EE7B7"/>
+            </a:solidFill>
+            <a:prstDash val="solid"/>
+          </a:ln>
+        </p:spPr>
+      </p:sp>
+      <p:sp>
+        <p:nvSpPr>
+          <p:cNvPr id="16" name="Text 14"/>
+          <p:cNvSpPr/>
+          <p:nvPr/>
+        </p:nvSpPr>
+        <p:spPr>
+          <a:xfrm>
+            <a:off x="768096" y="3822192"/>
+            <a:ext cx="2019224" cy="420624"/>
+          </a:xfrm>
+          <a:prstGeom prst="rect">
+            <a:avLst/>
+          </a:prstGeom>
+          <a:noFill/>
+          <a:ln/>
+        </p:spPr>
+        <p:txBody>
+          <a:bodyPr wrap="square" lIns="0" tIns="0" rIns="0" bIns="0" rtlCol="0" anchor="ctr"/>
+          <a:lstStyle/>
+          <a:p>
+            <a:pPr algn="ctr" indent="0" marL="0">
+              <a:lnSpc>
+                <a:spcPct val="98000"/>
+              </a:lnSpc>
+              <a:buNone/>
+            </a:pPr>
+            <a:r>
+              <a:rPr lang="en-US" sz="960" b="1" dirty="0">
+                <a:solidFill>
+                  <a:srgbClr val="047857"/>
+                </a:solidFill>
+                <a:latin typeface="Apple SD Gothic Neo" pitchFamily="34" charset="0"/>
+                <a:ea typeface="Apple SD Gothic Neo" pitchFamily="34" charset="-122"/>
+                <a:cs typeface="Apple SD Gothic Neo" pitchFamily="34" charset="-120"/>
+              </a:rPr>
+              <a:t>gecko-vision-gate · 개체 탐지</a:t>
+            </a:r>
+            <a:endParaRPr lang="en-US" sz="960" dirty="0"/>
+          </a:p>
+        </p:txBody>
+      </p:sp>
+      <p:sp>
+        <p:nvSpPr>
+          <p:cNvPr id="17" name="Text 15"/>
           <p:cNvSpPr/>
           <p:nvPr/>
         </p:nvSpPr>
@@ -6098,7 +6206,7 @@
       </p:sp>
       <p:sp>
         <p:nvSpPr>
-          <p:cNvPr id="15" name="Shape 13"/>
+          <p:cNvPr id="18" name="Shape 16"/>
           <p:cNvSpPr/>
           <p:nvPr/>
         </p:nvSpPr>
@@ -6132,7 +6240,7 @@
       </p:sp>
       <p:sp>
         <p:nvSpPr>
-          <p:cNvPr id="16" name="Shape 14"/>
+          <p:cNvPr id="19" name="Shape 17"/>
           <p:cNvSpPr/>
           <p:nvPr/>
         </p:nvSpPr>
@@ -6154,7 +6262,7 @@
       </p:sp>
       <p:sp>
         <p:nvSpPr>
-          <p:cNvPr id="17" name="Text 15"/>
+          <p:cNvPr id="20" name="Text 18"/>
           <p:cNvSpPr/>
           <p:nvPr/>
         </p:nvSpPr>
@@ -6193,18 +6301,18 @@
       </p:sp>
       <p:sp>
         <p:nvSpPr>
-          <p:cNvPr id="18" name="Shape 16"/>
-          <p:cNvSpPr/>
-          <p:nvPr/>
-        </p:nvSpPr>
-        <p:spPr>
-          <a:xfrm>
-            <a:off x="3628568" y="2761488"/>
-            <a:ext cx="2055800" cy="548640"/>
+          <p:cNvPr id="21" name="Shape 19"/>
+          <p:cNvSpPr/>
+          <p:nvPr/>
+        </p:nvSpPr>
+        <p:spPr>
+          <a:xfrm>
+            <a:off x="3628568" y="2743200"/>
+            <a:ext cx="2055800" cy="690372"/>
           </a:xfrm>
           <a:prstGeom prst="roundRect">
             <a:avLst>
-              <a:gd name="adj" fmla="val 13333"/>
+              <a:gd name="adj" fmla="val 9272"/>
             </a:avLst>
           </a:prstGeom>
           <a:solidFill>
@@ -6220,14 +6328,14 @@
       </p:sp>
       <p:sp>
         <p:nvSpPr>
-          <p:cNvPr id="19" name="Text 17"/>
-          <p:cNvSpPr/>
-          <p:nvPr/>
-        </p:nvSpPr>
-        <p:spPr>
-          <a:xfrm>
-            <a:off x="3665144" y="2761488"/>
-            <a:ext cx="1982648" cy="548640"/>
+          <p:cNvPr id="22" name="Text 20"/>
+          <p:cNvSpPr/>
+          <p:nvPr/>
+        </p:nvSpPr>
+        <p:spPr>
+          <a:xfrm>
+            <a:off x="3646856" y="2743200"/>
+            <a:ext cx="2019224" cy="690372"/>
           </a:xfrm>
           <a:prstGeom prst="rect">
             <a:avLst/>
@@ -6241,7 +6349,7 @@
           <a:p>
             <a:pPr algn="ctr" indent="0" marL="0">
               <a:lnSpc>
-                <a:spcPct val="100000"/>
+                <a:spcPct val="98000"/>
               </a:lnSpc>
               <a:buNone/>
             </a:pPr>
@@ -6262,18 +6370,57 @@
       </p:sp>
       <p:sp>
         <p:nvSpPr>
-          <p:cNvPr id="20" name="Shape 18"/>
-          <p:cNvSpPr/>
-          <p:nvPr/>
-        </p:nvSpPr>
-        <p:spPr>
-          <a:xfrm>
-            <a:off x="3628568" y="3584448"/>
-            <a:ext cx="2055800" cy="548640"/>
+          <p:cNvPr id="23" name="Text 21"/>
+          <p:cNvSpPr/>
+          <p:nvPr/>
+        </p:nvSpPr>
+        <p:spPr>
+          <a:xfrm>
+            <a:off x="4473588" y="3406140"/>
+            <a:ext cx="365760" cy="173736"/>
+          </a:xfrm>
+          <a:prstGeom prst="rect">
+            <a:avLst/>
+          </a:prstGeom>
+          <a:noFill/>
+          <a:ln/>
+        </p:spPr>
+        <p:txBody>
+          <a:bodyPr wrap="square" lIns="0" tIns="0" rIns="0" bIns="0" rtlCol="0" anchor="ctr"/>
+          <a:lstStyle/>
+          <a:p>
+            <a:pPr algn="ctr" indent="0" marL="0">
+              <a:buNone/>
+            </a:pPr>
+            <a:r>
+              <a:rPr lang="en-US" sz="1200" b="1" dirty="0">
+                <a:solidFill>
+                  <a:srgbClr val="CBD5E1"/>
+                </a:solidFill>
+                <a:latin typeface="Apple SD Gothic Neo" pitchFamily="34" charset="0"/>
+                <a:ea typeface="Apple SD Gothic Neo" pitchFamily="34" charset="-122"/>
+                <a:cs typeface="Apple SD Gothic Neo" pitchFamily="34" charset="-120"/>
+              </a:rPr>
+              <a:t>↓</a:t>
+            </a:r>
+            <a:endParaRPr lang="en-US" sz="1200" dirty="0"/>
+          </a:p>
+        </p:txBody>
+      </p:sp>
+      <p:sp>
+        <p:nvSpPr>
+          <p:cNvPr id="24" name="Shape 22"/>
+          <p:cNvSpPr/>
+          <p:nvPr/>
+        </p:nvSpPr>
+        <p:spPr>
+          <a:xfrm>
+            <a:off x="3628568" y="3552444"/>
+            <a:ext cx="2055800" cy="690372"/>
           </a:xfrm>
           <a:prstGeom prst="roundRect">
             <a:avLst>
-              <a:gd name="adj" fmla="val 13333"/>
+              <a:gd name="adj" fmla="val 9272"/>
             </a:avLst>
           </a:prstGeom>
           <a:solidFill>
@@ -6289,14 +6436,14 @@
       </p:sp>
       <p:sp>
         <p:nvSpPr>
-          <p:cNvPr id="21" name="Text 19"/>
-          <p:cNvSpPr/>
-          <p:nvPr/>
-        </p:nvSpPr>
-        <p:spPr>
-          <a:xfrm>
-            <a:off x="3665144" y="3584448"/>
-            <a:ext cx="1982648" cy="548640"/>
+          <p:cNvPr id="25" name="Text 23"/>
+          <p:cNvSpPr/>
+          <p:nvPr/>
+        </p:nvSpPr>
+        <p:spPr>
+          <a:xfrm>
+            <a:off x="3646856" y="3552444"/>
+            <a:ext cx="2019224" cy="690372"/>
           </a:xfrm>
           <a:prstGeom prst="rect">
             <a:avLst/>
@@ -6310,7 +6457,7 @@
           <a:p>
             <a:pPr algn="ctr" indent="0" marL="0">
               <a:lnSpc>
-                <a:spcPct val="100000"/>
+                <a:spcPct val="98000"/>
               </a:lnSpc>
               <a:buNone/>
             </a:pPr>
@@ -6331,46 +6478,7 @@
       </p:sp>
       <p:sp>
         <p:nvSpPr>
-          <p:cNvPr id="22" name="Text 20"/>
-          <p:cNvSpPr/>
-          <p:nvPr/>
-        </p:nvSpPr>
-        <p:spPr>
-          <a:xfrm>
-            <a:off x="4473588" y="3291840"/>
-            <a:ext cx="365760" cy="292608"/>
-          </a:xfrm>
-          <a:prstGeom prst="rect">
-            <a:avLst/>
-          </a:prstGeom>
-          <a:noFill/>
-          <a:ln/>
-        </p:spPr>
-        <p:txBody>
-          <a:bodyPr wrap="square" lIns="0" tIns="0" rIns="0" bIns="0" rtlCol="0" anchor="ctr"/>
-          <a:lstStyle/>
-          <a:p>
-            <a:pPr algn="ctr" indent="0" marL="0">
-              <a:buNone/>
-            </a:pPr>
-            <a:r>
-              <a:rPr lang="en-US" sz="1500" b="1" dirty="0">
-                <a:solidFill>
-                  <a:srgbClr val="CBD5E1"/>
-                </a:solidFill>
-                <a:latin typeface="Apple SD Gothic Neo" pitchFamily="34" charset="0"/>
-                <a:ea typeface="Apple SD Gothic Neo" pitchFamily="34" charset="-122"/>
-                <a:cs typeface="Apple SD Gothic Neo" pitchFamily="34" charset="-120"/>
-              </a:rPr>
-              <a:t>↓</a:t>
-            </a:r>
-            <a:endParaRPr lang="en-US" sz="1500" dirty="0"/>
-          </a:p>
-        </p:txBody>
-      </p:sp>
-      <p:sp>
-        <p:nvSpPr>
-          <p:cNvPr id="23" name="Text 21"/>
+          <p:cNvPr id="26" name="Text 24"/>
           <p:cNvSpPr/>
           <p:nvPr/>
         </p:nvSpPr>
@@ -6409,7 +6517,7 @@
       </p:sp>
       <p:sp>
         <p:nvSpPr>
-          <p:cNvPr id="24" name="Shape 22"/>
+          <p:cNvPr id="27" name="Shape 25"/>
           <p:cNvSpPr/>
           <p:nvPr/>
         </p:nvSpPr>
@@ -6443,7 +6551,7 @@
       </p:sp>
       <p:sp>
         <p:nvSpPr>
-          <p:cNvPr id="25" name="Shape 23"/>
+          <p:cNvPr id="28" name="Shape 26"/>
           <p:cNvSpPr/>
           <p:nvPr/>
         </p:nvSpPr>
@@ -6465,7 +6573,7 @@
       </p:sp>
       <p:sp>
         <p:nvSpPr>
-          <p:cNvPr id="26" name="Text 24"/>
+          <p:cNvPr id="29" name="Text 27"/>
           <p:cNvSpPr/>
           <p:nvPr/>
         </p:nvSpPr>
@@ -6504,18 +6612,18 @@
       </p:sp>
       <p:sp>
         <p:nvSpPr>
-          <p:cNvPr id="27" name="Shape 25"/>
-          <p:cNvSpPr/>
-          <p:nvPr/>
-        </p:nvSpPr>
-        <p:spPr>
-          <a:xfrm>
-            <a:off x="6507328" y="2761488"/>
-            <a:ext cx="2055800" cy="548640"/>
+          <p:cNvPr id="30" name="Shape 28"/>
+          <p:cNvSpPr/>
+          <p:nvPr/>
+        </p:nvSpPr>
+        <p:spPr>
+          <a:xfrm>
+            <a:off x="6507328" y="2743200"/>
+            <a:ext cx="2055800" cy="690372"/>
           </a:xfrm>
           <a:prstGeom prst="roundRect">
             <a:avLst>
-              <a:gd name="adj" fmla="val 13333"/>
+              <a:gd name="adj" fmla="val 9272"/>
             </a:avLst>
           </a:prstGeom>
           <a:solidFill>
@@ -6531,14 +6639,14 @@
       </p:sp>
       <p:sp>
         <p:nvSpPr>
-          <p:cNvPr id="28" name="Text 26"/>
-          <p:cNvSpPr/>
-          <p:nvPr/>
-        </p:nvSpPr>
-        <p:spPr>
-          <a:xfrm>
-            <a:off x="6543904" y="2761488"/>
-            <a:ext cx="1982648" cy="548640"/>
+          <p:cNvPr id="31" name="Text 29"/>
+          <p:cNvSpPr/>
+          <p:nvPr/>
+        </p:nvSpPr>
+        <p:spPr>
+          <a:xfrm>
+            <a:off x="6525616" y="2743200"/>
+            <a:ext cx="2019224" cy="690372"/>
           </a:xfrm>
           <a:prstGeom prst="rect">
             <a:avLst/>
@@ -6552,7 +6660,7 @@
           <a:p>
             <a:pPr algn="ctr" indent="0" marL="0">
               <a:lnSpc>
-                <a:spcPct val="100000"/>
+                <a:spcPct val="98000"/>
               </a:lnSpc>
               <a:buNone/>
             </a:pPr>
@@ -6573,18 +6681,57 @@
       </p:sp>
       <p:sp>
         <p:nvSpPr>
-          <p:cNvPr id="29" name="Shape 27"/>
-          <p:cNvSpPr/>
-          <p:nvPr/>
-        </p:nvSpPr>
-        <p:spPr>
-          <a:xfrm>
-            <a:off x="6507328" y="3584448"/>
-            <a:ext cx="2055800" cy="548640"/>
+          <p:cNvPr id="32" name="Text 30"/>
+          <p:cNvSpPr/>
+          <p:nvPr/>
+        </p:nvSpPr>
+        <p:spPr>
+          <a:xfrm>
+            <a:off x="7352348" y="3406140"/>
+            <a:ext cx="365760" cy="173736"/>
+          </a:xfrm>
+          <a:prstGeom prst="rect">
+            <a:avLst/>
+          </a:prstGeom>
+          <a:noFill/>
+          <a:ln/>
+        </p:spPr>
+        <p:txBody>
+          <a:bodyPr wrap="square" lIns="0" tIns="0" rIns="0" bIns="0" rtlCol="0" anchor="ctr"/>
+          <a:lstStyle/>
+          <a:p>
+            <a:pPr algn="ctr" indent="0" marL="0">
+              <a:buNone/>
+            </a:pPr>
+            <a:r>
+              <a:rPr lang="en-US" sz="1200" b="1" dirty="0">
+                <a:solidFill>
+                  <a:srgbClr val="CBD5E1"/>
+                </a:solidFill>
+                <a:latin typeface="Apple SD Gothic Neo" pitchFamily="34" charset="0"/>
+                <a:ea typeface="Apple SD Gothic Neo" pitchFamily="34" charset="-122"/>
+                <a:cs typeface="Apple SD Gothic Neo" pitchFamily="34" charset="-120"/>
+              </a:rPr>
+              <a:t>↓</a:t>
+            </a:r>
+            <a:endParaRPr lang="en-US" sz="1200" dirty="0"/>
+          </a:p>
+        </p:txBody>
+      </p:sp>
+      <p:sp>
+        <p:nvSpPr>
+          <p:cNvPr id="33" name="Shape 31"/>
+          <p:cNvSpPr/>
+          <p:nvPr/>
+        </p:nvSpPr>
+        <p:spPr>
+          <a:xfrm>
+            <a:off x="6507328" y="3552444"/>
+            <a:ext cx="2055800" cy="690372"/>
           </a:xfrm>
           <a:prstGeom prst="roundRect">
             <a:avLst>
-              <a:gd name="adj" fmla="val 13333"/>
+              <a:gd name="adj" fmla="val 9272"/>
             </a:avLst>
           </a:prstGeom>
           <a:solidFill>
@@ -6600,14 +6747,14 @@
       </p:sp>
       <p:sp>
         <p:nvSpPr>
-          <p:cNvPr id="30" name="Text 28"/>
-          <p:cNvSpPr/>
-          <p:nvPr/>
-        </p:nvSpPr>
-        <p:spPr>
-          <a:xfrm>
-            <a:off x="6543904" y="3584448"/>
-            <a:ext cx="1982648" cy="548640"/>
+          <p:cNvPr id="34" name="Text 32"/>
+          <p:cNvSpPr/>
+          <p:nvPr/>
+        </p:nvSpPr>
+        <p:spPr>
+          <a:xfrm>
+            <a:off x="6525616" y="3552444"/>
+            <a:ext cx="2019224" cy="690372"/>
           </a:xfrm>
           <a:prstGeom prst="rect">
             <a:avLst/>
@@ -6621,7 +6768,7 @@
           <a:p>
             <a:pPr algn="ctr" indent="0" marL="0">
               <a:lnSpc>
-                <a:spcPct val="100000"/>
+                <a:spcPct val="98000"/>
               </a:lnSpc>
               <a:buNone/>
             </a:pPr>
@@ -6642,46 +6789,7 @@
       </p:sp>
       <p:sp>
         <p:nvSpPr>
-          <p:cNvPr id="31" name="Text 29"/>
-          <p:cNvSpPr/>
-          <p:nvPr/>
-        </p:nvSpPr>
-        <p:spPr>
-          <a:xfrm>
-            <a:off x="7352348" y="3291840"/>
-            <a:ext cx="365760" cy="292608"/>
-          </a:xfrm>
-          <a:prstGeom prst="rect">
-            <a:avLst/>
-          </a:prstGeom>
-          <a:noFill/>
-          <a:ln/>
-        </p:spPr>
-        <p:txBody>
-          <a:bodyPr wrap="square" lIns="0" tIns="0" rIns="0" bIns="0" rtlCol="0" anchor="ctr"/>
-          <a:lstStyle/>
-          <a:p>
-            <a:pPr algn="ctr" indent="0" marL="0">
-              <a:buNone/>
-            </a:pPr>
-            <a:r>
-              <a:rPr lang="en-US" sz="1500" b="1" dirty="0">
-                <a:solidFill>
-                  <a:srgbClr val="CBD5E1"/>
-                </a:solidFill>
-                <a:latin typeface="Apple SD Gothic Neo" pitchFamily="34" charset="0"/>
-                <a:ea typeface="Apple SD Gothic Neo" pitchFamily="34" charset="-122"/>
-                <a:cs typeface="Apple SD Gothic Neo" pitchFamily="34" charset="-120"/>
-              </a:rPr>
-              <a:t>↓</a:t>
-            </a:r>
-            <a:endParaRPr lang="en-US" sz="1500" dirty="0"/>
-          </a:p>
-        </p:txBody>
-      </p:sp>
-      <p:sp>
-        <p:nvSpPr>
-          <p:cNvPr id="32" name="Text 30"/>
+          <p:cNvPr id="35" name="Text 33"/>
           <p:cNvSpPr/>
           <p:nvPr/>
         </p:nvSpPr>
@@ -6720,7 +6828,7 @@
       </p:sp>
       <p:sp>
         <p:nvSpPr>
-          <p:cNvPr id="33" name="Shape 31"/>
+          <p:cNvPr id="36" name="Shape 34"/>
           <p:cNvSpPr/>
           <p:nvPr/>
         </p:nvSpPr>
@@ -6754,7 +6862,7 @@
       </p:sp>
       <p:sp>
         <p:nvSpPr>
-          <p:cNvPr id="34" name="Shape 32"/>
+          <p:cNvPr id="37" name="Shape 35"/>
           <p:cNvSpPr/>
           <p:nvPr/>
         </p:nvSpPr>
@@ -6776,7 +6884,7 @@
       </p:sp>
       <p:sp>
         <p:nvSpPr>
-          <p:cNvPr id="35" name="Text 33"/>
+          <p:cNvPr id="38" name="Text 36"/>
           <p:cNvSpPr/>
           <p:nvPr/>
         </p:nvSpPr>
@@ -6815,18 +6923,18 @@
       </p:sp>
       <p:sp>
         <p:nvSpPr>
-          <p:cNvPr id="36" name="Shape 34"/>
-          <p:cNvSpPr/>
-          <p:nvPr/>
-        </p:nvSpPr>
-        <p:spPr>
-          <a:xfrm>
-            <a:off x="9386087" y="2761488"/>
-            <a:ext cx="2055800" cy="548640"/>
+          <p:cNvPr id="39" name="Shape 37"/>
+          <p:cNvSpPr/>
+          <p:nvPr/>
+        </p:nvSpPr>
+        <p:spPr>
+          <a:xfrm>
+            <a:off x="9386087" y="2743200"/>
+            <a:ext cx="2055800" cy="690372"/>
           </a:xfrm>
           <a:prstGeom prst="roundRect">
             <a:avLst>
-              <a:gd name="adj" fmla="val 13333"/>
+              <a:gd name="adj" fmla="val 9272"/>
             </a:avLst>
           </a:prstGeom>
           <a:solidFill>
@@ -6842,14 +6950,14 @@
       </p:sp>
       <p:sp>
         <p:nvSpPr>
-          <p:cNvPr id="37" name="Text 35"/>
-          <p:cNvSpPr/>
-          <p:nvPr/>
-        </p:nvSpPr>
-        <p:spPr>
-          <a:xfrm>
-            <a:off x="9422663" y="2761488"/>
-            <a:ext cx="1982648" cy="548640"/>
+          <p:cNvPr id="40" name="Text 38"/>
+          <p:cNvSpPr/>
+          <p:nvPr/>
+        </p:nvSpPr>
+        <p:spPr>
+          <a:xfrm>
+            <a:off x="9404375" y="2743200"/>
+            <a:ext cx="2019224" cy="690372"/>
           </a:xfrm>
           <a:prstGeom prst="rect">
             <a:avLst/>
@@ -6863,7 +6971,7 @@
           <a:p>
             <a:pPr algn="ctr" indent="0" marL="0">
               <a:lnSpc>
-                <a:spcPct val="100000"/>
+                <a:spcPct val="98000"/>
               </a:lnSpc>
               <a:buNone/>
             </a:pPr>
@@ -6884,18 +6992,57 @@
       </p:sp>
       <p:sp>
         <p:nvSpPr>
-          <p:cNvPr id="38" name="Shape 36"/>
-          <p:cNvSpPr/>
-          <p:nvPr/>
-        </p:nvSpPr>
-        <p:spPr>
-          <a:xfrm>
-            <a:off x="9386087" y="3584448"/>
-            <a:ext cx="2055800" cy="548640"/>
+          <p:cNvPr id="41" name="Text 39"/>
+          <p:cNvSpPr/>
+          <p:nvPr/>
+        </p:nvSpPr>
+        <p:spPr>
+          <a:xfrm>
+            <a:off x="10231107" y="3406140"/>
+            <a:ext cx="365760" cy="173736"/>
+          </a:xfrm>
+          <a:prstGeom prst="rect">
+            <a:avLst/>
+          </a:prstGeom>
+          <a:noFill/>
+          <a:ln/>
+        </p:spPr>
+        <p:txBody>
+          <a:bodyPr wrap="square" lIns="0" tIns="0" rIns="0" bIns="0" rtlCol="0" anchor="ctr"/>
+          <a:lstStyle/>
+          <a:p>
+            <a:pPr algn="ctr" indent="0" marL="0">
+              <a:buNone/>
+            </a:pPr>
+            <a:r>
+              <a:rPr lang="en-US" sz="1200" b="1" dirty="0">
+                <a:solidFill>
+                  <a:srgbClr val="CBD5E1"/>
+                </a:solidFill>
+                <a:latin typeface="Apple SD Gothic Neo" pitchFamily="34" charset="0"/>
+                <a:ea typeface="Apple SD Gothic Neo" pitchFamily="34" charset="-122"/>
+                <a:cs typeface="Apple SD Gothic Neo" pitchFamily="34" charset="-120"/>
+              </a:rPr>
+              <a:t>↓</a:t>
+            </a:r>
+            <a:endParaRPr lang="en-US" sz="1200" dirty="0"/>
+          </a:p>
+        </p:txBody>
+      </p:sp>
+      <p:sp>
+        <p:nvSpPr>
+          <p:cNvPr id="42" name="Shape 40"/>
+          <p:cNvSpPr/>
+          <p:nvPr/>
+        </p:nvSpPr>
+        <p:spPr>
+          <a:xfrm>
+            <a:off x="9386087" y="3552444"/>
+            <a:ext cx="2055800" cy="690372"/>
           </a:xfrm>
           <a:prstGeom prst="roundRect">
             <a:avLst>
-              <a:gd name="adj" fmla="val 13333"/>
+              <a:gd name="adj" fmla="val 9272"/>
             </a:avLst>
           </a:prstGeom>
           <a:solidFill>
@@ -6911,14 +7058,14 @@
       </p:sp>
       <p:sp>
         <p:nvSpPr>
-          <p:cNvPr id="39" name="Text 37"/>
-          <p:cNvSpPr/>
-          <p:nvPr/>
-        </p:nvSpPr>
-        <p:spPr>
-          <a:xfrm>
-            <a:off x="9422663" y="3584448"/>
-            <a:ext cx="1982648" cy="548640"/>
+          <p:cNvPr id="43" name="Text 41"/>
+          <p:cNvSpPr/>
+          <p:nvPr/>
+        </p:nvSpPr>
+        <p:spPr>
+          <a:xfrm>
+            <a:off x="9404375" y="3552444"/>
+            <a:ext cx="2019224" cy="690372"/>
           </a:xfrm>
           <a:prstGeom prst="rect">
             <a:avLst/>
@@ -6932,7 +7079,7 @@
           <a:p>
             <a:pPr algn="ctr" indent="0" marL="0">
               <a:lnSpc>
-                <a:spcPct val="100000"/>
+                <a:spcPct val="98000"/>
               </a:lnSpc>
               <a:buNone/>
             </a:pPr>
@@ -6953,46 +7100,7 @@
       </p:sp>
       <p:sp>
         <p:nvSpPr>
-          <p:cNvPr id="40" name="Text 38"/>
-          <p:cNvSpPr/>
-          <p:nvPr/>
-        </p:nvSpPr>
-        <p:spPr>
-          <a:xfrm>
-            <a:off x="10231107" y="3291840"/>
-            <a:ext cx="365760" cy="292608"/>
-          </a:xfrm>
-          <a:prstGeom prst="rect">
-            <a:avLst/>
-          </a:prstGeom>
-          <a:noFill/>
-          <a:ln/>
-        </p:spPr>
-        <p:txBody>
-          <a:bodyPr wrap="square" lIns="0" tIns="0" rIns="0" bIns="0" rtlCol="0" anchor="ctr"/>
-          <a:lstStyle/>
-          <a:p>
-            <a:pPr algn="ctr" indent="0" marL="0">
-              <a:buNone/>
-            </a:pPr>
-            <a:r>
-              <a:rPr lang="en-US" sz="1500" b="1" dirty="0">
-                <a:solidFill>
-                  <a:srgbClr val="CBD5E1"/>
-                </a:solidFill>
-                <a:latin typeface="Apple SD Gothic Neo" pitchFamily="34" charset="0"/>
-                <a:ea typeface="Apple SD Gothic Neo" pitchFamily="34" charset="-122"/>
-                <a:cs typeface="Apple SD Gothic Neo" pitchFamily="34" charset="-120"/>
-              </a:rPr>
-              <a:t>↓</a:t>
-            </a:r>
-            <a:endParaRPr lang="en-US" sz="1500" dirty="0"/>
-          </a:p>
-        </p:txBody>
-      </p:sp>
-      <p:sp>
-        <p:nvSpPr>
-          <p:cNvPr id="41" name="Shape 39"/>
+          <p:cNvPr id="44" name="Shape 42"/>
           <p:cNvSpPr/>
           <p:nvPr/>
         </p:nvSpPr>
@@ -7019,7 +7127,7 @@
       </p:sp>
       <p:sp>
         <p:nvSpPr>
-          <p:cNvPr id="42" name="Text 40"/>
+          <p:cNvPr id="45" name="Text 43"/>
           <p:cNvSpPr/>
           <p:nvPr/>
         </p:nvSpPr>
@@ -7072,7 +7180,7 @@
       </p:sp>
       <p:sp>
         <p:nvSpPr>
-          <p:cNvPr id="43" name="Shape 41"/>
+          <p:cNvPr id="46" name="Shape 44"/>
           <p:cNvSpPr/>
           <p:nvPr/>
         </p:nvSpPr>
@@ -7101,7 +7209,7 @@
       </p:sp>
       <p:sp>
         <p:nvSpPr>
-          <p:cNvPr id="44" name="Text 42"/>
+          <p:cNvPr id="47" name="Text 45"/>
           <p:cNvSpPr/>
           <p:nvPr/>
         </p:nvSpPr>
@@ -8281,7 +8389,7 @@
                 <a:ea typeface="Apple SD Gothic Neo" pitchFamily="34" charset="-122"/>
                 <a:cs typeface="Apple SD Gothic Neo" pitchFamily="34" charset="-120"/>
               </a:rPr>
-              <a:t>행동 라벨 7종</a:t>
+              <a:t>행동 라벨 7종 + 이상행동(개발 예정)</a:t>
             </a:r>
             <a:endParaRPr lang="en-US" sz="1300" dirty="0"/>
           </a:p>
@@ -8295,8 +8403,8 @@
         </p:nvSpPr>
         <p:spPr>
           <a:xfrm>
-            <a:off x="566928" y="2487168"/>
-            <a:ext cx="1417320" cy="365760"/>
+            <a:off x="566928" y="2468880"/>
+            <a:ext cx="1417320" cy="347472"/>
           </a:xfrm>
           <a:prstGeom prst="roundRect">
             <a:avLst>
@@ -8317,8 +8425,8 @@
         </p:nvSpPr>
         <p:spPr>
           <a:xfrm>
-            <a:off x="566928" y="2478024"/>
-            <a:ext cx="1417320" cy="365760"/>
+            <a:off x="566928" y="2459736"/>
+            <a:ext cx="1417320" cy="347472"/>
           </a:xfrm>
           <a:prstGeom prst="rect">
             <a:avLst/>
@@ -8356,8 +8464,8 @@
         </p:nvSpPr>
         <p:spPr>
           <a:xfrm>
-            <a:off x="2148840" y="2487168"/>
-            <a:ext cx="2331720" cy="365760"/>
+            <a:off x="2093976" y="2468880"/>
+            <a:ext cx="2331720" cy="347472"/>
           </a:xfrm>
           <a:prstGeom prst="roundRect">
             <a:avLst>
@@ -8378,8 +8486,8 @@
         </p:nvSpPr>
         <p:spPr>
           <a:xfrm>
-            <a:off x="2148840" y="2478024"/>
-            <a:ext cx="2331720" cy="365760"/>
+            <a:off x="2093976" y="2459736"/>
+            <a:ext cx="2331720" cy="347472"/>
           </a:xfrm>
           <a:prstGeom prst="rect">
             <a:avLst/>
@@ -8417,8 +8525,8 @@
         </p:nvSpPr>
         <p:spPr>
           <a:xfrm>
-            <a:off x="566928" y="3017520"/>
-            <a:ext cx="2331720" cy="365760"/>
+            <a:off x="566928" y="2926080"/>
+            <a:ext cx="2331720" cy="347472"/>
           </a:xfrm>
           <a:prstGeom prst="roundRect">
             <a:avLst>
@@ -8439,8 +8547,8 @@
         </p:nvSpPr>
         <p:spPr>
           <a:xfrm>
-            <a:off x="566928" y="3008376"/>
-            <a:ext cx="2331720" cy="365760"/>
+            <a:off x="566928" y="2916936"/>
+            <a:ext cx="2331720" cy="347472"/>
           </a:xfrm>
           <a:prstGeom prst="rect">
             <a:avLst/>
@@ -8478,8 +8586,8 @@
         </p:nvSpPr>
         <p:spPr>
           <a:xfrm>
-            <a:off x="3063240" y="3017520"/>
-            <a:ext cx="2377440" cy="365760"/>
+            <a:off x="3008376" y="2926080"/>
+            <a:ext cx="2377440" cy="347472"/>
           </a:xfrm>
           <a:prstGeom prst="roundRect">
             <a:avLst>
@@ -8500,8 +8608,8 @@
         </p:nvSpPr>
         <p:spPr>
           <a:xfrm>
-            <a:off x="3063240" y="3008376"/>
-            <a:ext cx="2377440" cy="365760"/>
+            <a:off x="3008376" y="2916936"/>
+            <a:ext cx="2377440" cy="347472"/>
           </a:xfrm>
           <a:prstGeom prst="rect">
             <a:avLst/>
@@ -8539,8 +8647,8 @@
         </p:nvSpPr>
         <p:spPr>
           <a:xfrm>
-            <a:off x="566928" y="3547872"/>
-            <a:ext cx="1371600" cy="365760"/>
+            <a:off x="566928" y="3383280"/>
+            <a:ext cx="1371600" cy="347472"/>
           </a:xfrm>
           <a:prstGeom prst="roundRect">
             <a:avLst>
@@ -8561,8 +8669,8 @@
         </p:nvSpPr>
         <p:spPr>
           <a:xfrm>
-            <a:off x="566928" y="3538728"/>
-            <a:ext cx="1371600" cy="365760"/>
+            <a:off x="566928" y="3374136"/>
+            <a:ext cx="1371600" cy="347472"/>
           </a:xfrm>
           <a:prstGeom prst="rect">
             <a:avLst/>
@@ -8600,8 +8708,8 @@
         </p:nvSpPr>
         <p:spPr>
           <a:xfrm>
-            <a:off x="2103120" y="3547872"/>
-            <a:ext cx="1371600" cy="365760"/>
+            <a:off x="2048256" y="3383280"/>
+            <a:ext cx="1371600" cy="347472"/>
           </a:xfrm>
           <a:prstGeom prst="roundRect">
             <a:avLst>
@@ -8622,8 +8730,8 @@
         </p:nvSpPr>
         <p:spPr>
           <a:xfrm>
-            <a:off x="2103120" y="3538728"/>
-            <a:ext cx="1371600" cy="365760"/>
+            <a:off x="2048256" y="3374136"/>
+            <a:ext cx="1371600" cy="347472"/>
           </a:xfrm>
           <a:prstGeom prst="rect">
             <a:avLst/>
@@ -8661,8 +8769,8 @@
         </p:nvSpPr>
         <p:spPr>
           <a:xfrm>
-            <a:off x="3639312" y="3547872"/>
-            <a:ext cx="1554480" cy="365760"/>
+            <a:off x="3529584" y="3383280"/>
+            <a:ext cx="1554480" cy="347472"/>
           </a:xfrm>
           <a:prstGeom prst="roundRect">
             <a:avLst>
@@ -8683,8 +8791,8 @@
         </p:nvSpPr>
         <p:spPr>
           <a:xfrm>
-            <a:off x="3639312" y="3538728"/>
-            <a:ext cx="1554480" cy="365760"/>
+            <a:off x="3529584" y="3374136"/>
+            <a:ext cx="1554480" cy="347472"/>
           </a:xfrm>
           <a:prstGeom prst="rect">
             <a:avLst/>
@@ -8716,57 +8824,123 @@
       </p:sp>
       <p:sp>
         <p:nvSpPr>
-          <p:cNvPr id="21" name="Text 19"/>
-          <p:cNvSpPr/>
-          <p:nvPr/>
-        </p:nvSpPr>
-        <p:spPr>
-          <a:xfrm>
-            <a:off x="566928" y="4233672"/>
-            <a:ext cx="5486400" cy="274320"/>
-          </a:xfrm>
-          <a:prstGeom prst="rect">
-            <a:avLst/>
-          </a:prstGeom>
-          <a:noFill/>
-          <a:ln/>
-        </p:spPr>
-        <p:txBody>
-          <a:bodyPr wrap="square" lIns="0" tIns="0" rIns="0" bIns="0" rtlCol="0" anchor="ctr"/>
-          <a:lstStyle/>
-          <a:p>
-            <a:pPr indent="0" marL="0">
-              <a:buNone/>
-            </a:pPr>
-            <a:r>
-              <a:rPr lang="en-US" sz="1300" b="1" dirty="0">
-                <a:solidFill>
-                  <a:srgbClr val="1E293B"/>
-                </a:solidFill>
-                <a:latin typeface="Apple SD Gothic Neo" pitchFamily="34" charset="0"/>
-                <a:ea typeface="Apple SD Gothic Neo" pitchFamily="34" charset="-122"/>
-                <a:cs typeface="Apple SD Gothic Neo" pitchFamily="34" charset="-120"/>
-              </a:rPr>
-              <a:t>출력 형식</a:t>
-            </a:r>
-            <a:endParaRPr lang="en-US" sz="1300" dirty="0"/>
-          </a:p>
-        </p:txBody>
-      </p:sp>
-      <p:sp>
-        <p:nvSpPr>
-          <p:cNvPr id="22" name="Shape 20"/>
-          <p:cNvSpPr/>
-          <p:nvPr/>
-        </p:nvSpPr>
-        <p:spPr>
-          <a:xfrm>
-            <a:off x="566928" y="4599432"/>
-            <a:ext cx="5486400" cy="566928"/>
+          <p:cNvPr id="21" name="Shape 19"/>
+          <p:cNvSpPr/>
+          <p:nvPr/>
+        </p:nvSpPr>
+        <p:spPr>
+          <a:xfrm>
+            <a:off x="566928" y="3840480"/>
+            <a:ext cx="2331720" cy="347472"/>
           </a:xfrm>
           <a:prstGeom prst="roundRect">
             <a:avLst>
-              <a:gd name="adj" fmla="val 12903"/>
+              <a:gd name="adj" fmla="val 50000"/>
+            </a:avLst>
+          </a:prstGeom>
+          <a:solidFill>
+            <a:srgbClr val="FEF9EC"/>
+          </a:solidFill>
+          <a:ln w="15875">
+            <a:solidFill>
+              <a:srgbClr val="FCD34D"/>
+            </a:solidFill>
+            <a:prstDash val="dash"/>
+          </a:ln>
+        </p:spPr>
+      </p:sp>
+      <p:sp>
+        <p:nvSpPr>
+          <p:cNvPr id="22" name="Text 20"/>
+          <p:cNvSpPr/>
+          <p:nvPr/>
+        </p:nvSpPr>
+        <p:spPr>
+          <a:xfrm>
+            <a:off x="566928" y="3831336"/>
+            <a:ext cx="2331720" cy="347472"/>
+          </a:xfrm>
+          <a:prstGeom prst="rect">
+            <a:avLst/>
+          </a:prstGeom>
+          <a:noFill/>
+          <a:ln/>
+        </p:spPr>
+        <p:txBody>
+          <a:bodyPr wrap="square" lIns="0" tIns="0" rIns="0" bIns="0" rtlCol="0" anchor="ctr"/>
+          <a:lstStyle/>
+          <a:p>
+            <a:pPr algn="ctr" indent="0" marL="0">
+              <a:buNone/>
+            </a:pPr>
+            <a:r>
+              <a:rPr lang="en-US" sz="1050" b="1" dirty="0">
+                <a:solidFill>
+                  <a:srgbClr val="92400E"/>
+                </a:solidFill>
+                <a:latin typeface="Apple SD Gothic Neo" pitchFamily="34" charset="0"/>
+                <a:ea typeface="Apple SD Gothic Neo" pitchFamily="34" charset="-122"/>
+                <a:cs typeface="Apple SD Gothic Neo" pitchFamily="34" charset="-120"/>
+              </a:rPr>
+              <a:t>이상행동 · 개발 예정</a:t>
+            </a:r>
+            <a:endParaRPr lang="en-US" sz="1050" dirty="0"/>
+          </a:p>
+        </p:txBody>
+      </p:sp>
+      <p:sp>
+        <p:nvSpPr>
+          <p:cNvPr id="23" name="Text 21"/>
+          <p:cNvSpPr/>
+          <p:nvPr/>
+        </p:nvSpPr>
+        <p:spPr>
+          <a:xfrm>
+            <a:off x="566928" y="4443984"/>
+            <a:ext cx="5486400" cy="256032"/>
+          </a:xfrm>
+          <a:prstGeom prst="rect">
+            <a:avLst/>
+          </a:prstGeom>
+          <a:noFill/>
+          <a:ln/>
+        </p:spPr>
+        <p:txBody>
+          <a:bodyPr wrap="square" lIns="0" tIns="0" rIns="0" bIns="0" rtlCol="0" anchor="ctr"/>
+          <a:lstStyle/>
+          <a:p>
+            <a:pPr indent="0" marL="0">
+              <a:buNone/>
+            </a:pPr>
+            <a:r>
+              <a:rPr lang="en-US" sz="1300" b="1" dirty="0">
+                <a:solidFill>
+                  <a:srgbClr val="1E293B"/>
+                </a:solidFill>
+                <a:latin typeface="Apple SD Gothic Neo" pitchFamily="34" charset="0"/>
+                <a:ea typeface="Apple SD Gothic Neo" pitchFamily="34" charset="-122"/>
+                <a:cs typeface="Apple SD Gothic Neo" pitchFamily="34" charset="-120"/>
+              </a:rPr>
+              <a:t>출력 형식</a:t>
+            </a:r>
+            <a:endParaRPr lang="en-US" sz="1300" dirty="0"/>
+          </a:p>
+        </p:txBody>
+      </p:sp>
+      <p:sp>
+        <p:nvSpPr>
+          <p:cNvPr id="24" name="Shape 22"/>
+          <p:cNvSpPr/>
+          <p:nvPr/>
+        </p:nvSpPr>
+        <p:spPr>
+          <a:xfrm>
+            <a:off x="566928" y="4773168"/>
+            <a:ext cx="5486400" cy="512064"/>
+          </a:xfrm>
+          <a:prstGeom prst="roundRect">
+            <a:avLst>
+              <a:gd name="adj" fmla="val 14286"/>
             </a:avLst>
           </a:prstGeom>
           <a:solidFill>
@@ -8782,14 +8956,14 @@
       </p:sp>
       <p:sp>
         <p:nvSpPr>
-          <p:cNvPr id="23" name="Text 21"/>
-          <p:cNvSpPr/>
-          <p:nvPr/>
-        </p:nvSpPr>
-        <p:spPr>
-          <a:xfrm>
-            <a:off x="566928" y="4599432"/>
-            <a:ext cx="5486400" cy="566928"/>
+          <p:cNvPr id="25" name="Text 23"/>
+          <p:cNvSpPr/>
+          <p:nvPr/>
+        </p:nvSpPr>
+        <p:spPr>
+          <a:xfrm>
+            <a:off x="566928" y="4773168"/>
+            <a:ext cx="5486400" cy="512064"/>
           </a:xfrm>
           <a:prstGeom prst="rect">
             <a:avLst/>
@@ -8805,7 +8979,7 @@
               <a:buNone/>
             </a:pPr>
             <a:r>
-              <a:rPr lang="en-US" sz="1500" b="1" dirty="0">
+              <a:rPr lang="en-US" sz="1450" b="1" dirty="0">
                 <a:solidFill>
                   <a:srgbClr val="92400E"/>
                 </a:solidFill>
@@ -8815,13 +8989,13 @@
               </a:rPr>
               <a:t>{ action, confidence, reasoning }</a:t>
             </a:r>
-            <a:endParaRPr lang="en-US" sz="1500" dirty="0"/>
-          </a:p>
-        </p:txBody>
-      </p:sp>
-      <p:sp>
-        <p:nvSpPr>
-          <p:cNvPr id="24" name="Text 22"/>
+            <a:endParaRPr lang="en-US" sz="1450" dirty="0"/>
+          </a:p>
+        </p:txBody>
+      </p:sp>
+      <p:sp>
+        <p:nvSpPr>
+          <p:cNvPr id="26" name="Text 24"/>
           <p:cNvSpPr/>
           <p:nvPr/>
         </p:nvSpPr>
@@ -8860,7 +9034,7 @@
       </p:sp>
       <p:sp>
         <p:nvSpPr>
-          <p:cNvPr id="25" name="Shape 23"/>
+          <p:cNvPr id="27" name="Shape 25"/>
           <p:cNvSpPr/>
           <p:nvPr/>
         </p:nvSpPr>
@@ -8894,7 +9068,7 @@
       </p:sp>
       <p:sp>
         <p:nvSpPr>
-          <p:cNvPr id="26" name="Text 24"/>
+          <p:cNvPr id="28" name="Text 26"/>
           <p:cNvSpPr/>
           <p:nvPr/>
         </p:nvSpPr>
@@ -8933,7 +9107,7 @@
       </p:sp>
       <p:sp>
         <p:nvSpPr>
-          <p:cNvPr id="27" name="Text 25"/>
+          <p:cNvPr id="29" name="Text 27"/>
           <p:cNvSpPr/>
           <p:nvPr/>
         </p:nvSpPr>
@@ -8975,7 +9149,7 @@
       </p:sp>
       <p:sp>
         <p:nvSpPr>
-          <p:cNvPr id="28" name="Shape 26"/>
+          <p:cNvPr id="30" name="Shape 28"/>
           <p:cNvSpPr/>
           <p:nvPr/>
         </p:nvSpPr>
@@ -9009,7 +9183,7 @@
       </p:sp>
       <p:sp>
         <p:nvSpPr>
-          <p:cNvPr id="29" name="Text 27"/>
+          <p:cNvPr id="31" name="Text 29"/>
           <p:cNvSpPr/>
           <p:nvPr/>
         </p:nvSpPr>
@@ -9048,7 +9222,7 @@
       </p:sp>
       <p:sp>
         <p:nvSpPr>
-          <p:cNvPr id="30" name="Text 28"/>
+          <p:cNvPr id="32" name="Text 30"/>
           <p:cNvSpPr/>
           <p:nvPr/>
         </p:nvSpPr>
@@ -9090,7 +9264,7 @@
       </p:sp>
       <p:sp>
         <p:nvSpPr>
-          <p:cNvPr id="31" name="Shape 29"/>
+          <p:cNvPr id="33" name="Shape 31"/>
           <p:cNvSpPr/>
           <p:nvPr/>
         </p:nvSpPr>
@@ -9124,7 +9298,7 @@
       </p:sp>
       <p:sp>
         <p:nvSpPr>
-          <p:cNvPr id="32" name="Text 30"/>
+          <p:cNvPr id="34" name="Text 32"/>
           <p:cNvSpPr/>
           <p:nvPr/>
         </p:nvSpPr>
@@ -9163,7 +9337,7 @@
       </p:sp>
       <p:sp>
         <p:nvSpPr>
-          <p:cNvPr id="33" name="Text 31"/>
+          <p:cNvPr id="35" name="Text 33"/>
           <p:cNvSpPr/>
           <p:nvPr/>
         </p:nvSpPr>
@@ -9205,7 +9379,7 @@
       </p:sp>
       <p:sp>
         <p:nvSpPr>
-          <p:cNvPr id="34" name="Shape 32"/>
+          <p:cNvPr id="36" name="Shape 34"/>
           <p:cNvSpPr/>
           <p:nvPr/>
         </p:nvSpPr>
@@ -9234,7 +9408,7 @@
       </p:sp>
       <p:sp>
         <p:nvSpPr>
-          <p:cNvPr id="35" name="Text 33"/>
+          <p:cNvPr id="37" name="Text 35"/>
           <p:cNvSpPr/>
           <p:nvPr/>
         </p:nvSpPr>

--- a/docs/ir/teraai-rba-investor.pptx
+++ b/docs/ir/teraai-rba-investor.pptx
@@ -2353,8 +2353,8 @@
         </p:nvSpPr>
         <p:spPr>
           <a:xfrm>
-            <a:off x="566928" y="2148840"/>
-            <a:ext cx="3259226" cy="292608"/>
+            <a:off x="566928" y="2103120"/>
+            <a:ext cx="3259226" cy="274320"/>
           </a:xfrm>
           <a:prstGeom prst="rect">
             <a:avLst/>
@@ -2370,7 +2370,7 @@
               <a:buNone/>
             </a:pPr>
             <a:r>
-              <a:rPr lang="en-US" sz="1250" b="1" dirty="0">
+              <a:rPr lang="en-US" sz="1200" b="1" dirty="0">
                 <a:solidFill>
                   <a:srgbClr val="047857"/>
                 </a:solidFill>
@@ -2378,9 +2378,9 @@
                 <a:ea typeface="Apple SD Gothic Neo" pitchFamily="34" charset="-122"/>
                 <a:cs typeface="Apple SD Gothic Neo" pitchFamily="34" charset="-120"/>
               </a:rPr>
-              <a:t>수집 / 저장</a:t>
-            </a:r>
-            <a:endParaRPr lang="en-US" sz="1250" dirty="0"/>
+              <a:t>① 수집 / 저장</a:t>
+            </a:r>
+            <a:endParaRPr lang="en-US" sz="1200" dirty="0"/>
           </a:p>
         </p:txBody>
       </p:sp>
@@ -2392,8 +2392,8 @@
         </p:nvSpPr>
         <p:spPr>
           <a:xfrm>
-            <a:off x="4466234" y="2148840"/>
-            <a:ext cx="3259226" cy="292608"/>
+            <a:off x="4466234" y="2103120"/>
+            <a:ext cx="3259226" cy="274320"/>
           </a:xfrm>
           <a:prstGeom prst="rect">
             <a:avLst/>
@@ -2409,7 +2409,7 @@
               <a:buNone/>
             </a:pPr>
             <a:r>
-              <a:rPr lang="en-US" sz="1250" b="1" dirty="0">
+              <a:rPr lang="en-US" sz="1200" b="1" dirty="0">
                 <a:solidFill>
                   <a:srgbClr val="92400E"/>
                 </a:solidFill>
@@ -2417,9 +2417,9 @@
                 <a:ea typeface="Apple SD Gothic Neo" pitchFamily="34" charset="-122"/>
                 <a:cs typeface="Apple SD Gothic Neo" pitchFamily="34" charset="-120"/>
               </a:rPr>
-              <a:t>Track A — 전수 1차 라벨링</a:t>
-            </a:r>
-            <a:endParaRPr lang="en-US" sz="1250" dirty="0"/>
+              <a:t>② Track A · 전수 1차 판독</a:t>
+            </a:r>
+            <a:endParaRPr lang="en-US" sz="1200" dirty="0"/>
           </a:p>
         </p:txBody>
       </p:sp>
@@ -2431,8 +2431,8 @@
         </p:nvSpPr>
         <p:spPr>
           <a:xfrm>
-            <a:off x="8365541" y="2148840"/>
-            <a:ext cx="3259226" cy="292608"/>
+            <a:off x="8365541" y="2103120"/>
+            <a:ext cx="3259226" cy="274320"/>
           </a:xfrm>
           <a:prstGeom prst="rect">
             <a:avLst/>
@@ -2448,7 +2448,7 @@
               <a:buNone/>
             </a:pPr>
             <a:r>
-              <a:rPr lang="en-US" sz="1250" b="1" dirty="0">
+              <a:rPr lang="en-US" sz="1200" b="1" dirty="0">
                 <a:solidFill>
                   <a:srgbClr val="7C3AED"/>
                 </a:solidFill>
@@ -2456,9 +2456,9 @@
                 <a:ea typeface="Apple SD Gothic Neo" pitchFamily="34" charset="-122"/>
                 <a:cs typeface="Apple SD Gothic Neo" pitchFamily="34" charset="-120"/>
               </a:rPr>
-              <a:t>Track B — 정밀 분석 / 회복</a:t>
-            </a:r>
-            <a:endParaRPr lang="en-US" sz="1250" dirty="0"/>
+              <a:t>③ Track B · 정밀 판독</a:t>
+            </a:r>
+            <a:endParaRPr lang="en-US" sz="1200" dirty="0"/>
           </a:p>
         </p:txBody>
       </p:sp>
@@ -2470,7 +2470,7 @@
         </p:nvSpPr>
         <p:spPr>
           <a:xfrm>
-            <a:off x="566928" y="2606040"/>
+            <a:off x="566928" y="2523744"/>
             <a:ext cx="3259226" cy="566928"/>
           </a:xfrm>
           <a:prstGeom prst="roundRect">
@@ -2497,8 +2497,8 @@
         </p:nvSpPr>
         <p:spPr>
           <a:xfrm>
-            <a:off x="658368" y="2660904"/>
-            <a:ext cx="3076346" cy="457200"/>
+            <a:off x="640080" y="2578608"/>
+            <a:ext cx="3112922" cy="457200"/>
           </a:xfrm>
           <a:prstGeom prst="rect">
             <a:avLst/>
@@ -2517,7 +2517,7 @@
               <a:buNone/>
             </a:pPr>
             <a:r>
-              <a:rPr lang="en-US" sz="1150" b="1" dirty="0">
+              <a:rPr lang="en-US" sz="1100" b="1" dirty="0">
                 <a:solidFill>
                   <a:srgbClr val="1E293B"/>
                 </a:solidFill>
@@ -2527,7 +2527,7 @@
               </a:rPr>
               <a:t>카메라 / 자체 HW</a:t>
             </a:r>
-            <a:endParaRPr lang="en-US" sz="1150" dirty="0"/>
+            <a:endParaRPr lang="en-US" sz="1100" dirty="0"/>
           </a:p>
           <a:p>
             <a:pPr algn="ctr" indent="0" marL="0">
@@ -2537,7 +2537,7 @@
               <a:buNone/>
             </a:pPr>
             <a:r>
-              <a:rPr lang="en-US" sz="880" dirty="0">
+              <a:rPr lang="en-US" sz="860" dirty="0">
                 <a:solidFill>
                   <a:srgbClr val="64748B"/>
                 </a:solidFill>
@@ -2547,58 +2547,19 @@
               </a:rPr>
               <a:t>밤사이 RTSP 영상</a:t>
             </a:r>
-            <a:endParaRPr lang="en-US" sz="1150" dirty="0"/>
-          </a:p>
-        </p:txBody>
-      </p:sp>
-      <p:sp>
-        <p:nvSpPr>
-          <p:cNvPr id="11" name="Text 9"/>
-          <p:cNvSpPr/>
-          <p:nvPr/>
-        </p:nvSpPr>
-        <p:spPr>
-          <a:xfrm>
-            <a:off x="2013661" y="3154680"/>
-            <a:ext cx="365760" cy="274320"/>
-          </a:xfrm>
-          <a:prstGeom prst="rect">
-            <a:avLst/>
-          </a:prstGeom>
-          <a:noFill/>
-          <a:ln/>
-        </p:spPr>
-        <p:txBody>
-          <a:bodyPr wrap="square" lIns="0" tIns="0" rIns="0" bIns="0" rtlCol="0" anchor="ctr"/>
-          <a:lstStyle/>
-          <a:p>
-            <a:pPr algn="ctr" indent="0" marL="0">
-              <a:buNone/>
-            </a:pPr>
-            <a:r>
-              <a:rPr lang="en-US" sz="1400" b="1" dirty="0">
-                <a:solidFill>
-                  <a:srgbClr val="CBD5E1"/>
-                </a:solidFill>
-                <a:latin typeface="Apple SD Gothic Neo" pitchFamily="34" charset="0"/>
-                <a:ea typeface="Apple SD Gothic Neo" pitchFamily="34" charset="-122"/>
-                <a:cs typeface="Apple SD Gothic Neo" pitchFamily="34" charset="-120"/>
-              </a:rPr>
-              <a:t>↓</a:t>
-            </a:r>
-            <a:endParaRPr lang="en-US" sz="1400" dirty="0"/>
-          </a:p>
-        </p:txBody>
-      </p:sp>
-      <p:sp>
-        <p:nvSpPr>
-          <p:cNvPr id="12" name="Shape 10"/>
-          <p:cNvSpPr/>
-          <p:nvPr/>
-        </p:nvSpPr>
-        <p:spPr>
-          <a:xfrm>
-            <a:off x="566928" y="3410712"/>
+            <a:endParaRPr lang="en-US" sz="1100" dirty="0"/>
+          </a:p>
+        </p:txBody>
+      </p:sp>
+      <p:sp>
+        <p:nvSpPr>
+          <p:cNvPr id="11" name="Shape 9"/>
+          <p:cNvSpPr/>
+          <p:nvPr/>
+        </p:nvSpPr>
+        <p:spPr>
+          <a:xfrm>
+            <a:off x="566928" y="3310128"/>
             <a:ext cx="3259226" cy="566928"/>
           </a:xfrm>
           <a:prstGeom prst="roundRect">
@@ -2619,14 +2580,14 @@
       </p:sp>
       <p:sp>
         <p:nvSpPr>
-          <p:cNvPr id="13" name="Text 11"/>
-          <p:cNvSpPr/>
-          <p:nvPr/>
-        </p:nvSpPr>
-        <p:spPr>
-          <a:xfrm>
-            <a:off x="658368" y="3465576"/>
-            <a:ext cx="3076346" cy="457200"/>
+          <p:cNvPr id="12" name="Text 10"/>
+          <p:cNvSpPr/>
+          <p:nvPr/>
+        </p:nvSpPr>
+        <p:spPr>
+          <a:xfrm>
+            <a:off x="640080" y="3364992"/>
+            <a:ext cx="3112922" cy="457200"/>
           </a:xfrm>
           <a:prstGeom prst="rect">
             <a:avLst/>
@@ -2645,7 +2606,7 @@
               <a:buNone/>
             </a:pPr>
             <a:r>
-              <a:rPr lang="en-US" sz="1150" b="1" dirty="0">
+              <a:rPr lang="en-US" sz="1100" b="1" dirty="0">
                 <a:solidFill>
                   <a:srgbClr val="1E293B"/>
                 </a:solidFill>
@@ -2655,7 +2616,7 @@
               </a:rPr>
               <a:t>Capture Worker</a:t>
             </a:r>
-            <a:endParaRPr lang="en-US" sz="1150" dirty="0"/>
+            <a:endParaRPr lang="en-US" sz="1100" dirty="0"/>
           </a:p>
           <a:p>
             <a:pPr algn="ctr" indent="0" marL="0">
@@ -2665,7 +2626,7 @@
               <a:buNone/>
             </a:pPr>
             <a:r>
-              <a:rPr lang="en-US" sz="880" dirty="0">
+              <a:rPr lang="en-US" sz="860" dirty="0">
                 <a:solidFill>
                   <a:srgbClr val="64748B"/>
                 </a:solidFill>
@@ -2675,58 +2636,19 @@
               </a:rPr>
               <a:t>1분 mp4 생성</a:t>
             </a:r>
-            <a:endParaRPr lang="en-US" sz="1150" dirty="0"/>
-          </a:p>
-        </p:txBody>
-      </p:sp>
-      <p:sp>
-        <p:nvSpPr>
-          <p:cNvPr id="14" name="Text 12"/>
-          <p:cNvSpPr/>
-          <p:nvPr/>
-        </p:nvSpPr>
-        <p:spPr>
-          <a:xfrm>
-            <a:off x="2013661" y="3959352"/>
-            <a:ext cx="365760" cy="274320"/>
-          </a:xfrm>
-          <a:prstGeom prst="rect">
-            <a:avLst/>
-          </a:prstGeom>
-          <a:noFill/>
-          <a:ln/>
-        </p:spPr>
-        <p:txBody>
-          <a:bodyPr wrap="square" lIns="0" tIns="0" rIns="0" bIns="0" rtlCol="0" anchor="ctr"/>
-          <a:lstStyle/>
-          <a:p>
-            <a:pPr algn="ctr" indent="0" marL="0">
-              <a:buNone/>
-            </a:pPr>
-            <a:r>
-              <a:rPr lang="en-US" sz="1400" b="1" dirty="0">
-                <a:solidFill>
-                  <a:srgbClr val="CBD5E1"/>
-                </a:solidFill>
-                <a:latin typeface="Apple SD Gothic Neo" pitchFamily="34" charset="0"/>
-                <a:ea typeface="Apple SD Gothic Neo" pitchFamily="34" charset="-122"/>
-                <a:cs typeface="Apple SD Gothic Neo" pitchFamily="34" charset="-120"/>
-              </a:rPr>
-              <a:t>↓</a:t>
-            </a:r>
-            <a:endParaRPr lang="en-US" sz="1400" dirty="0"/>
-          </a:p>
-        </p:txBody>
-      </p:sp>
-      <p:sp>
-        <p:nvSpPr>
-          <p:cNvPr id="15" name="Shape 13"/>
-          <p:cNvSpPr/>
-          <p:nvPr/>
-        </p:nvSpPr>
-        <p:spPr>
-          <a:xfrm>
-            <a:off x="566928" y="4215384"/>
+            <a:endParaRPr lang="en-US" sz="1100" dirty="0"/>
+          </a:p>
+        </p:txBody>
+      </p:sp>
+      <p:sp>
+        <p:nvSpPr>
+          <p:cNvPr id="13" name="Shape 11"/>
+          <p:cNvSpPr/>
+          <p:nvPr/>
+        </p:nvSpPr>
+        <p:spPr>
+          <a:xfrm>
+            <a:off x="566928" y="4096512"/>
             <a:ext cx="3259226" cy="566928"/>
           </a:xfrm>
           <a:prstGeom prst="roundRect">
@@ -2747,14 +2669,14 @@
       </p:sp>
       <p:sp>
         <p:nvSpPr>
-          <p:cNvPr id="16" name="Text 14"/>
-          <p:cNvSpPr/>
-          <p:nvPr/>
-        </p:nvSpPr>
-        <p:spPr>
-          <a:xfrm>
-            <a:off x="658368" y="4270248"/>
-            <a:ext cx="3076346" cy="457200"/>
+          <p:cNvPr id="14" name="Text 12"/>
+          <p:cNvSpPr/>
+          <p:nvPr/>
+        </p:nvSpPr>
+        <p:spPr>
+          <a:xfrm>
+            <a:off x="640080" y="4151376"/>
+            <a:ext cx="3112922" cy="457200"/>
           </a:xfrm>
           <a:prstGeom prst="rect">
             <a:avLst/>
@@ -2773,7 +2695,7 @@
               <a:buNone/>
             </a:pPr>
             <a:r>
-              <a:rPr lang="en-US" sz="1150" b="1" dirty="0">
+              <a:rPr lang="en-US" sz="1100" b="1" dirty="0">
                 <a:solidFill>
                   <a:srgbClr val="047857"/>
                 </a:solidFill>
@@ -2783,7 +2705,7 @@
               </a:rPr>
               <a:t>Motion Detection</a:t>
             </a:r>
-            <a:endParaRPr lang="en-US" sz="1150" dirty="0"/>
+            <a:endParaRPr lang="en-US" sz="1100" dirty="0"/>
           </a:p>
           <a:p>
             <a:pPr algn="ctr" indent="0" marL="0">
@@ -2793,7 +2715,7 @@
               <a:buNone/>
             </a:pPr>
             <a:r>
-              <a:rPr lang="en-US" sz="880" dirty="0">
+              <a:rPr lang="en-US" sz="860" dirty="0">
                 <a:solidFill>
                   <a:srgbClr val="64748B"/>
                 </a:solidFill>
@@ -2803,58 +2725,19 @@
               </a:rPr>
               <a:t>움직임 있는 클립 선별</a:t>
             </a:r>
-            <a:endParaRPr lang="en-US" sz="1150" dirty="0"/>
-          </a:p>
-        </p:txBody>
-      </p:sp>
-      <p:sp>
-        <p:nvSpPr>
-          <p:cNvPr id="17" name="Text 15"/>
-          <p:cNvSpPr/>
-          <p:nvPr/>
-        </p:nvSpPr>
-        <p:spPr>
-          <a:xfrm>
-            <a:off x="2013661" y="4764024"/>
-            <a:ext cx="365760" cy="274320"/>
-          </a:xfrm>
-          <a:prstGeom prst="rect">
-            <a:avLst/>
-          </a:prstGeom>
-          <a:noFill/>
-          <a:ln/>
-        </p:spPr>
-        <p:txBody>
-          <a:bodyPr wrap="square" lIns="0" tIns="0" rIns="0" bIns="0" rtlCol="0" anchor="ctr"/>
-          <a:lstStyle/>
-          <a:p>
-            <a:pPr algn="ctr" indent="0" marL="0">
-              <a:buNone/>
-            </a:pPr>
-            <a:r>
-              <a:rPr lang="en-US" sz="1400" b="1" dirty="0">
-                <a:solidFill>
-                  <a:srgbClr val="CBD5E1"/>
-                </a:solidFill>
-                <a:latin typeface="Apple SD Gothic Neo" pitchFamily="34" charset="0"/>
-                <a:ea typeface="Apple SD Gothic Neo" pitchFamily="34" charset="-122"/>
-                <a:cs typeface="Apple SD Gothic Neo" pitchFamily="34" charset="-120"/>
-              </a:rPr>
-              <a:t>↓</a:t>
-            </a:r>
-            <a:endParaRPr lang="en-US" sz="1400" dirty="0"/>
-          </a:p>
-        </p:txBody>
-      </p:sp>
-      <p:sp>
-        <p:nvSpPr>
-          <p:cNvPr id="18" name="Shape 16"/>
-          <p:cNvSpPr/>
-          <p:nvPr/>
-        </p:nvSpPr>
-        <p:spPr>
-          <a:xfrm>
-            <a:off x="566928" y="5020056"/>
+            <a:endParaRPr lang="en-US" sz="1100" dirty="0"/>
+          </a:p>
+        </p:txBody>
+      </p:sp>
+      <p:sp>
+        <p:nvSpPr>
+          <p:cNvPr id="15" name="Shape 13"/>
+          <p:cNvSpPr/>
+          <p:nvPr/>
+        </p:nvSpPr>
+        <p:spPr>
+          <a:xfrm>
+            <a:off x="566928" y="4882896"/>
             <a:ext cx="1538173" cy="566928"/>
           </a:xfrm>
           <a:prstGeom prst="roundRect">
@@ -2875,13 +2758,13 @@
       </p:sp>
       <p:sp>
         <p:nvSpPr>
-          <p:cNvPr id="19" name="Text 17"/>
-          <p:cNvSpPr/>
-          <p:nvPr/>
-        </p:nvSpPr>
-        <p:spPr>
-          <a:xfrm>
-            <a:off x="566928" y="5074920"/>
+          <p:cNvPr id="16" name="Text 14"/>
+          <p:cNvSpPr/>
+          <p:nvPr/>
+        </p:nvSpPr>
+        <p:spPr>
+          <a:xfrm>
+            <a:off x="566928" y="4937760"/>
             <a:ext cx="1538173" cy="457200"/>
           </a:xfrm>
           <a:prstGeom prst="rect">
@@ -2901,7 +2784,7 @@
               <a:buNone/>
             </a:pPr>
             <a:r>
-              <a:rPr lang="en-US" sz="1050" b="1" dirty="0">
+              <a:rPr lang="en-US" sz="1000" b="1" dirty="0">
                 <a:solidFill>
                   <a:srgbClr val="2563EB"/>
                 </a:solidFill>
@@ -2911,7 +2794,7 @@
               </a:rPr>
               <a:t>Supabase</a:t>
             </a:r>
-            <a:endParaRPr lang="en-US" sz="1050" dirty="0"/>
+            <a:endParaRPr lang="en-US" sz="1000" dirty="0"/>
           </a:p>
           <a:p>
             <a:pPr algn="ctr" indent="0" marL="0">
@@ -2921,7 +2804,7 @@
               <a:buNone/>
             </a:pPr>
             <a:r>
-              <a:rPr lang="en-US" sz="850" dirty="0">
+              <a:rPr lang="en-US" sz="830" dirty="0">
                 <a:solidFill>
                   <a:srgbClr val="64748B"/>
                 </a:solidFill>
@@ -2931,19 +2814,19 @@
               </a:rPr>
               <a:t>clip metadata</a:t>
             </a:r>
-            <a:endParaRPr lang="en-US" sz="1050" dirty="0"/>
-          </a:p>
-        </p:txBody>
-      </p:sp>
-      <p:sp>
-        <p:nvSpPr>
-          <p:cNvPr id="20" name="Shape 18"/>
-          <p:cNvSpPr/>
-          <p:nvPr/>
-        </p:nvSpPr>
-        <p:spPr>
-          <a:xfrm>
-            <a:off x="2287981" y="5020056"/>
+            <a:endParaRPr lang="en-US" sz="1000" dirty="0"/>
+          </a:p>
+        </p:txBody>
+      </p:sp>
+      <p:sp>
+        <p:nvSpPr>
+          <p:cNvPr id="17" name="Shape 15"/>
+          <p:cNvSpPr/>
+          <p:nvPr/>
+        </p:nvSpPr>
+        <p:spPr>
+          <a:xfrm>
+            <a:off x="2287981" y="4882896"/>
             <a:ext cx="1538173" cy="566928"/>
           </a:xfrm>
           <a:prstGeom prst="roundRect">
@@ -2964,13 +2847,13 @@
       </p:sp>
       <p:sp>
         <p:nvSpPr>
-          <p:cNvPr id="21" name="Text 19"/>
-          <p:cNvSpPr/>
-          <p:nvPr/>
-        </p:nvSpPr>
-        <p:spPr>
-          <a:xfrm>
-            <a:off x="2287981" y="5074920"/>
+          <p:cNvPr id="18" name="Text 16"/>
+          <p:cNvSpPr/>
+          <p:nvPr/>
+        </p:nvSpPr>
+        <p:spPr>
+          <a:xfrm>
+            <a:off x="2287981" y="4937760"/>
             <a:ext cx="1538173" cy="457200"/>
           </a:xfrm>
           <a:prstGeom prst="rect">
@@ -2990,7 +2873,7 @@
               <a:buNone/>
             </a:pPr>
             <a:r>
-              <a:rPr lang="en-US" sz="1050" b="1" dirty="0">
+              <a:rPr lang="en-US" sz="1000" b="1" dirty="0">
                 <a:solidFill>
                   <a:srgbClr val="2563EB"/>
                 </a:solidFill>
@@ -3000,7 +2883,7 @@
               </a:rPr>
               <a:t>R2 Storage</a:t>
             </a:r>
-            <a:endParaRPr lang="en-US" sz="1050" dirty="0"/>
+            <a:endParaRPr lang="en-US" sz="1000" dirty="0"/>
           </a:p>
           <a:p>
             <a:pPr algn="ctr" indent="0" marL="0">
@@ -3010,7 +2893,7 @@
               <a:buNone/>
             </a:pPr>
             <a:r>
-              <a:rPr lang="en-US" sz="850" dirty="0">
+              <a:rPr lang="en-US" sz="830" dirty="0">
                 <a:solidFill>
                   <a:srgbClr val="64748B"/>
                 </a:solidFill>
@@ -3020,9 +2903,84 @@
               </a:rPr>
               <a:t>영상 / 썸네일</a:t>
             </a:r>
-            <a:endParaRPr lang="en-US" sz="1050" dirty="0"/>
-          </a:p>
-        </p:txBody>
+            <a:endParaRPr lang="en-US" sz="1000" dirty="0"/>
+          </a:p>
+        </p:txBody>
+      </p:sp>
+      <p:sp>
+        <p:nvSpPr>
+          <p:cNvPr id="19" name="Shape 17"/>
+          <p:cNvSpPr/>
+          <p:nvPr/>
+        </p:nvSpPr>
+        <p:spPr>
+          <a:xfrm>
+            <a:off x="2196541" y="3090672"/>
+            <a:ext cx="0" cy="219456"/>
+          </a:xfrm>
+          <a:prstGeom prst="line">
+            <a:avLst/>
+          </a:prstGeom>
+          <a:noFill/>
+          <a:ln w="19050">
+            <a:solidFill>
+              <a:srgbClr val="CBD5E1"/>
+            </a:solidFill>
+            <a:prstDash val="solid"/>
+            <a:headEnd type="none"/>
+            <a:tailEnd type="triangle"/>
+          </a:ln>
+        </p:spPr>
+      </p:sp>
+      <p:sp>
+        <p:nvSpPr>
+          <p:cNvPr id="20" name="Shape 18"/>
+          <p:cNvSpPr/>
+          <p:nvPr/>
+        </p:nvSpPr>
+        <p:spPr>
+          <a:xfrm>
+            <a:off x="2196541" y="3877056"/>
+            <a:ext cx="0" cy="219456"/>
+          </a:xfrm>
+          <a:prstGeom prst="line">
+            <a:avLst/>
+          </a:prstGeom>
+          <a:noFill/>
+          <a:ln w="19050">
+            <a:solidFill>
+              <a:srgbClr val="CBD5E1"/>
+            </a:solidFill>
+            <a:prstDash val="solid"/>
+            <a:headEnd type="none"/>
+            <a:tailEnd type="triangle"/>
+          </a:ln>
+        </p:spPr>
+      </p:sp>
+      <p:sp>
+        <p:nvSpPr>
+          <p:cNvPr id="21" name="Shape 19"/>
+          <p:cNvSpPr/>
+          <p:nvPr/>
+        </p:nvSpPr>
+        <p:spPr>
+          <a:xfrm>
+            <a:off x="2196541" y="4663440"/>
+            <a:ext cx="0" cy="219456"/>
+          </a:xfrm>
+          <a:prstGeom prst="line">
+            <a:avLst/>
+          </a:prstGeom>
+          <a:noFill/>
+          <a:ln w="19050">
+            <a:solidFill>
+              <a:srgbClr val="CBD5E1"/>
+            </a:solidFill>
+            <a:prstDash val="solid"/>
+            <a:headEnd type="none"/>
+            <a:tailEnd type="triangle"/>
+          </a:ln>
+        </p:spPr>
       </p:sp>
       <p:sp>
         <p:nvSpPr>
@@ -3032,7 +2990,7 @@
         </p:nvSpPr>
         <p:spPr>
           <a:xfrm>
-            <a:off x="4466234" y="2606040"/>
+            <a:off x="4466234" y="2523744"/>
             <a:ext cx="3259226" cy="566928"/>
           </a:xfrm>
           <a:prstGeom prst="roundRect">
@@ -3059,8 +3017,8 @@
         </p:nvSpPr>
         <p:spPr>
           <a:xfrm>
-            <a:off x="4557674" y="2660904"/>
-            <a:ext cx="3076346" cy="457200"/>
+            <a:off x="4539386" y="2578608"/>
+            <a:ext cx="3112922" cy="457200"/>
           </a:xfrm>
           <a:prstGeom prst="rect">
             <a:avLst/>
@@ -3079,7 +3037,7 @@
               <a:buNone/>
             </a:pPr>
             <a:r>
-              <a:rPr lang="en-US" sz="1150" b="1" dirty="0">
+              <a:rPr lang="en-US" sz="1100" b="1" dirty="0">
                 <a:solidFill>
                   <a:srgbClr val="92400E"/>
                 </a:solidFill>
@@ -3089,7 +3047,7 @@
               </a:rPr>
               <a:t>증거 레이어</a:t>
             </a:r>
-            <a:endParaRPr lang="en-US" sz="1150" dirty="0"/>
+            <a:endParaRPr lang="en-US" sz="1100" dirty="0"/>
           </a:p>
           <a:p>
             <a:pPr algn="ctr" indent="0" marL="0">
@@ -3099,7 +3057,7 @@
               <a:buNone/>
             </a:pPr>
             <a:r>
-              <a:rPr lang="en-US" sz="880" dirty="0">
+              <a:rPr lang="en-US" sz="860" dirty="0">
                 <a:solidFill>
                   <a:srgbClr val="64748B"/>
                 </a:solidFill>
@@ -3109,58 +3067,19 @@
               </a:rPr>
               <a:t>메타데이터 · ROI · 모션 단서</a:t>
             </a:r>
-            <a:endParaRPr lang="en-US" sz="1150" dirty="0"/>
-          </a:p>
-        </p:txBody>
-      </p:sp>
-      <p:sp>
-        <p:nvSpPr>
-          <p:cNvPr id="24" name="Text 22"/>
-          <p:cNvSpPr/>
-          <p:nvPr/>
-        </p:nvSpPr>
-        <p:spPr>
-          <a:xfrm>
-            <a:off x="5912968" y="3154680"/>
-            <a:ext cx="365760" cy="274320"/>
-          </a:xfrm>
-          <a:prstGeom prst="rect">
-            <a:avLst/>
-          </a:prstGeom>
-          <a:noFill/>
-          <a:ln/>
-        </p:spPr>
-        <p:txBody>
-          <a:bodyPr wrap="square" lIns="0" tIns="0" rIns="0" bIns="0" rtlCol="0" anchor="ctr"/>
-          <a:lstStyle/>
-          <a:p>
-            <a:pPr algn="ctr" indent="0" marL="0">
-              <a:buNone/>
-            </a:pPr>
-            <a:r>
-              <a:rPr lang="en-US" sz="1400" b="1" dirty="0">
-                <a:solidFill>
-                  <a:srgbClr val="CBD5E1"/>
-                </a:solidFill>
-                <a:latin typeface="Apple SD Gothic Neo" pitchFamily="34" charset="0"/>
-                <a:ea typeface="Apple SD Gothic Neo" pitchFamily="34" charset="-122"/>
-                <a:cs typeface="Apple SD Gothic Neo" pitchFamily="34" charset="-120"/>
-              </a:rPr>
-              <a:t>↓</a:t>
-            </a:r>
-            <a:endParaRPr lang="en-US" sz="1400" dirty="0"/>
-          </a:p>
-        </p:txBody>
-      </p:sp>
-      <p:sp>
-        <p:nvSpPr>
-          <p:cNvPr id="25" name="Shape 23"/>
-          <p:cNvSpPr/>
-          <p:nvPr/>
-        </p:nvSpPr>
-        <p:spPr>
-          <a:xfrm>
-            <a:off x="4466234" y="3410712"/>
+            <a:endParaRPr lang="en-US" sz="1100" dirty="0"/>
+          </a:p>
+        </p:txBody>
+      </p:sp>
+      <p:sp>
+        <p:nvSpPr>
+          <p:cNvPr id="24" name="Shape 22"/>
+          <p:cNvSpPr/>
+          <p:nvPr/>
+        </p:nvSpPr>
+        <p:spPr>
+          <a:xfrm>
+            <a:off x="4466234" y="3310128"/>
             <a:ext cx="3259226" cy="566928"/>
           </a:xfrm>
           <a:prstGeom prst="roundRect">
@@ -3181,14 +3100,14 @@
       </p:sp>
       <p:sp>
         <p:nvSpPr>
-          <p:cNvPr id="26" name="Text 24"/>
-          <p:cNvSpPr/>
-          <p:nvPr/>
-        </p:nvSpPr>
-        <p:spPr>
-          <a:xfrm>
-            <a:off x="4557674" y="3465576"/>
-            <a:ext cx="3076346" cy="457200"/>
+          <p:cNvPr id="25" name="Text 23"/>
+          <p:cNvSpPr/>
+          <p:nvPr/>
+        </p:nvSpPr>
+        <p:spPr>
+          <a:xfrm>
+            <a:off x="4539386" y="3364992"/>
+            <a:ext cx="3112922" cy="457200"/>
           </a:xfrm>
           <a:prstGeom prst="rect">
             <a:avLst/>
@@ -3207,7 +3126,7 @@
               <a:buNone/>
             </a:pPr>
             <a:r>
-              <a:rPr lang="en-US" sz="1150" b="1" dirty="0">
+              <a:rPr lang="en-US" sz="1100" b="1" dirty="0">
                 <a:solidFill>
                   <a:srgbClr val="92400E"/>
                 </a:solidFill>
@@ -3217,7 +3136,7 @@
               </a:rPr>
               <a:t>Track A · Zero-shot VLM</a:t>
             </a:r>
-            <a:endParaRPr lang="en-US" sz="1150" dirty="0"/>
+            <a:endParaRPr lang="en-US" sz="1100" dirty="0"/>
           </a:p>
           <a:p>
             <a:pPr algn="ctr" indent="0" marL="0">
@@ -3227,7 +3146,7 @@
               <a:buNone/>
             </a:pPr>
             <a:r>
-              <a:rPr lang="en-US" sz="880" dirty="0">
+              <a:rPr lang="en-US" sz="860" dirty="0">
                 <a:solidFill>
                   <a:srgbClr val="64748B"/>
                 </a:solidFill>
@@ -3237,48 +3156,59 @@
               </a:rPr>
               <a:t>top-1 행동 라벨 + confidence</a:t>
             </a:r>
-            <a:endParaRPr lang="en-US" sz="1150" dirty="0"/>
-          </a:p>
-        </p:txBody>
-      </p:sp>
-      <p:sp>
-        <p:nvSpPr>
-          <p:cNvPr id="27" name="Text 25"/>
-          <p:cNvSpPr/>
-          <p:nvPr/>
-        </p:nvSpPr>
-        <p:spPr>
-          <a:xfrm>
-            <a:off x="5912968" y="3959352"/>
-            <a:ext cx="365760" cy="274320"/>
-          </a:xfrm>
-          <a:prstGeom prst="rect">
-            <a:avLst/>
-          </a:prstGeom>
-          <a:noFill/>
-          <a:ln/>
-        </p:spPr>
-        <p:txBody>
-          <a:bodyPr wrap="square" lIns="0" tIns="0" rIns="0" bIns="0" rtlCol="0" anchor="ctr"/>
-          <a:lstStyle/>
-          <a:p>
-            <a:pPr algn="ctr" indent="0" marL="0">
-              <a:buNone/>
-            </a:pPr>
-            <a:r>
-              <a:rPr lang="en-US" sz="1400" b="1" dirty="0">
-                <a:solidFill>
-                  <a:srgbClr val="CBD5E1"/>
-                </a:solidFill>
-                <a:latin typeface="Apple SD Gothic Neo" pitchFamily="34" charset="0"/>
-                <a:ea typeface="Apple SD Gothic Neo" pitchFamily="34" charset="-122"/>
-                <a:cs typeface="Apple SD Gothic Neo" pitchFamily="34" charset="-120"/>
-              </a:rPr>
-              <a:t>↓</a:t>
-            </a:r>
-            <a:endParaRPr lang="en-US" sz="1400" dirty="0"/>
-          </a:p>
-        </p:txBody>
+            <a:endParaRPr lang="en-US" sz="1100" dirty="0"/>
+          </a:p>
+        </p:txBody>
+      </p:sp>
+      <p:sp>
+        <p:nvSpPr>
+          <p:cNvPr id="26" name="Shape 24"/>
+          <p:cNvSpPr/>
+          <p:nvPr/>
+        </p:nvSpPr>
+        <p:spPr>
+          <a:xfrm>
+            <a:off x="6095848" y="3090672"/>
+            <a:ext cx="0" cy="219456"/>
+          </a:xfrm>
+          <a:prstGeom prst="line">
+            <a:avLst/>
+          </a:prstGeom>
+          <a:noFill/>
+          <a:ln w="19050">
+            <a:solidFill>
+              <a:srgbClr val="CBD5E1"/>
+            </a:solidFill>
+            <a:prstDash val="solid"/>
+            <a:headEnd type="none"/>
+            <a:tailEnd type="triangle"/>
+          </a:ln>
+        </p:spPr>
+      </p:sp>
+      <p:sp>
+        <p:nvSpPr>
+          <p:cNvPr id="27" name="Shape 25"/>
+          <p:cNvSpPr/>
+          <p:nvPr/>
+        </p:nvSpPr>
+        <p:spPr>
+          <a:xfrm>
+            <a:off x="6095848" y="3877056"/>
+            <a:ext cx="0" cy="219456"/>
+          </a:xfrm>
+          <a:prstGeom prst="line">
+            <a:avLst/>
+          </a:prstGeom>
+          <a:noFill/>
+          <a:ln w="19050">
+            <a:solidFill>
+              <a:srgbClr val="CBD5E1"/>
+            </a:solidFill>
+            <a:prstDash val="solid"/>
+            <a:headEnd type="none"/>
+            <a:tailEnd type="triangle"/>
+          </a:ln>
+        </p:spPr>
       </p:sp>
       <p:sp>
         <p:nvSpPr>
@@ -3288,8 +3218,8 @@
         </p:nvSpPr>
         <p:spPr>
           <a:xfrm>
-            <a:off x="5090008" y="4215384"/>
-            <a:ext cx="2011680" cy="566928"/>
+            <a:off x="4952848" y="4096512"/>
+            <a:ext cx="2286000" cy="566928"/>
           </a:xfrm>
           <a:prstGeom prst="roundRect">
             <a:avLst>
@@ -3299,9 +3229,9 @@
           <a:solidFill>
             <a:srgbClr val="FFFFFF"/>
           </a:solidFill>
-          <a:ln w="12700">
+          <a:ln w="15875">
             <a:solidFill>
-              <a:srgbClr val="94A3B8"/>
+              <a:srgbClr val="92400E"/>
             </a:solidFill>
             <a:prstDash val="solid"/>
           </a:ln>
@@ -3315,8 +3245,8 @@
         </p:nvSpPr>
         <p:spPr>
           <a:xfrm>
-            <a:off x="5090008" y="4215384"/>
-            <a:ext cx="2011680" cy="566928"/>
+            <a:off x="4952848" y="4096512"/>
+            <a:ext cx="2286000" cy="566928"/>
           </a:xfrm>
           <a:prstGeom prst="rect">
             <a:avLst/>
@@ -3332,7 +3262,7 @@
               <a:buNone/>
             </a:pPr>
             <a:r>
-              <a:rPr lang="en-US" sz="1100" b="1" dirty="0">
+              <a:rPr lang="en-US" sz="1050" b="1" dirty="0">
                 <a:solidFill>
                   <a:srgbClr val="1E293B"/>
                 </a:solidFill>
@@ -3340,99 +3270,21 @@
                 <a:ea typeface="Apple SD Gothic Neo" pitchFamily="34" charset="-122"/>
                 <a:cs typeface="Apple SD Gothic Neo" pitchFamily="34" charset="-120"/>
               </a:rPr>
-              <a:t>정밀 분석 필요?</a:t>
-            </a:r>
-            <a:endParaRPr lang="en-US" sz="1100" dirty="0"/>
-          </a:p>
-        </p:txBody>
-      </p:sp>
-      <p:sp>
-        <p:nvSpPr>
-          <p:cNvPr id="30" name="Text 28"/>
-          <p:cNvSpPr/>
-          <p:nvPr/>
-        </p:nvSpPr>
-        <p:spPr>
-          <a:xfrm>
-            <a:off x="7679741" y="4306824"/>
-            <a:ext cx="731520" cy="365760"/>
-          </a:xfrm>
-          <a:prstGeom prst="rect">
-            <a:avLst/>
-          </a:prstGeom>
-          <a:noFill/>
-          <a:ln/>
-        </p:spPr>
-        <p:txBody>
-          <a:bodyPr wrap="square" lIns="0" tIns="0" rIns="0" bIns="0" rtlCol="0" anchor="ctr"/>
-          <a:lstStyle/>
-          <a:p>
-            <a:pPr algn="l" indent="0" marL="0">
-              <a:buNone/>
-            </a:pPr>
-            <a:r>
-              <a:rPr lang="en-US" sz="1100" b="1" dirty="0">
-                <a:solidFill>
-                  <a:srgbClr val="7C3AED"/>
-                </a:solidFill>
-                <a:latin typeface="Apple SD Gothic Neo" pitchFamily="34" charset="0"/>
-                <a:ea typeface="Apple SD Gothic Neo" pitchFamily="34" charset="-122"/>
-                <a:cs typeface="Apple SD Gothic Neo" pitchFamily="34" charset="-120"/>
-              </a:rPr>
-              <a:t>예 →</a:t>
-            </a:r>
-            <a:endParaRPr lang="en-US" sz="1100" dirty="0"/>
-          </a:p>
-        </p:txBody>
-      </p:sp>
-      <p:sp>
-        <p:nvSpPr>
-          <p:cNvPr id="31" name="Text 29"/>
-          <p:cNvSpPr/>
-          <p:nvPr/>
-        </p:nvSpPr>
-        <p:spPr>
-          <a:xfrm>
-            <a:off x="5912968" y="4782312"/>
-            <a:ext cx="1280160" cy="274320"/>
-          </a:xfrm>
-          <a:prstGeom prst="rect">
-            <a:avLst/>
-          </a:prstGeom>
-          <a:noFill/>
-          <a:ln/>
-        </p:spPr>
-        <p:txBody>
-          <a:bodyPr wrap="square" lIns="0" tIns="0" rIns="0" bIns="0" rtlCol="0" anchor="ctr"/>
-          <a:lstStyle/>
-          <a:p>
-            <a:pPr algn="ctr" indent="0" marL="0">
-              <a:buNone/>
-            </a:pPr>
-            <a:r>
-              <a:rPr lang="en-US" sz="1000" dirty="0">
-                <a:solidFill>
-                  <a:srgbClr val="64748B"/>
-                </a:solidFill>
-                <a:latin typeface="Apple SD Gothic Neo" pitchFamily="34" charset="0"/>
-                <a:ea typeface="Apple SD Gothic Neo" pitchFamily="34" charset="-122"/>
-                <a:cs typeface="Apple SD Gothic Neo" pitchFamily="34" charset="-120"/>
-              </a:rPr>
-              <a:t>↓ 아니오</a:t>
-            </a:r>
-            <a:endParaRPr lang="en-US" sz="1000" dirty="0"/>
-          </a:p>
-        </p:txBody>
-      </p:sp>
-      <p:sp>
-        <p:nvSpPr>
-          <p:cNvPr id="32" name="Shape 30"/>
-          <p:cNvSpPr/>
-          <p:nvPr/>
-        </p:nvSpPr>
-        <p:spPr>
-          <a:xfrm>
-            <a:off x="8365541" y="2606040"/>
+              <a:t>정밀 분석이 필요한가?</a:t>
+            </a:r>
+            <a:endParaRPr lang="en-US" sz="1050" dirty="0"/>
+          </a:p>
+        </p:txBody>
+      </p:sp>
+      <p:sp>
+        <p:nvSpPr>
+          <p:cNvPr id="30" name="Shape 28"/>
+          <p:cNvSpPr/>
+          <p:nvPr/>
+        </p:nvSpPr>
+        <p:spPr>
+          <a:xfrm>
+            <a:off x="8365541" y="2523744"/>
             <a:ext cx="3259226" cy="566928"/>
           </a:xfrm>
           <a:prstGeom prst="roundRect">
@@ -3453,14 +3305,14 @@
       </p:sp>
       <p:sp>
         <p:nvSpPr>
-          <p:cNvPr id="33" name="Text 31"/>
-          <p:cNvSpPr/>
-          <p:nvPr/>
-        </p:nvSpPr>
-        <p:spPr>
-          <a:xfrm>
-            <a:off x="8456981" y="2660904"/>
-            <a:ext cx="3076346" cy="457200"/>
+          <p:cNvPr id="31" name="Text 29"/>
+          <p:cNvSpPr/>
+          <p:nvPr/>
+        </p:nvSpPr>
+        <p:spPr>
+          <a:xfrm>
+            <a:off x="8438693" y="2578608"/>
+            <a:ext cx="3112922" cy="457200"/>
           </a:xfrm>
           <a:prstGeom prst="rect">
             <a:avLst/>
@@ -3479,7 +3331,7 @@
               <a:buNone/>
             </a:pPr>
             <a:r>
-              <a:rPr lang="en-US" sz="1150" b="1" dirty="0">
+              <a:rPr lang="en-US" sz="1100" b="1" dirty="0">
                 <a:solidFill>
                   <a:srgbClr val="7C3AED"/>
                 </a:solidFill>
@@ -3489,7 +3341,7 @@
               </a:rPr>
               <a:t>Track B · SegmentVLM</a:t>
             </a:r>
-            <a:endParaRPr lang="en-US" sz="1150" dirty="0"/>
+            <a:endParaRPr lang="en-US" sz="1100" dirty="0"/>
           </a:p>
           <a:p>
             <a:pPr algn="ctr" indent="0" marL="0">
@@ -3499,7 +3351,7 @@
               <a:buNone/>
             </a:pPr>
             <a:r>
-              <a:rPr lang="en-US" sz="880" dirty="0">
+              <a:rPr lang="en-US" sz="860" dirty="0">
                 <a:solidFill>
                   <a:srgbClr val="64748B"/>
                 </a:solidFill>
@@ -3509,58 +3361,19 @@
               </a:rPr>
               <a:t>정밀 분석 진입</a:t>
             </a:r>
-            <a:endParaRPr lang="en-US" sz="1150" dirty="0"/>
-          </a:p>
-        </p:txBody>
-      </p:sp>
-      <p:sp>
-        <p:nvSpPr>
-          <p:cNvPr id="34" name="Text 32"/>
-          <p:cNvSpPr/>
-          <p:nvPr/>
-        </p:nvSpPr>
-        <p:spPr>
-          <a:xfrm>
-            <a:off x="9812274" y="3154680"/>
-            <a:ext cx="365760" cy="274320"/>
-          </a:xfrm>
-          <a:prstGeom prst="rect">
-            <a:avLst/>
-          </a:prstGeom>
-          <a:noFill/>
-          <a:ln/>
-        </p:spPr>
-        <p:txBody>
-          <a:bodyPr wrap="square" lIns="0" tIns="0" rIns="0" bIns="0" rtlCol="0" anchor="ctr"/>
-          <a:lstStyle/>
-          <a:p>
-            <a:pPr algn="ctr" indent="0" marL="0">
-              <a:buNone/>
-            </a:pPr>
-            <a:r>
-              <a:rPr lang="en-US" sz="1400" b="1" dirty="0">
-                <a:solidFill>
-                  <a:srgbClr val="CBD5E1"/>
-                </a:solidFill>
-                <a:latin typeface="Apple SD Gothic Neo" pitchFamily="34" charset="0"/>
-                <a:ea typeface="Apple SD Gothic Neo" pitchFamily="34" charset="-122"/>
-                <a:cs typeface="Apple SD Gothic Neo" pitchFamily="34" charset="-120"/>
-              </a:rPr>
-              <a:t>↓</a:t>
-            </a:r>
-            <a:endParaRPr lang="en-US" sz="1400" dirty="0"/>
-          </a:p>
-        </p:txBody>
-      </p:sp>
-      <p:sp>
-        <p:nvSpPr>
-          <p:cNvPr id="35" name="Shape 33"/>
-          <p:cNvSpPr/>
-          <p:nvPr/>
-        </p:nvSpPr>
-        <p:spPr>
-          <a:xfrm>
-            <a:off x="8365541" y="3410712"/>
+            <a:endParaRPr lang="en-US" sz="1100" dirty="0"/>
+          </a:p>
+        </p:txBody>
+      </p:sp>
+      <p:sp>
+        <p:nvSpPr>
+          <p:cNvPr id="32" name="Shape 30"/>
+          <p:cNvSpPr/>
+          <p:nvPr/>
+        </p:nvSpPr>
+        <p:spPr>
+          <a:xfrm>
+            <a:off x="8365541" y="3310128"/>
             <a:ext cx="3259226" cy="566928"/>
           </a:xfrm>
           <a:prstGeom prst="roundRect">
@@ -3581,14 +3394,14 @@
       </p:sp>
       <p:sp>
         <p:nvSpPr>
-          <p:cNvPr id="36" name="Text 34"/>
-          <p:cNvSpPr/>
-          <p:nvPr/>
-        </p:nvSpPr>
-        <p:spPr>
-          <a:xfrm>
-            <a:off x="8456981" y="3465576"/>
-            <a:ext cx="3076346" cy="457200"/>
+          <p:cNvPr id="33" name="Text 31"/>
+          <p:cNvSpPr/>
+          <p:nvPr/>
+        </p:nvSpPr>
+        <p:spPr>
+          <a:xfrm>
+            <a:off x="8438693" y="3364992"/>
+            <a:ext cx="3112922" cy="457200"/>
           </a:xfrm>
           <a:prstGeom prst="rect">
             <a:avLst/>
@@ -3607,7 +3420,7 @@
               <a:buNone/>
             </a:pPr>
             <a:r>
-              <a:rPr lang="en-US" sz="1150" b="1" dirty="0">
+              <a:rPr lang="en-US" sz="1100" b="1" dirty="0">
                 <a:solidFill>
                   <a:srgbClr val="7C3AED"/>
                 </a:solidFill>
@@ -3617,7 +3430,7 @@
               </a:rPr>
               <a:t>event segment 분해</a:t>
             </a:r>
-            <a:endParaRPr lang="en-US" sz="1150" dirty="0"/>
+            <a:endParaRPr lang="en-US" sz="1100" dirty="0"/>
           </a:p>
           <a:p>
             <a:pPr algn="ctr" indent="0" marL="0">
@@ -3627,7 +3440,7 @@
               <a:buNone/>
             </a:pPr>
             <a:r>
-              <a:rPr lang="en-US" sz="880" dirty="0">
+              <a:rPr lang="en-US" sz="860" dirty="0">
                 <a:solidFill>
                   <a:srgbClr val="64748B"/>
                 </a:solidFill>
@@ -3637,58 +3450,19 @@
               </a:rPr>
               <a:t>5~15초 단위</a:t>
             </a:r>
-            <a:endParaRPr lang="en-US" sz="1150" dirty="0"/>
-          </a:p>
-        </p:txBody>
-      </p:sp>
-      <p:sp>
-        <p:nvSpPr>
-          <p:cNvPr id="37" name="Text 35"/>
-          <p:cNvSpPr/>
-          <p:nvPr/>
-        </p:nvSpPr>
-        <p:spPr>
-          <a:xfrm>
-            <a:off x="9812274" y="3959352"/>
-            <a:ext cx="365760" cy="274320"/>
-          </a:xfrm>
-          <a:prstGeom prst="rect">
-            <a:avLst/>
-          </a:prstGeom>
-          <a:noFill/>
-          <a:ln/>
-        </p:spPr>
-        <p:txBody>
-          <a:bodyPr wrap="square" lIns="0" tIns="0" rIns="0" bIns="0" rtlCol="0" anchor="ctr"/>
-          <a:lstStyle/>
-          <a:p>
-            <a:pPr algn="ctr" indent="0" marL="0">
-              <a:buNone/>
-            </a:pPr>
-            <a:r>
-              <a:rPr lang="en-US" sz="1400" b="1" dirty="0">
-                <a:solidFill>
-                  <a:srgbClr val="CBD5E1"/>
-                </a:solidFill>
-                <a:latin typeface="Apple SD Gothic Neo" pitchFamily="34" charset="0"/>
-                <a:ea typeface="Apple SD Gothic Neo" pitchFamily="34" charset="-122"/>
-                <a:cs typeface="Apple SD Gothic Neo" pitchFamily="34" charset="-120"/>
-              </a:rPr>
-              <a:t>↓</a:t>
-            </a:r>
-            <a:endParaRPr lang="en-US" sz="1400" dirty="0"/>
-          </a:p>
-        </p:txBody>
-      </p:sp>
-      <p:sp>
-        <p:nvSpPr>
-          <p:cNvPr id="38" name="Shape 36"/>
-          <p:cNvSpPr/>
-          <p:nvPr/>
-        </p:nvSpPr>
-        <p:spPr>
-          <a:xfrm>
-            <a:off x="8365541" y="4215384"/>
+            <a:endParaRPr lang="en-US" sz="1100" dirty="0"/>
+          </a:p>
+        </p:txBody>
+      </p:sp>
+      <p:sp>
+        <p:nvSpPr>
+          <p:cNvPr id="34" name="Shape 32"/>
+          <p:cNvSpPr/>
+          <p:nvPr/>
+        </p:nvSpPr>
+        <p:spPr>
+          <a:xfrm>
+            <a:off x="8365541" y="4096512"/>
             <a:ext cx="3259226" cy="566928"/>
           </a:xfrm>
           <a:prstGeom prst="roundRect">
@@ -3709,14 +3483,14 @@
       </p:sp>
       <p:sp>
         <p:nvSpPr>
-          <p:cNvPr id="39" name="Text 37"/>
-          <p:cNvSpPr/>
-          <p:nvPr/>
-        </p:nvSpPr>
-        <p:spPr>
-          <a:xfrm>
-            <a:off x="8456981" y="4270248"/>
-            <a:ext cx="3076346" cy="457200"/>
+          <p:cNvPr id="35" name="Text 33"/>
+          <p:cNvSpPr/>
+          <p:nvPr/>
+        </p:nvSpPr>
+        <p:spPr>
+          <a:xfrm>
+            <a:off x="8438693" y="4151376"/>
+            <a:ext cx="3112922" cy="457200"/>
           </a:xfrm>
           <a:prstGeom prst="rect">
             <a:avLst/>
@@ -3735,7 +3509,7 @@
               <a:buNone/>
             </a:pPr>
             <a:r>
-              <a:rPr lang="en-US" sz="1150" b="1" dirty="0">
+              <a:rPr lang="en-US" sz="1100" b="1" dirty="0">
                 <a:solidFill>
                   <a:srgbClr val="7C3AED"/>
                 </a:solidFill>
@@ -3743,9 +3517,9 @@
                 <a:ea typeface="Apple SD Gothic Neo" pitchFamily="34" charset="-122"/>
                 <a:cs typeface="Apple SD Gothic Neo" pitchFamily="34" charset="-120"/>
               </a:rPr>
-              <a:t>ROI / motion metadata</a:t>
-            </a:r>
-            <a:endParaRPr lang="en-US" sz="1150" dirty="0"/>
+              <a:t>ROI · motion metadata</a:t>
+            </a:r>
+            <a:endParaRPr lang="en-US" sz="1100" dirty="0"/>
           </a:p>
           <a:p>
             <a:pPr algn="ctr" indent="0" marL="0">
@@ -3755,7 +3529,7 @@
               <a:buNone/>
             </a:pPr>
             <a:r>
-              <a:rPr lang="en-US" sz="880" dirty="0">
+              <a:rPr lang="en-US" sz="860" dirty="0">
                 <a:solidFill>
                   <a:srgbClr val="64748B"/>
                 </a:solidFill>
@@ -3765,58 +3539,19 @@
               </a:rPr>
               <a:t>먹이그릇 · 물그릇 · 은신처</a:t>
             </a:r>
-            <a:endParaRPr lang="en-US" sz="1150" dirty="0"/>
-          </a:p>
-        </p:txBody>
-      </p:sp>
-      <p:sp>
-        <p:nvSpPr>
-          <p:cNvPr id="40" name="Text 38"/>
-          <p:cNvSpPr/>
-          <p:nvPr/>
-        </p:nvSpPr>
-        <p:spPr>
-          <a:xfrm>
-            <a:off x="9812274" y="4764024"/>
-            <a:ext cx="365760" cy="274320"/>
-          </a:xfrm>
-          <a:prstGeom prst="rect">
-            <a:avLst/>
-          </a:prstGeom>
-          <a:noFill/>
-          <a:ln/>
-        </p:spPr>
-        <p:txBody>
-          <a:bodyPr wrap="square" lIns="0" tIns="0" rIns="0" bIns="0" rtlCol="0" anchor="ctr"/>
-          <a:lstStyle/>
-          <a:p>
-            <a:pPr algn="ctr" indent="0" marL="0">
-              <a:buNone/>
-            </a:pPr>
-            <a:r>
-              <a:rPr lang="en-US" sz="1400" b="1" dirty="0">
-                <a:solidFill>
-                  <a:srgbClr val="CBD5E1"/>
-                </a:solidFill>
-                <a:latin typeface="Apple SD Gothic Neo" pitchFamily="34" charset="0"/>
-                <a:ea typeface="Apple SD Gothic Neo" pitchFamily="34" charset="-122"/>
-                <a:cs typeface="Apple SD Gothic Neo" pitchFamily="34" charset="-120"/>
-              </a:rPr>
-              <a:t>↓</a:t>
-            </a:r>
-            <a:endParaRPr lang="en-US" sz="1400" dirty="0"/>
-          </a:p>
-        </p:txBody>
-      </p:sp>
-      <p:sp>
-        <p:nvSpPr>
-          <p:cNvPr id="41" name="Shape 39"/>
-          <p:cNvSpPr/>
-          <p:nvPr/>
-        </p:nvSpPr>
-        <p:spPr>
-          <a:xfrm>
-            <a:off x="8365541" y="5020056"/>
+            <a:endParaRPr lang="en-US" sz="1100" dirty="0"/>
+          </a:p>
+        </p:txBody>
+      </p:sp>
+      <p:sp>
+        <p:nvSpPr>
+          <p:cNvPr id="36" name="Shape 34"/>
+          <p:cNvSpPr/>
+          <p:nvPr/>
+        </p:nvSpPr>
+        <p:spPr>
+          <a:xfrm>
+            <a:off x="8365541" y="4882896"/>
             <a:ext cx="3259226" cy="566928"/>
           </a:xfrm>
           <a:prstGeom prst="roundRect">
@@ -3837,14 +3572,14 @@
       </p:sp>
       <p:sp>
         <p:nvSpPr>
-          <p:cNvPr id="42" name="Text 40"/>
-          <p:cNvSpPr/>
-          <p:nvPr/>
-        </p:nvSpPr>
-        <p:spPr>
-          <a:xfrm>
-            <a:off x="8456981" y="5074920"/>
-            <a:ext cx="3076346" cy="457200"/>
+          <p:cNvPr id="37" name="Text 35"/>
+          <p:cNvSpPr/>
+          <p:nvPr/>
+        </p:nvSpPr>
+        <p:spPr>
+          <a:xfrm>
+            <a:off x="8438693" y="4937760"/>
+            <a:ext cx="3112922" cy="457200"/>
           </a:xfrm>
           <a:prstGeom prst="rect">
             <a:avLst/>
@@ -3863,7 +3598,7 @@
               <a:buNone/>
             </a:pPr>
             <a:r>
-              <a:rPr lang="en-US" sz="1150" b="1" dirty="0">
+              <a:rPr lang="en-US" sz="1100" b="1" dirty="0">
                 <a:solidFill>
                   <a:srgbClr val="2563EB"/>
                 </a:solidFill>
@@ -3871,9 +3606,9 @@
                 <a:ea typeface="Apple SD Gothic Neo" pitchFamily="34" charset="-122"/>
                 <a:cs typeface="Apple SD Gothic Neo" pitchFamily="34" charset="-120"/>
               </a:rPr>
-              <a:t>event별 AI 분석 → timeline 병합</a:t>
-            </a:r>
-            <a:endParaRPr lang="en-US" sz="1150" dirty="0"/>
+              <a:t>event별 분석 → timeline 병합</a:t>
+            </a:r>
+            <a:endParaRPr lang="en-US" sz="1100" dirty="0"/>
           </a:p>
           <a:p>
             <a:pPr algn="ctr" indent="0" marL="0">
@@ -3883,7 +3618,7 @@
               <a:buNone/>
             </a:pPr>
             <a:r>
-              <a:rPr lang="en-US" sz="880" dirty="0">
+              <a:rPr lang="en-US" sz="860" dirty="0">
                 <a:solidFill>
                   <a:srgbClr val="64748B"/>
                 </a:solidFill>
@@ -3893,9 +3628,134 @@
               </a:rPr>
               <a:t>행동 후보 + 시간대 + 검수</a:t>
             </a:r>
-            <a:endParaRPr lang="en-US" sz="1150" dirty="0"/>
-          </a:p>
-        </p:txBody>
+            <a:endParaRPr lang="en-US" sz="1100" dirty="0"/>
+          </a:p>
+        </p:txBody>
+      </p:sp>
+      <p:sp>
+        <p:nvSpPr>
+          <p:cNvPr id="38" name="Shape 36"/>
+          <p:cNvSpPr/>
+          <p:nvPr/>
+        </p:nvSpPr>
+        <p:spPr>
+          <a:xfrm>
+            <a:off x="9995154" y="3090672"/>
+            <a:ext cx="0" cy="219456"/>
+          </a:xfrm>
+          <a:prstGeom prst="line">
+            <a:avLst/>
+          </a:prstGeom>
+          <a:noFill/>
+          <a:ln w="19050">
+            <a:solidFill>
+              <a:srgbClr val="CBD5E1"/>
+            </a:solidFill>
+            <a:prstDash val="solid"/>
+            <a:headEnd type="none"/>
+            <a:tailEnd type="triangle"/>
+          </a:ln>
+        </p:spPr>
+      </p:sp>
+      <p:sp>
+        <p:nvSpPr>
+          <p:cNvPr id="39" name="Shape 37"/>
+          <p:cNvSpPr/>
+          <p:nvPr/>
+        </p:nvSpPr>
+        <p:spPr>
+          <a:xfrm>
+            <a:off x="9995154" y="3877056"/>
+            <a:ext cx="0" cy="219456"/>
+          </a:xfrm>
+          <a:prstGeom prst="line">
+            <a:avLst/>
+          </a:prstGeom>
+          <a:noFill/>
+          <a:ln w="19050">
+            <a:solidFill>
+              <a:srgbClr val="CBD5E1"/>
+            </a:solidFill>
+            <a:prstDash val="solid"/>
+            <a:headEnd type="none"/>
+            <a:tailEnd type="triangle"/>
+          </a:ln>
+        </p:spPr>
+      </p:sp>
+      <p:sp>
+        <p:nvSpPr>
+          <p:cNvPr id="40" name="Shape 38"/>
+          <p:cNvSpPr/>
+          <p:nvPr/>
+        </p:nvSpPr>
+        <p:spPr>
+          <a:xfrm>
+            <a:off x="9995154" y="4663440"/>
+            <a:ext cx="0" cy="219456"/>
+          </a:xfrm>
+          <a:prstGeom prst="line">
+            <a:avLst/>
+          </a:prstGeom>
+          <a:noFill/>
+          <a:ln w="19050">
+            <a:solidFill>
+              <a:srgbClr val="CBD5E1"/>
+            </a:solidFill>
+            <a:prstDash val="solid"/>
+            <a:headEnd type="none"/>
+            <a:tailEnd type="triangle"/>
+          </a:ln>
+        </p:spPr>
+      </p:sp>
+      <p:sp>
+        <p:nvSpPr>
+          <p:cNvPr id="41" name="Shape 39"/>
+          <p:cNvSpPr/>
+          <p:nvPr/>
+        </p:nvSpPr>
+        <p:spPr>
+          <a:xfrm>
+            <a:off x="3826154" y="5166360"/>
+            <a:ext cx="320040" cy="0"/>
+          </a:xfrm>
+          <a:prstGeom prst="line">
+            <a:avLst/>
+          </a:prstGeom>
+          <a:noFill/>
+          <a:ln w="19050">
+            <a:solidFill>
+              <a:srgbClr val="94A3B8"/>
+            </a:solidFill>
+            <a:prstDash val="solid"/>
+            <a:headEnd type="none"/>
+            <a:tailEnd type="none"/>
+          </a:ln>
+        </p:spPr>
+      </p:sp>
+      <p:sp>
+        <p:nvSpPr>
+          <p:cNvPr id="42" name="Shape 40"/>
+          <p:cNvSpPr/>
+          <p:nvPr/>
+        </p:nvSpPr>
+        <p:spPr>
+          <a:xfrm>
+            <a:off x="4146194" y="2807208"/>
+            <a:ext cx="0" cy="2359152"/>
+          </a:xfrm>
+          <a:prstGeom prst="line">
+            <a:avLst/>
+          </a:prstGeom>
+          <a:noFill/>
+          <a:ln w="19050">
+            <a:solidFill>
+              <a:srgbClr val="94A3B8"/>
+            </a:solidFill>
+            <a:prstDash val="solid"/>
+            <a:headEnd type="none"/>
+            <a:tailEnd type="none"/>
+          </a:ln>
+        </p:spPr>
       </p:sp>
       <p:sp>
         <p:nvSpPr>
@@ -3905,12 +3765,329 @@
         </p:nvSpPr>
         <p:spPr>
           <a:xfrm>
-            <a:off x="566928" y="5971032"/>
-            <a:ext cx="3259226" cy="566928"/>
+            <a:off x="4146194" y="2807208"/>
+            <a:ext cx="320040" cy="0"/>
+          </a:xfrm>
+          <a:prstGeom prst="line">
+            <a:avLst/>
+          </a:prstGeom>
+          <a:noFill/>
+          <a:ln w="19050">
+            <a:solidFill>
+              <a:srgbClr val="94A3B8"/>
+            </a:solidFill>
+            <a:prstDash val="solid"/>
+            <a:headEnd type="none"/>
+            <a:tailEnd type="triangle"/>
+          </a:ln>
+        </p:spPr>
+      </p:sp>
+      <p:sp>
+        <p:nvSpPr>
+          <p:cNvPr id="44" name="Shape 42"/>
+          <p:cNvSpPr/>
+          <p:nvPr/>
+        </p:nvSpPr>
+        <p:spPr>
+          <a:xfrm>
+            <a:off x="7238848" y="4379976"/>
+            <a:ext cx="806653" cy="0"/>
+          </a:xfrm>
+          <a:prstGeom prst="line">
+            <a:avLst/>
+          </a:prstGeom>
+          <a:noFill/>
+          <a:ln w="19050">
+            <a:solidFill>
+              <a:srgbClr val="7C3AED"/>
+            </a:solidFill>
+            <a:prstDash val="solid"/>
+            <a:headEnd type="none"/>
+            <a:tailEnd type="none"/>
+          </a:ln>
+        </p:spPr>
+      </p:sp>
+      <p:sp>
+        <p:nvSpPr>
+          <p:cNvPr id="45" name="Shape 43"/>
+          <p:cNvSpPr/>
+          <p:nvPr/>
+        </p:nvSpPr>
+        <p:spPr>
+          <a:xfrm>
+            <a:off x="8045501" y="2807208"/>
+            <a:ext cx="0" cy="1572768"/>
+          </a:xfrm>
+          <a:prstGeom prst="line">
+            <a:avLst/>
+          </a:prstGeom>
+          <a:noFill/>
+          <a:ln w="19050">
+            <a:solidFill>
+              <a:srgbClr val="7C3AED"/>
+            </a:solidFill>
+            <a:prstDash val="solid"/>
+            <a:headEnd type="none"/>
+            <a:tailEnd type="none"/>
+          </a:ln>
+        </p:spPr>
+      </p:sp>
+      <p:sp>
+        <p:nvSpPr>
+          <p:cNvPr id="46" name="Shape 44"/>
+          <p:cNvSpPr/>
+          <p:nvPr/>
+        </p:nvSpPr>
+        <p:spPr>
+          <a:xfrm>
+            <a:off x="8045501" y="2807208"/>
+            <a:ext cx="320040" cy="0"/>
+          </a:xfrm>
+          <a:prstGeom prst="line">
+            <a:avLst/>
+          </a:prstGeom>
+          <a:noFill/>
+          <a:ln w="19050">
+            <a:solidFill>
+              <a:srgbClr val="7C3AED"/>
+            </a:solidFill>
+            <a:prstDash val="solid"/>
+            <a:headEnd type="none"/>
+            <a:tailEnd type="triangle"/>
+          </a:ln>
+        </p:spPr>
+      </p:sp>
+      <p:sp>
+        <p:nvSpPr>
+          <p:cNvPr id="47" name="Text 45"/>
+          <p:cNvSpPr/>
+          <p:nvPr/>
+        </p:nvSpPr>
+        <p:spPr>
+          <a:xfrm>
+            <a:off x="7284568" y="4096512"/>
+            <a:ext cx="1051560" cy="201168"/>
+          </a:xfrm>
+          <a:prstGeom prst="rect">
+            <a:avLst/>
+          </a:prstGeom>
+          <a:noFill/>
+          <a:ln/>
+        </p:spPr>
+        <p:txBody>
+          <a:bodyPr wrap="square" lIns="0" tIns="0" rIns="0" bIns="0" rtlCol="0" anchor="ctr"/>
+          <a:lstStyle/>
+          <a:p>
+            <a:pPr algn="ctr" indent="0" marL="0">
+              <a:buNone/>
+            </a:pPr>
+            <a:r>
+              <a:rPr lang="en-US" sz="900" b="1" dirty="0">
+                <a:solidFill>
+                  <a:srgbClr val="7C3AED"/>
+                </a:solidFill>
+                <a:latin typeface="Apple SD Gothic Neo" pitchFamily="34" charset="0"/>
+                <a:ea typeface="Apple SD Gothic Neo" pitchFamily="34" charset="-122"/>
+                <a:cs typeface="Apple SD Gothic Neo" pitchFamily="34" charset="-120"/>
+              </a:rPr>
+              <a:t>예 · 정밀 필요</a:t>
+            </a:r>
+            <a:endParaRPr lang="en-US" sz="900" dirty="0"/>
+          </a:p>
+        </p:txBody>
+      </p:sp>
+      <p:sp>
+        <p:nvSpPr>
+          <p:cNvPr id="48" name="Shape 46"/>
+          <p:cNvSpPr/>
+          <p:nvPr/>
+        </p:nvSpPr>
+        <p:spPr>
+          <a:xfrm>
+            <a:off x="4466234" y="5724144"/>
+            <a:ext cx="7158533" cy="548640"/>
           </a:xfrm>
           <a:prstGeom prst="roundRect">
             <a:avLst>
-              <a:gd name="adj" fmla="val 14516"/>
+              <a:gd name="adj" fmla="val 15000"/>
+            </a:avLst>
+          </a:prstGeom>
+          <a:solidFill>
+            <a:srgbClr val="D1FAE5"/>
+          </a:solidFill>
+          <a:ln w="12700">
+            <a:solidFill>
+              <a:srgbClr val="6EE7B7"/>
+            </a:solidFill>
+            <a:prstDash val="solid"/>
+          </a:ln>
+        </p:spPr>
+      </p:sp>
+      <p:sp>
+        <p:nvSpPr>
+          <p:cNvPr id="49" name="Text 47"/>
+          <p:cNvSpPr/>
+          <p:nvPr/>
+        </p:nvSpPr>
+        <p:spPr>
+          <a:xfrm>
+            <a:off x="4466234" y="5724144"/>
+            <a:ext cx="7158533" cy="548640"/>
+          </a:xfrm>
+          <a:prstGeom prst="rect">
+            <a:avLst/>
+          </a:prstGeom>
+          <a:noFill/>
+          <a:ln/>
+        </p:spPr>
+        <p:txBody>
+          <a:bodyPr wrap="square" lIns="0" tIns="0" rIns="0" bIns="0" rtlCol="0" anchor="ctr"/>
+          <a:lstStyle/>
+          <a:p>
+            <a:pPr algn="ctr" indent="0" marL="0">
+              <a:lnSpc>
+                <a:spcPct val="98000"/>
+              </a:lnSpc>
+              <a:buNone/>
+            </a:pPr>
+            <a:r>
+              <a:rPr lang="en-US" sz="1150" b="1" dirty="0">
+                <a:solidFill>
+                  <a:srgbClr val="047857"/>
+                </a:solidFill>
+                <a:latin typeface="Apple SD Gothic Neo" pitchFamily="34" charset="0"/>
+                <a:ea typeface="Apple SD Gothic Neo" pitchFamily="34" charset="-122"/>
+                <a:cs typeface="Apple SD Gothic Neo" pitchFamily="34" charset="-120"/>
+              </a:rPr>
+              <a:t>아침 활동 보고서</a:t>
+            </a:r>
+            <a:endParaRPr lang="en-US" sz="1150" dirty="0"/>
+          </a:p>
+          <a:p>
+            <a:pPr algn="ctr" indent="0" marL="0">
+              <a:lnSpc>
+                <a:spcPct val="98000"/>
+              </a:lnSpc>
+              <a:buNone/>
+            </a:pPr>
+            <a:r>
+              <a:rPr lang="en-US" sz="880" dirty="0">
+                <a:solidFill>
+                  <a:srgbClr val="047857"/>
+                </a:solidFill>
+                <a:latin typeface="Apple SD Gothic Neo" pitchFamily="34" charset="0"/>
+                <a:ea typeface="Apple SD Gothic Neo" pitchFamily="34" charset="-122"/>
+                <a:cs typeface="Apple SD Gothic Neo" pitchFamily="34" charset="-120"/>
+              </a:rPr>
+              <a:t>밤사이 행동을 시간순으로 정리해 앱으로 전달</a:t>
+            </a:r>
+            <a:endParaRPr lang="en-US" sz="1150" dirty="0"/>
+          </a:p>
+        </p:txBody>
+      </p:sp>
+      <p:sp>
+        <p:nvSpPr>
+          <p:cNvPr id="50" name="Shape 48"/>
+          <p:cNvSpPr/>
+          <p:nvPr/>
+        </p:nvSpPr>
+        <p:spPr>
+          <a:xfrm>
+            <a:off x="6095848" y="4663440"/>
+            <a:ext cx="0" cy="1060704"/>
+          </a:xfrm>
+          <a:prstGeom prst="line">
+            <a:avLst/>
+          </a:prstGeom>
+          <a:noFill/>
+          <a:ln w="19050">
+            <a:solidFill>
+              <a:srgbClr val="64748B"/>
+            </a:solidFill>
+            <a:prstDash val="solid"/>
+            <a:headEnd type="none"/>
+            <a:tailEnd type="triangle"/>
+          </a:ln>
+        </p:spPr>
+      </p:sp>
+      <p:sp>
+        <p:nvSpPr>
+          <p:cNvPr id="51" name="Text 49"/>
+          <p:cNvSpPr/>
+          <p:nvPr/>
+        </p:nvSpPr>
+        <p:spPr>
+          <a:xfrm>
+            <a:off x="6205576" y="5074920"/>
+            <a:ext cx="822960" cy="219456"/>
+          </a:xfrm>
+          <a:prstGeom prst="rect">
+            <a:avLst/>
+          </a:prstGeom>
+          <a:noFill/>
+          <a:ln/>
+        </p:spPr>
+        <p:txBody>
+          <a:bodyPr wrap="square" lIns="0" tIns="0" rIns="0" bIns="0" rtlCol="0" anchor="ctr"/>
+          <a:lstStyle/>
+          <a:p>
+            <a:pPr algn="l" indent="0" marL="0">
+              <a:buNone/>
+            </a:pPr>
+            <a:r>
+              <a:rPr lang="en-US" sz="900" dirty="0">
+                <a:solidFill>
+                  <a:srgbClr val="64748B"/>
+                </a:solidFill>
+                <a:latin typeface="Apple SD Gothic Neo" pitchFamily="34" charset="0"/>
+                <a:ea typeface="Apple SD Gothic Neo" pitchFamily="34" charset="-122"/>
+                <a:cs typeface="Apple SD Gothic Neo" pitchFamily="34" charset="-120"/>
+              </a:rPr>
+              <a:t>아니오</a:t>
+            </a:r>
+            <a:endParaRPr lang="en-US" sz="900" dirty="0"/>
+          </a:p>
+        </p:txBody>
+      </p:sp>
+      <p:sp>
+        <p:nvSpPr>
+          <p:cNvPr id="52" name="Shape 50"/>
+          <p:cNvSpPr/>
+          <p:nvPr/>
+        </p:nvSpPr>
+        <p:spPr>
+          <a:xfrm>
+            <a:off x="9995154" y="5449824"/>
+            <a:ext cx="0" cy="274320"/>
+          </a:xfrm>
+          <a:prstGeom prst="line">
+            <a:avLst/>
+          </a:prstGeom>
+          <a:noFill/>
+          <a:ln w="19050">
+            <a:solidFill>
+              <a:srgbClr val="94A3B8"/>
+            </a:solidFill>
+            <a:prstDash val="solid"/>
+            <a:headEnd type="none"/>
+            <a:tailEnd type="triangle"/>
+          </a:ln>
+        </p:spPr>
+      </p:sp>
+      <p:sp>
+        <p:nvSpPr>
+          <p:cNvPr id="53" name="Shape 51"/>
+          <p:cNvSpPr/>
+          <p:nvPr/>
+        </p:nvSpPr>
+        <p:spPr>
+          <a:xfrm>
+            <a:off x="566928" y="5724144"/>
+            <a:ext cx="3259226" cy="548640"/>
+          </a:xfrm>
+          <a:prstGeom prst="roundRect">
+            <a:avLst>
+              <a:gd name="adj" fmla="val 15000"/>
             </a:avLst>
           </a:prstGeom>
           <a:solidFill>
@@ -3926,14 +4103,14 @@
       </p:sp>
       <p:sp>
         <p:nvSpPr>
-          <p:cNvPr id="44" name="Text 42"/>
-          <p:cNvSpPr/>
-          <p:nvPr/>
-        </p:nvSpPr>
-        <p:spPr>
-          <a:xfrm>
-            <a:off x="566928" y="5971032"/>
-            <a:ext cx="3259226" cy="566928"/>
+          <p:cNvPr id="54" name="Text 52"/>
+          <p:cNvSpPr/>
+          <p:nvPr/>
+        </p:nvSpPr>
+        <p:spPr>
+          <a:xfrm>
+            <a:off x="566928" y="5724144"/>
+            <a:ext cx="3259226" cy="548640"/>
           </a:xfrm>
           <a:prstGeom prst="rect">
             <a:avLst/>
@@ -3960,7 +4137,7 @@
                 <a:ea typeface="Apple SD Gothic Neo" pitchFamily="34" charset="-122"/>
                 <a:cs typeface="Apple SD Gothic Neo" pitchFamily="34" charset="-120"/>
               </a:rPr>
-              <a:t>HITL · 사람 검수</a:t>
+              <a:t>HITL · 사람 검수 루프</a:t>
             </a:r>
             <a:endParaRPr lang="en-US" sz="1100" dirty="0"/>
           </a:p>
@@ -3972,15 +4149,15 @@
               <a:buNone/>
             </a:pPr>
             <a:r>
-              <a:rPr lang="en-US" sz="880" dirty="0">
-                <a:solidFill>
-                  <a:srgbClr val="64748B"/>
-                </a:solidFill>
-                <a:latin typeface="Apple SD Gothic Neo" pitchFamily="34" charset="0"/>
-                <a:ea typeface="Apple SD Gothic Neo" pitchFamily="34" charset="-122"/>
-                <a:cs typeface="Apple SD Gothic Neo" pitchFamily="34" charset="-120"/>
-              </a:rPr>
-              <a:t>평가셋 개선 → 모델·룰 개선</a:t>
+              <a:rPr lang="en-US" sz="860" dirty="0">
+                <a:solidFill>
+                  <a:srgbClr val="047857"/>
+                </a:solidFill>
+                <a:latin typeface="Apple SD Gothic Neo" pitchFamily="34" charset="0"/>
+                <a:ea typeface="Apple SD Gothic Neo" pitchFamily="34" charset="-122"/>
+                <a:cs typeface="Apple SD Gothic Neo" pitchFamily="34" charset="-120"/>
+              </a:rPr>
+              <a:t>애매한 결과 검수 → 학습 데이터·룰 개선</a:t>
             </a:r>
             <a:endParaRPr lang="en-US" sz="1100" dirty="0"/>
           </a:p>
@@ -3988,131 +4165,28 @@
       </p:sp>
       <p:sp>
         <p:nvSpPr>
-          <p:cNvPr id="45" name="Text 43"/>
-          <p:cNvSpPr/>
-          <p:nvPr/>
-        </p:nvSpPr>
-        <p:spPr>
-          <a:xfrm>
-            <a:off x="3844442" y="5971032"/>
-            <a:ext cx="603504" cy="566928"/>
-          </a:xfrm>
-          <a:prstGeom prst="rect">
-            <a:avLst/>
-          </a:prstGeom>
-          <a:noFill/>
-          <a:ln/>
-        </p:spPr>
-        <p:txBody>
-          <a:bodyPr wrap="square" lIns="0" tIns="0" rIns="0" bIns="0" rtlCol="0" anchor="ctr"/>
-          <a:lstStyle/>
-          <a:p>
-            <a:pPr algn="ctr" indent="0" marL="0">
-              <a:buNone/>
-            </a:pPr>
-            <a:r>
-              <a:rPr lang="en-US" sz="1600" b="1" dirty="0">
-                <a:solidFill>
-                  <a:srgbClr val="CBD5E1"/>
-                </a:solidFill>
-                <a:latin typeface="Apple SD Gothic Neo" pitchFamily="34" charset="0"/>
-                <a:ea typeface="Apple SD Gothic Neo" pitchFamily="34" charset="-122"/>
-                <a:cs typeface="Apple SD Gothic Neo" pitchFamily="34" charset="-120"/>
-              </a:rPr>
-              <a:t>→</a:t>
-            </a:r>
-            <a:endParaRPr lang="en-US" sz="1600" dirty="0"/>
-          </a:p>
-        </p:txBody>
-      </p:sp>
-      <p:sp>
-        <p:nvSpPr>
-          <p:cNvPr id="46" name="Shape 44"/>
-          <p:cNvSpPr/>
-          <p:nvPr/>
-        </p:nvSpPr>
-        <p:spPr>
-          <a:xfrm>
-            <a:off x="4466234" y="5971032"/>
-            <a:ext cx="3259226" cy="566928"/>
-          </a:xfrm>
-          <a:prstGeom prst="roundRect">
-            <a:avLst>
-              <a:gd name="adj" fmla="val 14516"/>
-            </a:avLst>
-          </a:prstGeom>
-          <a:solidFill>
-            <a:srgbClr val="D1FAE5"/>
-          </a:solidFill>
-          <a:ln w="12700">
+          <p:cNvPr id="55" name="Shape 53"/>
+          <p:cNvSpPr/>
+          <p:nvPr/>
+        </p:nvSpPr>
+        <p:spPr>
+          <a:xfrm>
+            <a:off x="3826154" y="5998464"/>
+            <a:ext cx="640080" cy="0"/>
+          </a:xfrm>
+          <a:prstGeom prst="line">
+            <a:avLst/>
+          </a:prstGeom>
+          <a:noFill/>
+          <a:ln w="19050">
             <a:solidFill>
-              <a:srgbClr val="6EE7B7"/>
+              <a:srgbClr val="94A3B8"/>
             </a:solidFill>
             <a:prstDash val="solid"/>
+            <a:headEnd type="none"/>
+            <a:tailEnd type="triangle"/>
           </a:ln>
         </p:spPr>
-      </p:sp>
-      <p:sp>
-        <p:nvSpPr>
-          <p:cNvPr id="47" name="Text 45"/>
-          <p:cNvSpPr/>
-          <p:nvPr/>
-        </p:nvSpPr>
-        <p:spPr>
-          <a:xfrm>
-            <a:off x="4466234" y="5971032"/>
-            <a:ext cx="3259226" cy="566928"/>
-          </a:xfrm>
-          <a:prstGeom prst="rect">
-            <a:avLst/>
-          </a:prstGeom>
-          <a:noFill/>
-          <a:ln/>
-        </p:spPr>
-        <p:txBody>
-          <a:bodyPr wrap="square" lIns="0" tIns="0" rIns="0" bIns="0" rtlCol="0" anchor="ctr"/>
-          <a:lstStyle/>
-          <a:p>
-            <a:pPr algn="ctr" indent="0" marL="0">
-              <a:lnSpc>
-                <a:spcPct val="98000"/>
-              </a:lnSpc>
-              <a:buNone/>
-            </a:pPr>
-            <a:r>
-              <a:rPr lang="en-US" sz="1100" b="1" dirty="0">
-                <a:solidFill>
-                  <a:srgbClr val="047857"/>
-                </a:solidFill>
-                <a:latin typeface="Apple SD Gothic Neo" pitchFamily="34" charset="0"/>
-                <a:ea typeface="Apple SD Gothic Neo" pitchFamily="34" charset="-122"/>
-                <a:cs typeface="Apple SD Gothic Neo" pitchFamily="34" charset="-120"/>
-              </a:rPr>
-              <a:t>사용자 앱 · 아침 활동 보고서</a:t>
-            </a:r>
-            <a:endParaRPr lang="en-US" sz="1100" dirty="0"/>
-          </a:p>
-          <a:p>
-            <a:pPr algn="ctr" indent="0" marL="0">
-              <a:lnSpc>
-                <a:spcPct val="98000"/>
-              </a:lnSpc>
-              <a:buNone/>
-            </a:pPr>
-            <a:r>
-              <a:rPr lang="en-US" sz="880" dirty="0">
-                <a:solidFill>
-                  <a:srgbClr val="64748B"/>
-                </a:solidFill>
-                <a:latin typeface="Apple SD Gothic Neo" pitchFamily="34" charset="0"/>
-                <a:ea typeface="Apple SD Gothic Neo" pitchFamily="34" charset="-122"/>
-                <a:cs typeface="Apple SD Gothic Neo" pitchFamily="34" charset="-120"/>
-              </a:rPr>
-              <a:t>밤사이 행동을 시간순 정리</a:t>
-            </a:r>
-            <a:endParaRPr lang="en-US" sz="1100" dirty="0"/>
-          </a:p>
-        </p:txBody>
       </p:sp>
     </p:spTree>
   </p:cSld>
@@ -8389,7 +8463,7 @@
                 <a:ea typeface="Apple SD Gothic Neo" pitchFamily="34" charset="-122"/>
                 <a:cs typeface="Apple SD Gothic Neo" pitchFamily="34" charset="-120"/>
               </a:rPr>
-              <a:t>행동 라벨 7종 + 이상행동(개발 예정)</a:t>
+              <a:t>행동 라벨 8종</a:t>
             </a:r>
             <a:endParaRPr lang="en-US" sz="1300" dirty="0"/>
           </a:p>
@@ -8882,7 +8956,7 @@
                 <a:ea typeface="Apple SD Gothic Neo" pitchFamily="34" charset="-122"/>
                 <a:cs typeface="Apple SD Gothic Neo" pitchFamily="34" charset="-120"/>
               </a:rPr>
-              <a:t>이상행동 · 개발 예정</a:t>
+              <a:t>이상행동 · 미구분 행동</a:t>
             </a:r>
             <a:endParaRPr lang="en-US" sz="1050" dirty="0"/>
           </a:p>
@@ -9805,7 +9879,7 @@
         <p:spPr>
           <a:xfrm>
             <a:off x="804672" y="3355848"/>
-            <a:ext cx="2087804" cy="868680"/>
+            <a:ext cx="2087804" cy="822960"/>
           </a:xfrm>
           <a:prstGeom prst="rect">
             <a:avLst/>
@@ -10036,7 +10110,7 @@
                 <a:ea typeface="Apple SD Gothic Neo" pitchFamily="34" charset="-122"/>
                 <a:cs typeface="Apple SD Gothic Neo" pitchFamily="34" charset="-120"/>
               </a:rPr>
-              <a:t>행동 라벨 7종</a:t>
+              <a:t>행동 라벨 8종</a:t>
             </a:r>
             <a:endParaRPr lang="en-US" sz="1450" dirty="0"/>
           </a:p>
@@ -10051,7 +10125,7 @@
         <p:spPr>
           <a:xfrm>
             <a:off x="3642284" y="3355848"/>
-            <a:ext cx="2087804" cy="868680"/>
+            <a:ext cx="2087804" cy="822960"/>
           </a:xfrm>
           <a:prstGeom prst="rect">
             <a:avLst/>
@@ -10320,8 +10394,47 @@
         </p:nvSpPr>
         <p:spPr>
           <a:xfrm>
-            <a:off x="6479896" y="3355848"/>
-            <a:ext cx="2087804" cy="868680"/>
+            <a:off x="6479896" y="3136392"/>
+            <a:ext cx="2087804" cy="237744"/>
+          </a:xfrm>
+          <a:prstGeom prst="rect">
+            <a:avLst/>
+          </a:prstGeom>
+          <a:noFill/>
+          <a:ln/>
+        </p:spPr>
+        <p:txBody>
+          <a:bodyPr wrap="square" lIns="0" tIns="0" rIns="0" bIns="0" rtlCol="0" anchor="ctr"/>
+          <a:lstStyle/>
+          <a:p>
+            <a:pPr indent="0" marL="0">
+              <a:buNone/>
+            </a:pPr>
+            <a:r>
+              <a:rPr lang="en-US" sz="1000" dirty="0">
+                <a:solidFill>
+                  <a:srgbClr val="94A3B8"/>
+                </a:solidFill>
+                <a:latin typeface="Apple SD Gothic Neo" pitchFamily="34" charset="0"/>
+                <a:ea typeface="Apple SD Gothic Neo" pitchFamily="34" charset="-122"/>
+                <a:cs typeface="Apple SD Gothic Neo" pitchFamily="34" charset="-120"/>
+              </a:rPr>
+              <a:t>예시)</a:t>
+            </a:r>
+            <a:endParaRPr lang="en-US" sz="1000" dirty="0"/>
+          </a:p>
+        </p:txBody>
+      </p:sp>
+      <p:sp>
+        <p:nvSpPr>
+          <p:cNvPr id="23" name="Text 21"/>
+          <p:cNvSpPr/>
+          <p:nvPr/>
+        </p:nvSpPr>
+        <p:spPr>
+          <a:xfrm>
+            <a:off x="6479896" y="3429000"/>
+            <a:ext cx="2087804" cy="822960"/>
           </a:xfrm>
           <a:prstGeom prst="rect">
             <a:avLst/>
@@ -10408,7 +10521,7 @@
       </p:sp>
       <p:sp>
         <p:nvSpPr>
-          <p:cNvPr id="23" name="Text 21"/>
+          <p:cNvPr id="24" name="Text 22"/>
           <p:cNvSpPr/>
           <p:nvPr/>
         </p:nvSpPr>
@@ -10447,7 +10560,7 @@
       </p:sp>
       <p:sp>
         <p:nvSpPr>
-          <p:cNvPr id="24" name="Shape 22"/>
+          <p:cNvPr id="25" name="Shape 23"/>
           <p:cNvSpPr/>
           <p:nvPr/>
         </p:nvSpPr>
@@ -10481,7 +10594,7 @@
       </p:sp>
       <p:sp>
         <p:nvSpPr>
-          <p:cNvPr id="25" name="Shape 23"/>
+          <p:cNvPr id="26" name="Shape 24"/>
           <p:cNvSpPr/>
           <p:nvPr/>
         </p:nvSpPr>
@@ -10503,7 +10616,7 @@
       </p:sp>
       <p:sp>
         <p:nvSpPr>
-          <p:cNvPr id="26" name="Text 24"/>
+          <p:cNvPr id="27" name="Text 25"/>
           <p:cNvSpPr/>
           <p:nvPr/>
         </p:nvSpPr>
@@ -10542,7 +10655,7 @@
       </p:sp>
       <p:sp>
         <p:nvSpPr>
-          <p:cNvPr id="27" name="Text 25"/>
+          <p:cNvPr id="28" name="Text 26"/>
           <p:cNvSpPr/>
           <p:nvPr/>
         </p:nvSpPr>
@@ -10584,14 +10697,14 @@
       </p:sp>
       <p:sp>
         <p:nvSpPr>
-          <p:cNvPr id="28" name="Text 26"/>
+          <p:cNvPr id="29" name="Text 27"/>
           <p:cNvSpPr/>
           <p:nvPr/>
         </p:nvSpPr>
         <p:spPr>
           <a:xfrm>
             <a:off x="9317507" y="3355848"/>
-            <a:ext cx="2087804" cy="868680"/>
+            <a:ext cx="2087804" cy="822960"/>
           </a:xfrm>
           <a:prstGeom prst="rect">
             <a:avLst/>
@@ -10654,7 +10767,7 @@
       </p:sp>
       <p:sp>
         <p:nvSpPr>
-          <p:cNvPr id="29" name="Shape 27"/>
+          <p:cNvPr id="30" name="Shape 28"/>
           <p:cNvSpPr/>
           <p:nvPr/>
         </p:nvSpPr>
@@ -10681,7 +10794,7 @@
       </p:sp>
       <p:sp>
         <p:nvSpPr>
-          <p:cNvPr id="30" name="Text 28"/>
+          <p:cNvPr id="31" name="Text 29"/>
           <p:cNvSpPr/>
           <p:nvPr/>
         </p:nvSpPr>
@@ -10720,7 +10833,7 @@
       </p:sp>
       <p:sp>
         <p:nvSpPr>
-          <p:cNvPr id="31" name="Text 29"/>
+          <p:cNvPr id="32" name="Text 30"/>
           <p:cNvSpPr/>
           <p:nvPr/>
         </p:nvSpPr>
@@ -10796,7 +10909,7 @@
       </p:sp>
       <p:sp>
         <p:nvSpPr>
-          <p:cNvPr id="32" name="Shape 30"/>
+          <p:cNvPr id="33" name="Shape 31"/>
           <p:cNvSpPr/>
           <p:nvPr/>
         </p:nvSpPr>
@@ -10823,7 +10936,7 @@
       </p:sp>
       <p:sp>
         <p:nvSpPr>
-          <p:cNvPr id="33" name="Text 31"/>
+          <p:cNvPr id="34" name="Text 32"/>
           <p:cNvSpPr/>
           <p:nvPr/>
         </p:nvSpPr>
@@ -10862,7 +10975,7 @@
       </p:sp>
       <p:sp>
         <p:nvSpPr>
-          <p:cNvPr id="34" name="Text 32"/>
+          <p:cNvPr id="35" name="Text 33"/>
           <p:cNvSpPr/>
           <p:nvPr/>
         </p:nvSpPr>
@@ -10938,7 +11051,7 @@
       </p:sp>
       <p:sp>
         <p:nvSpPr>
-          <p:cNvPr id="35" name="Text 33"/>
+          <p:cNvPr id="36" name="Text 34"/>
           <p:cNvSpPr/>
           <p:nvPr/>
         </p:nvSpPr>
@@ -11677,7 +11790,7 @@
                 <a:ea typeface="Apple SD Gothic Neo" pitchFamily="34" charset="-122"/>
                 <a:cs typeface="Apple SD Gothic Neo" pitchFamily="34" charset="-120"/>
               </a:rPr>
-              <a:t>drinking (음수) — 근거와 함께 확정</a:t>
+              <a:t>drinking (음수 행동) — 근거와 함께 확정</a:t>
             </a:r>
             <a:endParaRPr lang="en-US" sz="1150" dirty="0"/>
           </a:p>
@@ -12914,7 +13027,7 @@
                 <a:ea typeface="Apple SD Gothic Neo" pitchFamily="34" charset="-122"/>
                 <a:cs typeface="Apple SD Gothic Neo" pitchFamily="34" charset="-120"/>
               </a:rPr>
-              <a:t>07 · 해자</a:t>
+              <a:t>07 · 기술 경쟁력</a:t>
             </a:r>
             <a:endParaRPr lang="en-US" sz="1250" dirty="0"/>
           </a:p>
@@ -12956,7 +13069,7 @@
                 <a:ea typeface="Apple SD Gothic Neo" pitchFamily="34" charset="-122"/>
                 <a:cs typeface="Apple SD Gothic Neo" pitchFamily="34" charset="-120"/>
               </a:rPr>
-              <a:t>우리의 해자는 영상 AI·특화 모델·사육 규칙의 결합이다</a:t>
+              <a:t>영상 AI·특화 모델과 IoT사육장 데이터의 결합</a:t>
             </a:r>
             <a:endParaRPr lang="en-US" sz="2700" dirty="0"/>
           </a:p>
@@ -12998,7 +13111,7 @@
                 <a:ea typeface="Apple SD Gothic Neo" pitchFamily="34" charset="-122"/>
                 <a:cs typeface="Apple SD Gothic Neo" pitchFamily="34" charset="-120"/>
               </a:rPr>
-              <a:t>외부 AI 하나를 쓰는 게 아니라 영상 AI·우리 데이터·사육 규칙을 결합하기 때문에, 시간이 갈수록 복제 난이도가 올라간다.</a:t>
+              <a:t>외부 AI 하나를 쓰는 게 아니라 영상 AI·IoT 데이터·규칙을 결합하기 때문에, 시간이 갈수록 복제 난이도가 올라간다.</a:t>
             </a:r>
             <a:endParaRPr lang="en-US" sz="1450" dirty="0"/>
           </a:p>
@@ -13045,24 +13158,508 @@
       </p:sp>
       <p:sp>
         <p:nvSpPr>
-          <p:cNvPr id="6" name="Shape 4"/>
-          <p:cNvSpPr/>
-          <p:nvPr/>
-        </p:nvSpPr>
-        <p:spPr>
-          <a:xfrm>
-            <a:off x="566928" y="2194560"/>
-            <a:ext cx="2092376" cy="1965960"/>
+          <p:cNvPr id="6" name="Text 4"/>
+          <p:cNvSpPr/>
+          <p:nvPr/>
+        </p:nvSpPr>
+        <p:spPr>
+          <a:xfrm>
+            <a:off x="566928" y="2029968"/>
+            <a:ext cx="2092376" cy="274320"/>
+          </a:xfrm>
+          <a:prstGeom prst="rect">
+            <a:avLst/>
+          </a:prstGeom>
+          <a:noFill/>
+          <a:ln/>
+        </p:spPr>
+        <p:txBody>
+          <a:bodyPr wrap="square" lIns="0" tIns="0" rIns="0" bIns="0" rtlCol="0" anchor="ctr"/>
+          <a:lstStyle/>
+          <a:p>
+            <a:pPr algn="ctr" indent="0" marL="0">
+              <a:buNone/>
+            </a:pPr>
+            <a:r>
+              <a:rPr lang="en-US" sz="1100" b="1" dirty="0">
+                <a:solidFill>
+                  <a:srgbClr val="94A3B8"/>
+                </a:solidFill>
+                <a:latin typeface="Apple SD Gothic Neo" pitchFamily="34" charset="0"/>
+                <a:ea typeface="Apple SD Gothic Neo" pitchFamily="34" charset="-122"/>
+                <a:cs typeface="Apple SD Gothic Neo" pitchFamily="34" charset="-120"/>
+              </a:rPr>
+              <a:t>누구나 쓰는 공통 기술</a:t>
+            </a:r>
+            <a:endParaRPr lang="en-US" sz="1100" dirty="0"/>
+          </a:p>
+        </p:txBody>
+      </p:sp>
+      <p:sp>
+        <p:nvSpPr>
+          <p:cNvPr id="7" name="Text 5"/>
+          <p:cNvSpPr/>
+          <p:nvPr/>
+        </p:nvSpPr>
+        <p:spPr>
+          <a:xfrm>
+            <a:off x="3555416" y="2029968"/>
+            <a:ext cx="8069351" cy="274320"/>
+          </a:xfrm>
+          <a:prstGeom prst="rect">
+            <a:avLst/>
+          </a:prstGeom>
+          <a:noFill/>
+          <a:ln/>
+        </p:spPr>
+        <p:txBody>
+          <a:bodyPr wrap="square" lIns="0" tIns="0" rIns="0" bIns="0" rtlCol="0" anchor="ctr"/>
+          <a:lstStyle/>
+          <a:p>
+            <a:pPr algn="ctr" indent="0" marL="0">
+              <a:buNone/>
+            </a:pPr>
+            <a:r>
+              <a:rPr lang="en-US" sz="1100" b="1" dirty="0">
+                <a:solidFill>
+                  <a:srgbClr val="1E293B"/>
+                </a:solidFill>
+                <a:latin typeface="Apple SD Gothic Neo" pitchFamily="34" charset="0"/>
+                <a:ea typeface="Apple SD Gothic Neo" pitchFamily="34" charset="-122"/>
+                <a:cs typeface="Apple SD Gothic Neo" pitchFamily="34" charset="-120"/>
+              </a:rPr>
+              <a:t>우리만 쌓이는 독점 자산</a:t>
+            </a:r>
+            <a:pPr algn="ctr" indent="0" marL="0">
+              <a:buNone/>
+            </a:pPr>
+            <a:r>
+              <a:rPr lang="en-US" sz="1100" dirty="0">
+                <a:solidFill>
+                  <a:srgbClr val="047857"/>
+                </a:solidFill>
+                <a:latin typeface="Apple SD Gothic Neo" pitchFamily="34" charset="0"/>
+                <a:ea typeface="Apple SD Gothic Neo" pitchFamily="34" charset="-122"/>
+                <a:cs typeface="Apple SD Gothic Neo" pitchFamily="34" charset="-120"/>
+              </a:rPr>
+              <a:t>  ·  데이터가 쌓일수록 강해진다</a:t>
+            </a:r>
+            <a:endParaRPr lang="en-US" sz="1100" dirty="0"/>
+          </a:p>
+        </p:txBody>
+      </p:sp>
+      <p:sp>
+        <p:nvSpPr>
+          <p:cNvPr id="8" name="Shape 6"/>
+          <p:cNvSpPr/>
+          <p:nvPr/>
+        </p:nvSpPr>
+        <p:spPr>
+          <a:xfrm>
+            <a:off x="566928" y="2414016"/>
+            <a:ext cx="2092376" cy="2139696"/>
           </a:xfrm>
           <a:prstGeom prst="roundRect">
             <a:avLst>
-              <a:gd name="adj" fmla="val 5116"/>
+              <a:gd name="adj" fmla="val 4807"/>
+            </a:avLst>
+          </a:prstGeom>
+          <a:solidFill>
+            <a:srgbClr val="F1F5F9"/>
+          </a:solidFill>
+          <a:ln w="12700">
+            <a:solidFill>
+              <a:srgbClr val="E2E8F0"/>
+            </a:solidFill>
+            <a:prstDash val="solid"/>
+          </a:ln>
+          <a:effectLst>
+            <a:outerShdw sx="100000" sy="100000" kx="0" ky="0" algn="bl" rotWithShape="0" blurRad="88900" dist="25400" dir="5400000">
+              <a:srgbClr val="64748B">
+                <a:alpha val="16000"/>
+              </a:srgbClr>
+            </a:outerShdw>
+          </a:effectLst>
+        </p:spPr>
+      </p:sp>
+      <p:sp>
+        <p:nvSpPr>
+          <p:cNvPr id="9" name="Text 7"/>
+          <p:cNvSpPr/>
+          <p:nvPr/>
+        </p:nvSpPr>
+        <p:spPr>
+          <a:xfrm>
+            <a:off x="713232" y="2651760"/>
+            <a:ext cx="1799768" cy="603504"/>
+          </a:xfrm>
+          <a:prstGeom prst="rect">
+            <a:avLst/>
+          </a:prstGeom>
+          <a:noFill/>
+          <a:ln/>
+        </p:spPr>
+        <p:txBody>
+          <a:bodyPr wrap="square" lIns="0" tIns="0" rIns="0" bIns="0" rtlCol="0" anchor="ctr"/>
+          <a:lstStyle/>
+          <a:p>
+            <a:pPr algn="ctr" indent="0" marL="0">
+              <a:lnSpc>
+                <a:spcPct val="100000"/>
+              </a:lnSpc>
+              <a:buNone/>
+            </a:pPr>
+            <a:r>
+              <a:rPr lang="en-US" sz="1350" b="1" dirty="0">
+                <a:solidFill>
+                  <a:srgbClr val="1E293B"/>
+                </a:solidFill>
+                <a:latin typeface="Apple SD Gothic Neo" pitchFamily="34" charset="0"/>
+                <a:ea typeface="Apple SD Gothic Neo" pitchFamily="34" charset="-122"/>
+                <a:cs typeface="Apple SD Gothic Neo" pitchFamily="34" charset="-120"/>
+              </a:rPr>
+              <a:t>영상을 이해하는 AI</a:t>
+            </a:r>
+            <a:endParaRPr lang="en-US" sz="1350" dirty="0"/>
+          </a:p>
+        </p:txBody>
+      </p:sp>
+      <p:sp>
+        <p:nvSpPr>
+          <p:cNvPr id="10" name="Text 8"/>
+          <p:cNvSpPr/>
+          <p:nvPr/>
+        </p:nvSpPr>
+        <p:spPr>
+          <a:xfrm>
+            <a:off x="749808" y="3310128"/>
+            <a:ext cx="1726616" cy="237744"/>
+          </a:xfrm>
+          <a:prstGeom prst="rect">
+            <a:avLst/>
+          </a:prstGeom>
+          <a:noFill/>
+          <a:ln/>
+        </p:spPr>
+        <p:txBody>
+          <a:bodyPr wrap="square" lIns="0" tIns="0" rIns="0" bIns="0" rtlCol="0" anchor="ctr"/>
+          <a:lstStyle/>
+          <a:p>
+            <a:pPr algn="ctr" indent="0" marL="0">
+              <a:buNone/>
+            </a:pPr>
+            <a:r>
+              <a:rPr lang="en-US" sz="1000" dirty="0">
+                <a:solidFill>
+                  <a:srgbClr val="64748B"/>
+                </a:solidFill>
+                <a:latin typeface="Courier New" pitchFamily="34" charset="0"/>
+                <a:ea typeface="Courier New" pitchFamily="34" charset="-122"/>
+                <a:cs typeface="Courier New" pitchFamily="34" charset="-120"/>
+              </a:rPr>
+              <a:t>VLM</a:t>
+            </a:r>
+            <a:endParaRPr lang="en-US" sz="1000" dirty="0"/>
+          </a:p>
+        </p:txBody>
+      </p:sp>
+      <p:sp>
+        <p:nvSpPr>
+          <p:cNvPr id="11" name="Text 9"/>
+          <p:cNvSpPr/>
+          <p:nvPr/>
+        </p:nvSpPr>
+        <p:spPr>
+          <a:xfrm>
+            <a:off x="713232" y="3602736"/>
+            <a:ext cx="1799768" cy="841248"/>
+          </a:xfrm>
+          <a:prstGeom prst="rect">
+            <a:avLst/>
+          </a:prstGeom>
+          <a:noFill/>
+          <a:ln/>
+        </p:spPr>
+        <p:txBody>
+          <a:bodyPr wrap="square" lIns="0" tIns="0" rIns="0" bIns="0" rtlCol="0" anchor="t"/>
+          <a:lstStyle/>
+          <a:p>
+            <a:pPr algn="ctr" indent="0" marL="0">
+              <a:lnSpc>
+                <a:spcPct val="114000"/>
+              </a:lnSpc>
+              <a:buNone/>
+            </a:pPr>
+            <a:r>
+              <a:rPr lang="en-US" sz="1020" dirty="0">
+                <a:solidFill>
+                  <a:srgbClr val="1E293B"/>
+                </a:solidFill>
+                <a:latin typeface="Apple SD Gothic Neo" pitchFamily="34" charset="0"/>
+                <a:ea typeface="Apple SD Gothic Neo" pitchFamily="34" charset="-122"/>
+                <a:cs typeface="Apple SD Gothic Neo" pitchFamily="34" charset="-120"/>
+              </a:rPr>
+              <a:t>영상을 보고 의미를 읽는 범용 시각 AI — 누구나 쓸 수 있는 공통 기술</a:t>
+            </a:r>
+            <a:endParaRPr lang="en-US" sz="1020" dirty="0"/>
+          </a:p>
+        </p:txBody>
+      </p:sp>
+      <p:sp>
+        <p:nvSpPr>
+          <p:cNvPr id="12" name="Text 10"/>
+          <p:cNvSpPr/>
+          <p:nvPr/>
+        </p:nvSpPr>
+        <p:spPr>
+          <a:xfrm>
+            <a:off x="2915336" y="3255264"/>
+            <a:ext cx="384048" cy="457200"/>
+          </a:xfrm>
+          <a:prstGeom prst="rect">
+            <a:avLst/>
+          </a:prstGeom>
+          <a:noFill/>
+          <a:ln/>
+        </p:spPr>
+        <p:txBody>
+          <a:bodyPr wrap="square" lIns="0" tIns="0" rIns="0" bIns="0" rtlCol="0" anchor="ctr"/>
+          <a:lstStyle/>
+          <a:p>
+            <a:pPr algn="ctr" indent="0" marL="0">
+              <a:buNone/>
+            </a:pPr>
+            <a:r>
+              <a:rPr lang="en-US" sz="2600" b="1" dirty="0">
+                <a:solidFill>
+                  <a:srgbClr val="94A3B8"/>
+                </a:solidFill>
+                <a:latin typeface="Apple SD Gothic Neo" pitchFamily="34" charset="0"/>
+                <a:ea typeface="Apple SD Gothic Neo" pitchFamily="34" charset="-122"/>
+                <a:cs typeface="Apple SD Gothic Neo" pitchFamily="34" charset="-120"/>
+              </a:rPr>
+              <a:t>+</a:t>
+            </a:r>
+            <a:endParaRPr lang="en-US" sz="2600" dirty="0"/>
+          </a:p>
+        </p:txBody>
+      </p:sp>
+      <p:sp>
+        <p:nvSpPr>
+          <p:cNvPr id="13" name="Shape 11"/>
+          <p:cNvSpPr/>
+          <p:nvPr/>
+        </p:nvSpPr>
+        <p:spPr>
+          <a:xfrm>
+            <a:off x="3555416" y="2414016"/>
+            <a:ext cx="2092376" cy="2139696"/>
+          </a:xfrm>
+          <a:prstGeom prst="roundRect">
+            <a:avLst>
+              <a:gd name="adj" fmla="val 4807"/>
+            </a:avLst>
+          </a:prstGeom>
+          <a:solidFill>
+            <a:srgbClr val="ECFDF5"/>
+          </a:solidFill>
+          <a:ln w="15875">
+            <a:solidFill>
+              <a:srgbClr val="6EE7B7"/>
+            </a:solidFill>
+            <a:prstDash val="solid"/>
+          </a:ln>
+          <a:effectLst>
+            <a:outerShdw sx="100000" sy="100000" kx="0" ky="0" algn="bl" rotWithShape="0" blurRad="88900" dist="25400" dir="5400000">
+              <a:srgbClr val="64748B">
+                <a:alpha val="16000"/>
+              </a:srgbClr>
+            </a:outerShdw>
+          </a:effectLst>
+        </p:spPr>
+      </p:sp>
+      <p:sp>
+        <p:nvSpPr>
+          <p:cNvPr id="14" name="Text 12"/>
+          <p:cNvSpPr/>
+          <p:nvPr/>
+        </p:nvSpPr>
+        <p:spPr>
+          <a:xfrm>
+            <a:off x="3701720" y="2651760"/>
+            <a:ext cx="1799768" cy="603504"/>
+          </a:xfrm>
+          <a:prstGeom prst="rect">
+            <a:avLst/>
+          </a:prstGeom>
+          <a:noFill/>
+          <a:ln/>
+        </p:spPr>
+        <p:txBody>
+          <a:bodyPr wrap="square" lIns="0" tIns="0" rIns="0" bIns="0" rtlCol="0" anchor="ctr"/>
+          <a:lstStyle/>
+          <a:p>
+            <a:pPr algn="ctr" indent="0" marL="0">
+              <a:lnSpc>
+                <a:spcPct val="100000"/>
+              </a:lnSpc>
+              <a:buNone/>
+            </a:pPr>
+            <a:r>
+              <a:rPr lang="en-US" sz="1350" b="1" dirty="0">
+                <a:solidFill>
+                  <a:srgbClr val="047857"/>
+                </a:solidFill>
+                <a:latin typeface="Apple SD Gothic Neo" pitchFamily="34" charset="0"/>
+                <a:ea typeface="Apple SD Gothic Neo" pitchFamily="34" charset="-122"/>
+                <a:cs typeface="Apple SD Gothic Neo" pitchFamily="34" charset="-120"/>
+              </a:rPr>
+              <a:t>쌓이는 행동 데이터 · 특화 모델</a:t>
+            </a:r>
+            <a:endParaRPr lang="en-US" sz="1350" dirty="0"/>
+          </a:p>
+        </p:txBody>
+      </p:sp>
+      <p:sp>
+        <p:nvSpPr>
+          <p:cNvPr id="15" name="Text 13"/>
+          <p:cNvSpPr/>
+          <p:nvPr/>
+        </p:nvSpPr>
+        <p:spPr>
+          <a:xfrm>
+            <a:off x="3738296" y="3310128"/>
+            <a:ext cx="1726616" cy="237744"/>
+          </a:xfrm>
+          <a:prstGeom prst="rect">
+            <a:avLst/>
+          </a:prstGeom>
+          <a:noFill/>
+          <a:ln/>
+        </p:spPr>
+        <p:txBody>
+          <a:bodyPr wrap="square" lIns="0" tIns="0" rIns="0" bIns="0" rtlCol="0" anchor="ctr"/>
+          <a:lstStyle/>
+          <a:p>
+            <a:pPr algn="ctr" indent="0" marL="0">
+              <a:buNone/>
+            </a:pPr>
+            <a:r>
+              <a:rPr lang="en-US" sz="1000" dirty="0">
+                <a:solidFill>
+                  <a:srgbClr val="64748B"/>
+                </a:solidFill>
+                <a:latin typeface="Courier New" pitchFamily="34" charset="0"/>
+                <a:ea typeface="Courier New" pitchFamily="34" charset="-122"/>
+                <a:cs typeface="Courier New" pitchFamily="34" charset="-120"/>
+              </a:rPr>
+              <a:t>fine-tuned</a:t>
+            </a:r>
+            <a:endParaRPr lang="en-US" sz="1000" dirty="0"/>
+          </a:p>
+        </p:txBody>
+      </p:sp>
+      <p:sp>
+        <p:nvSpPr>
+          <p:cNvPr id="16" name="Text 14"/>
+          <p:cNvSpPr/>
+          <p:nvPr/>
+        </p:nvSpPr>
+        <p:spPr>
+          <a:xfrm>
+            <a:off x="3701720" y="3602736"/>
+            <a:ext cx="1799768" cy="841248"/>
+          </a:xfrm>
+          <a:prstGeom prst="rect">
+            <a:avLst/>
+          </a:prstGeom>
+          <a:noFill/>
+          <a:ln/>
+        </p:spPr>
+        <p:txBody>
+          <a:bodyPr wrap="square" lIns="0" tIns="0" rIns="0" bIns="0" rtlCol="0" anchor="t"/>
+          <a:lstStyle/>
+          <a:p>
+            <a:pPr algn="ctr" indent="0" marL="0">
+              <a:lnSpc>
+                <a:spcPct val="114000"/>
+              </a:lnSpc>
+              <a:buNone/>
+            </a:pPr>
+            <a:r>
+              <a:rPr lang="en-US" sz="1020" dirty="0">
+                <a:solidFill>
+                  <a:srgbClr val="1E293B"/>
+                </a:solidFill>
+                <a:latin typeface="Apple SD Gothic Neo" pitchFamily="34" charset="0"/>
+                <a:ea typeface="Apple SD Gothic Neo" pitchFamily="34" charset="-122"/>
+                <a:cs typeface="Apple SD Gothic Neo" pitchFamily="34" charset="-120"/>
+              </a:rPr>
+              <a:t>라벨·사람 검수가 쌓일수록 정확도가 오르는 도마뱀 특화 AI</a:t>
+            </a:r>
+            <a:endParaRPr lang="en-US" sz="1020" dirty="0"/>
+          </a:p>
+        </p:txBody>
+      </p:sp>
+      <p:sp>
+        <p:nvSpPr>
+          <p:cNvPr id="17" name="Text 15"/>
+          <p:cNvSpPr/>
+          <p:nvPr/>
+        </p:nvSpPr>
+        <p:spPr>
+          <a:xfrm>
+            <a:off x="5903824" y="3255264"/>
+            <a:ext cx="384048" cy="457200"/>
+          </a:xfrm>
+          <a:prstGeom prst="rect">
+            <a:avLst/>
+          </a:prstGeom>
+          <a:noFill/>
+          <a:ln/>
+        </p:spPr>
+        <p:txBody>
+          <a:bodyPr wrap="square" lIns="0" tIns="0" rIns="0" bIns="0" rtlCol="0" anchor="ctr"/>
+          <a:lstStyle/>
+          <a:p>
+            <a:pPr algn="ctr" indent="0" marL="0">
+              <a:buNone/>
+            </a:pPr>
+            <a:r>
+              <a:rPr lang="en-US" sz="2600" b="1" dirty="0">
+                <a:solidFill>
+                  <a:srgbClr val="94A3B8"/>
+                </a:solidFill>
+                <a:latin typeface="Apple SD Gothic Neo" pitchFamily="34" charset="0"/>
+                <a:ea typeface="Apple SD Gothic Neo" pitchFamily="34" charset="-122"/>
+                <a:cs typeface="Apple SD Gothic Neo" pitchFamily="34" charset="-120"/>
+              </a:rPr>
+              <a:t>+</a:t>
+            </a:r>
+            <a:endParaRPr lang="en-US" sz="2600" dirty="0"/>
+          </a:p>
+        </p:txBody>
+      </p:sp>
+      <p:sp>
+        <p:nvSpPr>
+          <p:cNvPr id="18" name="Shape 16"/>
+          <p:cNvSpPr/>
+          <p:nvPr/>
+        </p:nvSpPr>
+        <p:spPr>
+          <a:xfrm>
+            <a:off x="6543904" y="2414016"/>
+            <a:ext cx="2092376" cy="2139696"/>
+          </a:xfrm>
+          <a:prstGeom prst="roundRect">
+            <a:avLst>
+              <a:gd name="adj" fmla="val 4807"/>
             </a:avLst>
           </a:prstGeom>
           <a:solidFill>
             <a:srgbClr val="EFF6FF"/>
           </a:solidFill>
-          <a:ln w="12700">
+          <a:ln w="15875">
             <a:solidFill>
               <a:srgbClr val="93C5FD"/>
             </a:solidFill>
@@ -13079,14 +13676,14 @@
       </p:sp>
       <p:sp>
         <p:nvSpPr>
-          <p:cNvPr id="7" name="Text 5"/>
-          <p:cNvSpPr/>
-          <p:nvPr/>
-        </p:nvSpPr>
-        <p:spPr>
-          <a:xfrm>
-            <a:off x="749808" y="2578608"/>
-            <a:ext cx="1726616" cy="548640"/>
+          <p:cNvPr id="19" name="Text 17"/>
+          <p:cNvSpPr/>
+          <p:nvPr/>
+        </p:nvSpPr>
+        <p:spPr>
+          <a:xfrm>
+            <a:off x="6690208" y="2651760"/>
+            <a:ext cx="1799768" cy="603504"/>
           </a:xfrm>
           <a:prstGeom prst="rect">
             <a:avLst/>
@@ -13105,7 +13702,7 @@
               <a:buNone/>
             </a:pPr>
             <a:r>
-              <a:rPr lang="en-US" sz="1500" b="1" dirty="0">
+              <a:rPr lang="en-US" sz="1350" b="1" dirty="0">
                 <a:solidFill>
                   <a:srgbClr val="2563EB"/>
                 </a:solidFill>
@@ -13113,22 +13710,22 @@
                 <a:ea typeface="Apple SD Gothic Neo" pitchFamily="34" charset="-122"/>
                 <a:cs typeface="Apple SD Gothic Neo" pitchFamily="34" charset="-120"/>
               </a:rPr>
-              <a:t>영상을 이해하는 AI</a:t>
-            </a:r>
-            <a:endParaRPr lang="en-US" sz="1500" dirty="0"/>
-          </a:p>
-        </p:txBody>
-      </p:sp>
-      <p:sp>
-        <p:nvSpPr>
-          <p:cNvPr id="8" name="Text 6"/>
-          <p:cNvSpPr/>
-          <p:nvPr/>
-        </p:nvSpPr>
-        <p:spPr>
-          <a:xfrm>
-            <a:off x="749808" y="3108960"/>
-            <a:ext cx="1726616" cy="256032"/>
+              <a:t>IoT 사육장 데이터 결합</a:t>
+            </a:r>
+            <a:endParaRPr lang="en-US" sz="1350" dirty="0"/>
+          </a:p>
+        </p:txBody>
+      </p:sp>
+      <p:sp>
+        <p:nvSpPr>
+          <p:cNvPr id="20" name="Text 18"/>
+          <p:cNvSpPr/>
+          <p:nvPr/>
+        </p:nvSpPr>
+        <p:spPr>
+          <a:xfrm>
+            <a:off x="6726784" y="3310128"/>
+            <a:ext cx="1726616" cy="237744"/>
           </a:xfrm>
           <a:prstGeom prst="rect">
             <a:avLst/>
@@ -13144,7 +13741,7 @@
               <a:buNone/>
             </a:pPr>
             <a:r>
-              <a:rPr lang="en-US" sz="1050" dirty="0">
+              <a:rPr lang="en-US" sz="1000" dirty="0">
                 <a:solidFill>
                   <a:srgbClr val="64748B"/>
                 </a:solidFill>
@@ -13152,22 +13749,22 @@
                 <a:ea typeface="Courier New" pitchFamily="34" charset="-122"/>
                 <a:cs typeface="Courier New" pitchFamily="34" charset="-120"/>
               </a:rPr>
-              <a:t>VLM</a:t>
-            </a:r>
-            <a:endParaRPr lang="en-US" sz="1050" dirty="0"/>
-          </a:p>
-        </p:txBody>
-      </p:sp>
-      <p:sp>
-        <p:nvSpPr>
-          <p:cNvPr id="9" name="Text 7"/>
-          <p:cNvSpPr/>
-          <p:nvPr/>
-        </p:nvSpPr>
-        <p:spPr>
-          <a:xfrm>
-            <a:off x="731520" y="3419856"/>
-            <a:ext cx="1763192" cy="640080"/>
+              <a:t>sensor fusion</a:t>
+            </a:r>
+            <a:endParaRPr lang="en-US" sz="1000" dirty="0"/>
+          </a:p>
+        </p:txBody>
+      </p:sp>
+      <p:sp>
+        <p:nvSpPr>
+          <p:cNvPr id="21" name="Text 19"/>
+          <p:cNvSpPr/>
+          <p:nvPr/>
+        </p:nvSpPr>
+        <p:spPr>
+          <a:xfrm>
+            <a:off x="6690208" y="3602736"/>
+            <a:ext cx="1799768" cy="841248"/>
           </a:xfrm>
           <a:prstGeom prst="rect">
             <a:avLst/>
@@ -13181,12 +13778,12 @@
           <a:p>
             <a:pPr algn="ctr" indent="0" marL="0">
               <a:lnSpc>
-                <a:spcPct val="112000"/>
+                <a:spcPct val="114000"/>
               </a:lnSpc>
               <a:buNone/>
             </a:pPr>
             <a:r>
-              <a:rPr lang="en-US" sz="1080" dirty="0">
+              <a:rPr lang="en-US" sz="1020" dirty="0">
                 <a:solidFill>
                   <a:srgbClr val="1E293B"/>
                 </a:solidFill>
@@ -13194,21 +13791,21 @@
                 <a:ea typeface="Apple SD Gothic Neo" pitchFamily="34" charset="-122"/>
                 <a:cs typeface="Apple SD Gothic Neo" pitchFamily="34" charset="-120"/>
               </a:rPr>
-              <a:t>영상을 보고 의미를 해석하는 범용 시각 AI</a:t>
-            </a:r>
-            <a:endParaRPr lang="en-US" sz="1080" dirty="0"/>
-          </a:p>
-        </p:txBody>
-      </p:sp>
-      <p:sp>
-        <p:nvSpPr>
-          <p:cNvPr id="10" name="Text 8"/>
-          <p:cNvSpPr/>
-          <p:nvPr/>
-        </p:nvSpPr>
-        <p:spPr>
-          <a:xfrm>
-            <a:off x="2915336" y="2948940"/>
+              <a:t>온·습도·급이·조명 기록까지 결합해 영상 밖 정황증거로 함께 본다</a:t>
+            </a:r>
+            <a:endParaRPr lang="en-US" sz="1020" dirty="0"/>
+          </a:p>
+        </p:txBody>
+      </p:sp>
+      <p:sp>
+        <p:nvSpPr>
+          <p:cNvPr id="22" name="Text 20"/>
+          <p:cNvSpPr/>
+          <p:nvPr/>
+        </p:nvSpPr>
+        <p:spPr>
+          <a:xfrm>
+            <a:off x="8892311" y="3255264"/>
             <a:ext cx="384048" cy="457200"/>
           </a:xfrm>
           <a:prstGeom prst="rect">
@@ -13241,220 +13838,24 @@
       </p:sp>
       <p:sp>
         <p:nvSpPr>
-          <p:cNvPr id="11" name="Shape 9"/>
-          <p:cNvSpPr/>
-          <p:nvPr/>
-        </p:nvSpPr>
-        <p:spPr>
-          <a:xfrm>
-            <a:off x="3555416" y="2194560"/>
-            <a:ext cx="2092376" cy="1965960"/>
+          <p:cNvPr id="23" name="Shape 21"/>
+          <p:cNvSpPr/>
+          <p:nvPr/>
+        </p:nvSpPr>
+        <p:spPr>
+          <a:xfrm>
+            <a:off x="9532391" y="2414016"/>
+            <a:ext cx="2092376" cy="2139696"/>
           </a:xfrm>
           <a:prstGeom prst="roundRect">
             <a:avLst>
-              <a:gd name="adj" fmla="val 5116"/>
-            </a:avLst>
-          </a:prstGeom>
-          <a:solidFill>
-            <a:srgbClr val="ECFDF5"/>
-          </a:solidFill>
-          <a:ln w="12700">
-            <a:solidFill>
-              <a:srgbClr val="6EE7B7"/>
-            </a:solidFill>
-            <a:prstDash val="solid"/>
-          </a:ln>
-          <a:effectLst>
-            <a:outerShdw sx="100000" sy="100000" kx="0" ky="0" algn="bl" rotWithShape="0" blurRad="88900" dist="25400" dir="5400000">
-              <a:srgbClr val="64748B">
-                <a:alpha val="16000"/>
-              </a:srgbClr>
-            </a:outerShdw>
-          </a:effectLst>
-        </p:spPr>
-      </p:sp>
-      <p:sp>
-        <p:nvSpPr>
-          <p:cNvPr id="12" name="Text 10"/>
-          <p:cNvSpPr/>
-          <p:nvPr/>
-        </p:nvSpPr>
-        <p:spPr>
-          <a:xfrm>
-            <a:off x="3738296" y="2578608"/>
-            <a:ext cx="1726616" cy="548640"/>
-          </a:xfrm>
-          <a:prstGeom prst="rect">
-            <a:avLst/>
-          </a:prstGeom>
-          <a:noFill/>
-          <a:ln/>
-        </p:spPr>
-        <p:txBody>
-          <a:bodyPr wrap="square" lIns="0" tIns="0" rIns="0" bIns="0" rtlCol="0" anchor="ctr"/>
-          <a:lstStyle/>
-          <a:p>
-            <a:pPr algn="ctr" indent="0" marL="0">
-              <a:lnSpc>
-                <a:spcPct val="100000"/>
-              </a:lnSpc>
-              <a:buNone/>
-            </a:pPr>
-            <a:r>
-              <a:rPr lang="en-US" sz="1500" b="1" dirty="0">
-                <a:solidFill>
-                  <a:srgbClr val="047857"/>
-                </a:solidFill>
-                <a:latin typeface="Apple SD Gothic Neo" pitchFamily="34" charset="0"/>
-                <a:ea typeface="Apple SD Gothic Neo" pitchFamily="34" charset="-122"/>
-                <a:cs typeface="Apple SD Gothic Neo" pitchFamily="34" charset="-120"/>
-              </a:rPr>
-              <a:t>특화 모델</a:t>
-            </a:r>
-            <a:endParaRPr lang="en-US" sz="1500" dirty="0"/>
-          </a:p>
-        </p:txBody>
-      </p:sp>
-      <p:sp>
-        <p:nvSpPr>
-          <p:cNvPr id="13" name="Text 11"/>
-          <p:cNvSpPr/>
-          <p:nvPr/>
-        </p:nvSpPr>
-        <p:spPr>
-          <a:xfrm>
-            <a:off x="3738296" y="3108960"/>
-            <a:ext cx="1726616" cy="256032"/>
-          </a:xfrm>
-          <a:prstGeom prst="rect">
-            <a:avLst/>
-          </a:prstGeom>
-          <a:noFill/>
-          <a:ln/>
-        </p:spPr>
-        <p:txBody>
-          <a:bodyPr wrap="square" lIns="0" tIns="0" rIns="0" bIns="0" rtlCol="0" anchor="ctr"/>
-          <a:lstStyle/>
-          <a:p>
-            <a:pPr algn="ctr" indent="0" marL="0">
-              <a:buNone/>
-            </a:pPr>
-            <a:r>
-              <a:rPr lang="en-US" sz="1050" dirty="0">
-                <a:solidFill>
-                  <a:srgbClr val="64748B"/>
-                </a:solidFill>
-                <a:latin typeface="Courier New" pitchFamily="34" charset="0"/>
-                <a:ea typeface="Courier New" pitchFamily="34" charset="-122"/>
-                <a:cs typeface="Courier New" pitchFamily="34" charset="-120"/>
-              </a:rPr>
-              <a:t>fine-tuned</a:t>
-            </a:r>
-            <a:endParaRPr lang="en-US" sz="1050" dirty="0"/>
-          </a:p>
-        </p:txBody>
-      </p:sp>
-      <p:sp>
-        <p:nvSpPr>
-          <p:cNvPr id="14" name="Text 12"/>
-          <p:cNvSpPr/>
-          <p:nvPr/>
-        </p:nvSpPr>
-        <p:spPr>
-          <a:xfrm>
-            <a:off x="3720008" y="3419856"/>
-            <a:ext cx="1763192" cy="640080"/>
-          </a:xfrm>
-          <a:prstGeom prst="rect">
-            <a:avLst/>
-          </a:prstGeom>
-          <a:noFill/>
-          <a:ln/>
-        </p:spPr>
-        <p:txBody>
-          <a:bodyPr wrap="square" lIns="0" tIns="0" rIns="0" bIns="0" rtlCol="0" anchor="t"/>
-          <a:lstStyle/>
-          <a:p>
-            <a:pPr algn="ctr" indent="0" marL="0">
-              <a:lnSpc>
-                <a:spcPct val="112000"/>
-              </a:lnSpc>
-              <a:buNone/>
-            </a:pPr>
-            <a:r>
-              <a:rPr lang="en-US" sz="1080" dirty="0">
-                <a:solidFill>
-                  <a:srgbClr val="1E293B"/>
-                </a:solidFill>
-                <a:latin typeface="Apple SD Gothic Neo" pitchFamily="34" charset="0"/>
-                <a:ea typeface="Apple SD Gothic Neo" pitchFamily="34" charset="-122"/>
-                <a:cs typeface="Apple SD Gothic Neo" pitchFamily="34" charset="-120"/>
-              </a:rPr>
-              <a:t>라벨 데이터로 학습하는 도마뱀 행동 AI</a:t>
-            </a:r>
-            <a:endParaRPr lang="en-US" sz="1080" dirty="0"/>
-          </a:p>
-        </p:txBody>
-      </p:sp>
-      <p:sp>
-        <p:nvSpPr>
-          <p:cNvPr id="15" name="Text 13"/>
-          <p:cNvSpPr/>
-          <p:nvPr/>
-        </p:nvSpPr>
-        <p:spPr>
-          <a:xfrm>
-            <a:off x="5903824" y="2948940"/>
-            <a:ext cx="384048" cy="457200"/>
-          </a:xfrm>
-          <a:prstGeom prst="rect">
-            <a:avLst/>
-          </a:prstGeom>
-          <a:noFill/>
-          <a:ln/>
-        </p:spPr>
-        <p:txBody>
-          <a:bodyPr wrap="square" lIns="0" tIns="0" rIns="0" bIns="0" rtlCol="0" anchor="ctr"/>
-          <a:lstStyle/>
-          <a:p>
-            <a:pPr algn="ctr" indent="0" marL="0">
-              <a:buNone/>
-            </a:pPr>
-            <a:r>
-              <a:rPr lang="en-US" sz="2600" b="1" dirty="0">
-                <a:solidFill>
-                  <a:srgbClr val="94A3B8"/>
-                </a:solidFill>
-                <a:latin typeface="Apple SD Gothic Neo" pitchFamily="34" charset="0"/>
-                <a:ea typeface="Apple SD Gothic Neo" pitchFamily="34" charset="-122"/>
-                <a:cs typeface="Apple SD Gothic Neo" pitchFamily="34" charset="-120"/>
-              </a:rPr>
-              <a:t>+</a:t>
-            </a:r>
-            <a:endParaRPr lang="en-US" sz="2600" dirty="0"/>
-          </a:p>
-        </p:txBody>
-      </p:sp>
-      <p:sp>
-        <p:nvSpPr>
-          <p:cNvPr id="16" name="Shape 14"/>
-          <p:cNvSpPr/>
-          <p:nvPr/>
-        </p:nvSpPr>
-        <p:spPr>
-          <a:xfrm>
-            <a:off x="6543904" y="2194560"/>
-            <a:ext cx="2092376" cy="1965960"/>
-          </a:xfrm>
-          <a:prstGeom prst="roundRect">
-            <a:avLst>
-              <a:gd name="adj" fmla="val 5116"/>
+              <a:gd name="adj" fmla="val 4807"/>
             </a:avLst>
           </a:prstGeom>
           <a:solidFill>
             <a:srgbClr val="F5F3FF"/>
           </a:solidFill>
-          <a:ln w="12700">
+          <a:ln w="15875">
             <a:solidFill>
               <a:srgbClr val="C4B5FD"/>
             </a:solidFill>
@@ -13471,14 +13872,14 @@
       </p:sp>
       <p:sp>
         <p:nvSpPr>
-          <p:cNvPr id="17" name="Text 15"/>
-          <p:cNvSpPr/>
-          <p:nvPr/>
-        </p:nvSpPr>
-        <p:spPr>
-          <a:xfrm>
-            <a:off x="6726784" y="2578608"/>
-            <a:ext cx="1726616" cy="548640"/>
+          <p:cNvPr id="24" name="Text 22"/>
+          <p:cNvSpPr/>
+          <p:nvPr/>
+        </p:nvSpPr>
+        <p:spPr>
+          <a:xfrm>
+            <a:off x="9678695" y="2651760"/>
+            <a:ext cx="1799768" cy="603504"/>
           </a:xfrm>
           <a:prstGeom prst="rect">
             <a:avLst/>
@@ -13497,7 +13898,7 @@
               <a:buNone/>
             </a:pPr>
             <a:r>
-              <a:rPr lang="en-US" sz="1500" b="1" dirty="0">
+              <a:rPr lang="en-US" sz="1350" b="1" dirty="0">
                 <a:solidFill>
                   <a:srgbClr val="7C3AED"/>
                 </a:solidFill>
@@ -13505,22 +13906,22 @@
                 <a:ea typeface="Apple SD Gothic Neo" pitchFamily="34" charset="-122"/>
                 <a:cs typeface="Apple SD Gothic Neo" pitchFamily="34" charset="-120"/>
               </a:rPr>
-              <a:t>사육 규칙</a:t>
-            </a:r>
-            <a:endParaRPr lang="en-US" sz="1500" dirty="0"/>
-          </a:p>
-        </p:txBody>
-      </p:sp>
-      <p:sp>
-        <p:nvSpPr>
-          <p:cNvPr id="18" name="Text 16"/>
-          <p:cNvSpPr/>
-          <p:nvPr/>
-        </p:nvSpPr>
-        <p:spPr>
-          <a:xfrm>
-            <a:off x="6726784" y="3108960"/>
-            <a:ext cx="1726616" cy="256032"/>
+              <a:t>사육 도메인 규칙</a:t>
+            </a:r>
+            <a:endParaRPr lang="en-US" sz="1350" dirty="0"/>
+          </a:p>
+        </p:txBody>
+      </p:sp>
+      <p:sp>
+        <p:nvSpPr>
+          <p:cNvPr id="25" name="Text 23"/>
+          <p:cNvSpPr/>
+          <p:nvPr/>
+        </p:nvSpPr>
+        <p:spPr>
+          <a:xfrm>
+            <a:off x="9715271" y="3310128"/>
+            <a:ext cx="1726616" cy="237744"/>
           </a:xfrm>
           <a:prstGeom prst="rect">
             <a:avLst/>
@@ -13536,7 +13937,7 @@
               <a:buNone/>
             </a:pPr>
             <a:r>
-              <a:rPr lang="en-US" sz="1050" dirty="0">
+              <a:rPr lang="en-US" sz="1000" dirty="0">
                 <a:solidFill>
                   <a:srgbClr val="64748B"/>
                 </a:solidFill>
@@ -13546,20 +13947,20 @@
               </a:rPr>
               <a:t>domain rules</a:t>
             </a:r>
-            <a:endParaRPr lang="en-US" sz="1050" dirty="0"/>
-          </a:p>
-        </p:txBody>
-      </p:sp>
-      <p:sp>
-        <p:nvSpPr>
-          <p:cNvPr id="19" name="Text 17"/>
-          <p:cNvSpPr/>
-          <p:nvPr/>
-        </p:nvSpPr>
-        <p:spPr>
-          <a:xfrm>
-            <a:off x="6708496" y="3419856"/>
-            <a:ext cx="1763192" cy="640080"/>
+            <a:endParaRPr lang="en-US" sz="1000" dirty="0"/>
+          </a:p>
+        </p:txBody>
+      </p:sp>
+      <p:sp>
+        <p:nvSpPr>
+          <p:cNvPr id="26" name="Text 24"/>
+          <p:cNvSpPr/>
+          <p:nvPr/>
+        </p:nvSpPr>
+        <p:spPr>
+          <a:xfrm>
+            <a:off x="9678695" y="3602736"/>
+            <a:ext cx="1799768" cy="841248"/>
           </a:xfrm>
           <a:prstGeom prst="rect">
             <a:avLst/>
@@ -13573,12 +13974,12 @@
           <a:p>
             <a:pPr algn="ctr" indent="0" marL="0">
               <a:lnSpc>
-                <a:spcPct val="112000"/>
+                <a:spcPct val="114000"/>
               </a:lnSpc>
               <a:buNone/>
             </a:pPr>
             <a:r>
-              <a:rPr lang="en-US" sz="1080" dirty="0">
+              <a:rPr lang="en-US" sz="1020" dirty="0">
                 <a:solidFill>
                   <a:srgbClr val="1E293B"/>
                 </a:solidFill>
@@ -13586,222 +13987,26 @@
                 <a:ea typeface="Apple SD Gothic Neo" pitchFamily="34" charset="-122"/>
                 <a:cs typeface="Apple SD Gothic Neo" pitchFamily="34" charset="-120"/>
               </a:rPr>
-              <a:t>도메인 기준으로 AI 오판을 보정</a:t>
-            </a:r>
-            <a:endParaRPr lang="en-US" sz="1080" dirty="0"/>
-          </a:p>
-        </p:txBody>
-      </p:sp>
-      <p:sp>
-        <p:nvSpPr>
-          <p:cNvPr id="20" name="Text 18"/>
-          <p:cNvSpPr/>
-          <p:nvPr/>
-        </p:nvSpPr>
-        <p:spPr>
-          <a:xfrm>
-            <a:off x="8892311" y="2948940"/>
-            <a:ext cx="384048" cy="457200"/>
-          </a:xfrm>
-          <a:prstGeom prst="rect">
-            <a:avLst/>
-          </a:prstGeom>
-          <a:noFill/>
-          <a:ln/>
-        </p:spPr>
-        <p:txBody>
-          <a:bodyPr wrap="square" lIns="0" tIns="0" rIns="0" bIns="0" rtlCol="0" anchor="ctr"/>
-          <a:lstStyle/>
-          <a:p>
-            <a:pPr algn="ctr" indent="0" marL="0">
-              <a:buNone/>
-            </a:pPr>
-            <a:r>
-              <a:rPr lang="en-US" sz="2600" b="1" dirty="0">
-                <a:solidFill>
-                  <a:srgbClr val="94A3B8"/>
-                </a:solidFill>
-                <a:latin typeface="Apple SD Gothic Neo" pitchFamily="34" charset="0"/>
-                <a:ea typeface="Apple SD Gothic Neo" pitchFamily="34" charset="-122"/>
-                <a:cs typeface="Apple SD Gothic Neo" pitchFamily="34" charset="-120"/>
-              </a:rPr>
-              <a:t>+</a:t>
-            </a:r>
-            <a:endParaRPr lang="en-US" sz="2600" dirty="0"/>
-          </a:p>
-        </p:txBody>
-      </p:sp>
-      <p:sp>
-        <p:nvSpPr>
-          <p:cNvPr id="21" name="Shape 19"/>
-          <p:cNvSpPr/>
-          <p:nvPr/>
-        </p:nvSpPr>
-        <p:spPr>
-          <a:xfrm>
-            <a:off x="9532391" y="2194560"/>
-            <a:ext cx="2092376" cy="1965960"/>
+              <a:t>급이·탈피 주기 같은 사육 상식으로 AI의 명백한 오판을 걸러낸다</a:t>
+            </a:r>
+            <a:endParaRPr lang="en-US" sz="1020" dirty="0"/>
+          </a:p>
+        </p:txBody>
+      </p:sp>
+      <p:sp>
+        <p:nvSpPr>
+          <p:cNvPr id="27" name="Shape 25"/>
+          <p:cNvSpPr/>
+          <p:nvPr/>
+        </p:nvSpPr>
+        <p:spPr>
+          <a:xfrm>
+            <a:off x="566928" y="4754880"/>
+            <a:ext cx="11057839" cy="1225296"/>
           </a:xfrm>
           <a:prstGeom prst="roundRect">
             <a:avLst>
-              <a:gd name="adj" fmla="val 5116"/>
-            </a:avLst>
-          </a:prstGeom>
-          <a:solidFill>
-            <a:srgbClr val="FEF9EC"/>
-          </a:solidFill>
-          <a:ln w="12700">
-            <a:solidFill>
-              <a:srgbClr val="FCD34D"/>
-            </a:solidFill>
-            <a:prstDash val="solid"/>
-          </a:ln>
-          <a:effectLst>
-            <a:outerShdw sx="100000" sy="100000" kx="0" ky="0" algn="bl" rotWithShape="0" blurRad="88900" dist="25400" dir="5400000">
-              <a:srgbClr val="64748B">
-                <a:alpha val="16000"/>
-              </a:srgbClr>
-            </a:outerShdw>
-          </a:effectLst>
-        </p:spPr>
-      </p:sp>
-      <p:sp>
-        <p:nvSpPr>
-          <p:cNvPr id="22" name="Text 20"/>
-          <p:cNvSpPr/>
-          <p:nvPr/>
-        </p:nvSpPr>
-        <p:spPr>
-          <a:xfrm>
-            <a:off x="9715271" y="2578608"/>
-            <a:ext cx="1726616" cy="548640"/>
-          </a:xfrm>
-          <a:prstGeom prst="rect">
-            <a:avLst/>
-          </a:prstGeom>
-          <a:noFill/>
-          <a:ln/>
-        </p:spPr>
-        <p:txBody>
-          <a:bodyPr wrap="square" lIns="0" tIns="0" rIns="0" bIns="0" rtlCol="0" anchor="ctr"/>
-          <a:lstStyle/>
-          <a:p>
-            <a:pPr algn="ctr" indent="0" marL="0">
-              <a:lnSpc>
-                <a:spcPct val="100000"/>
-              </a:lnSpc>
-              <a:buNone/>
-            </a:pPr>
-            <a:r>
-              <a:rPr lang="en-US" sz="1500" b="1" dirty="0">
-                <a:solidFill>
-                  <a:srgbClr val="92400E"/>
-                </a:solidFill>
-                <a:latin typeface="Apple SD Gothic Neo" pitchFamily="34" charset="0"/>
-                <a:ea typeface="Apple SD Gothic Neo" pitchFamily="34" charset="-122"/>
-                <a:cs typeface="Apple SD Gothic Neo" pitchFamily="34" charset="-120"/>
-              </a:rPr>
-              <a:t>판단 재료 묶음</a:t>
-            </a:r>
-            <a:endParaRPr lang="en-US" sz="1500" dirty="0"/>
-          </a:p>
-        </p:txBody>
-      </p:sp>
-      <p:sp>
-        <p:nvSpPr>
-          <p:cNvPr id="23" name="Text 21"/>
-          <p:cNvSpPr/>
-          <p:nvPr/>
-        </p:nvSpPr>
-        <p:spPr>
-          <a:xfrm>
-            <a:off x="9715271" y="3108960"/>
-            <a:ext cx="1726616" cy="256032"/>
-          </a:xfrm>
-          <a:prstGeom prst="rect">
-            <a:avLst/>
-          </a:prstGeom>
-          <a:noFill/>
-          <a:ln/>
-        </p:spPr>
-        <p:txBody>
-          <a:bodyPr wrap="square" lIns="0" tIns="0" rIns="0" bIns="0" rtlCol="0" anchor="ctr"/>
-          <a:lstStyle/>
-          <a:p>
-            <a:pPr algn="ctr" indent="0" marL="0">
-              <a:buNone/>
-            </a:pPr>
-            <a:r>
-              <a:rPr lang="en-US" sz="1050" dirty="0">
-                <a:solidFill>
-                  <a:srgbClr val="64748B"/>
-                </a:solidFill>
-                <a:latin typeface="Courier New" pitchFamily="34" charset="0"/>
-                <a:ea typeface="Courier New" pitchFamily="34" charset="-122"/>
-                <a:cs typeface="Courier New" pitchFamily="34" charset="-120"/>
-              </a:rPr>
-              <a:t>context packet</a:t>
-            </a:r>
-            <a:endParaRPr lang="en-US" sz="1050" dirty="0"/>
-          </a:p>
-        </p:txBody>
-      </p:sp>
-      <p:sp>
-        <p:nvSpPr>
-          <p:cNvPr id="24" name="Text 22"/>
-          <p:cNvSpPr/>
-          <p:nvPr/>
-        </p:nvSpPr>
-        <p:spPr>
-          <a:xfrm>
-            <a:off x="9696983" y="3419856"/>
-            <a:ext cx="1763192" cy="640080"/>
-          </a:xfrm>
-          <a:prstGeom prst="rect">
-            <a:avLst/>
-          </a:prstGeom>
-          <a:noFill/>
-          <a:ln/>
-        </p:spPr>
-        <p:txBody>
-          <a:bodyPr wrap="square" lIns="0" tIns="0" rIns="0" bIns="0" rtlCol="0" anchor="t"/>
-          <a:lstStyle/>
-          <a:p>
-            <a:pPr algn="ctr" indent="0" marL="0">
-              <a:lnSpc>
-                <a:spcPct val="112000"/>
-              </a:lnSpc>
-              <a:buNone/>
-            </a:pPr>
-            <a:r>
-              <a:rPr lang="en-US" sz="1080" dirty="0">
-                <a:solidFill>
-                  <a:srgbClr val="1E293B"/>
-                </a:solidFill>
-                <a:latin typeface="Apple SD Gothic Neo" pitchFamily="34" charset="0"/>
-                <a:ea typeface="Apple SD Gothic Neo" pitchFamily="34" charset="-122"/>
-                <a:cs typeface="Apple SD Gothic Neo" pitchFamily="34" charset="-120"/>
-              </a:rPr>
-              <a:t>시간·ROI·움직임·전후 맥락을 함께 제공</a:t>
-            </a:r>
-            <a:endParaRPr lang="en-US" sz="1080" dirty="0"/>
-          </a:p>
-        </p:txBody>
-      </p:sp>
-      <p:sp>
-        <p:nvSpPr>
-          <p:cNvPr id="25" name="Shape 23"/>
-          <p:cNvSpPr/>
-          <p:nvPr/>
-        </p:nvSpPr>
-        <p:spPr>
-          <a:xfrm>
-            <a:off x="566928" y="4617720"/>
-            <a:ext cx="11057839" cy="1371600"/>
-          </a:xfrm>
-          <a:prstGeom prst="roundRect">
-            <a:avLst>
-              <a:gd name="adj" fmla="val 8000"/>
+              <a:gd name="adj" fmla="val 8955"/>
             </a:avLst>
           </a:prstGeom>
           <a:solidFill>
@@ -13819,14 +14024,14 @@
       </p:sp>
       <p:sp>
         <p:nvSpPr>
-          <p:cNvPr id="26" name="Text 24"/>
-          <p:cNvSpPr/>
-          <p:nvPr/>
-        </p:nvSpPr>
-        <p:spPr>
-          <a:xfrm>
-            <a:off x="978408" y="4818888"/>
-            <a:ext cx="10234879" cy="1005840"/>
+          <p:cNvPr id="28" name="Text 26"/>
+          <p:cNvSpPr/>
+          <p:nvPr/>
+        </p:nvSpPr>
+        <p:spPr>
+          <a:xfrm>
+            <a:off x="978408" y="4956048"/>
+            <a:ext cx="10234879" cy="859536"/>
           </a:xfrm>
           <a:prstGeom prst="rect">
             <a:avLst/>
@@ -13845,7 +14050,7 @@
               <a:buNone/>
             </a:pPr>
             <a:r>
-              <a:rPr lang="en-US" sz="1600" b="1" dirty="0">
+              <a:rPr lang="en-US" sz="1500" b="1" dirty="0">
                 <a:solidFill>
                   <a:srgbClr val="FCD34D"/>
                 </a:solidFill>
@@ -13853,7 +14058,7 @@
                 <a:ea typeface="Apple SD Gothic Neo" pitchFamily="34" charset="-122"/>
                 <a:cs typeface="Apple SD Gothic Neo" pitchFamily="34" charset="-120"/>
               </a:rPr>
-              <a:t>= 최종 행동 판단</a:t>
+              <a:t>결합의 결과</a:t>
             </a:r>
             <a:pPr indent="0" marL="0">
               <a:lnSpc>
@@ -13862,7 +14067,7 @@
               <a:buNone/>
             </a:pPr>
             <a:r>
-              <a:rPr lang="en-US" sz="800" dirty="0">
+              <a:rPr lang="en-US" sz="700" dirty="0">
                 <a:solidFill>
                   <a:srgbClr val="E2E8F0"/>
                 </a:solidFill>
@@ -13880,7 +14085,7 @@
               <a:buNone/>
             </a:pPr>
             <a:r>
-              <a:rPr lang="en-US" sz="1400" dirty="0">
+              <a:rPr lang="en-US" sz="1350" dirty="0">
                 <a:solidFill>
                   <a:srgbClr val="E2E8F0"/>
                 </a:solidFill>
@@ -13888,7 +14093,7 @@
                 <a:ea typeface="Apple SD Gothic Neo" pitchFamily="34" charset="-122"/>
                 <a:cs typeface="Apple SD Gothic Neo" pitchFamily="34" charset="-120"/>
               </a:rPr>
-              <a:t>RBA의 핵심 자산은 모델 하나가 아니라, </a:t>
+              <a:t>① 데이터가 쌓일수록 정확도가 오르고, ② 영상 밖 IoT 정황증거까지 더해 오판이 줄어든다. </a:t>
             </a:r>
             <a:pPr indent="0" marL="0">
               <a:lnSpc>
@@ -13897,7 +14102,7 @@
               <a:buNone/>
             </a:pPr>
             <a:r>
-              <a:rPr lang="en-US" sz="1400" b="1" dirty="0">
+              <a:rPr lang="en-US" sz="1350" b="1" dirty="0">
                 <a:solidFill>
                   <a:srgbClr val="FFFFFF"/>
                 </a:solidFill>
@@ -13905,26 +14110,9 @@
                 <a:ea typeface="Apple SD Gothic Neo" pitchFamily="34" charset="-122"/>
                 <a:cs typeface="Apple SD Gothic Neo" pitchFamily="34" charset="-120"/>
               </a:rPr>
-              <a:t>행동 데이터와 사육 맥락이 함께 쌓이는 판단 구조</a:t>
-            </a:r>
-            <a:pPr indent="0" marL="0">
-              <a:lnSpc>
-                <a:spcPct val="118000"/>
-              </a:lnSpc>
-              <a:buNone/>
-            </a:pPr>
-            <a:r>
-              <a:rPr lang="en-US" sz="1400" dirty="0">
-                <a:solidFill>
-                  <a:srgbClr val="E2E8F0"/>
-                </a:solidFill>
-                <a:latin typeface="Apple SD Gothic Neo" pitchFamily="34" charset="0"/>
-                <a:ea typeface="Apple SD Gothic Neo" pitchFamily="34" charset="-122"/>
-                <a:cs typeface="Apple SD Gothic Neo" pitchFamily="34" charset="-120"/>
-              </a:rPr>
-              <a:t>다. 외부 AI를 그대로 가져다 쓰는 경쟁자가 따라오기 어려운 지점이 바로 여기다.</a:t>
-            </a:r>
-            <a:endParaRPr lang="en-US" sz="1400" dirty="0"/>
+              <a:t>외부 AI 하나를 가져다 쓰는 경쟁자는 이 축적을 복제할 수 없다.</a:t>
+            </a:r>
+            <a:endParaRPr lang="en-US" sz="1350" dirty="0"/>
           </a:p>
         </p:txBody>
       </p:sp>
